--- a/content/W03/D1/slides/C2_W03_D01_introduction_STUDENT.pptx
+++ b/content/W03/D1/slides/C2_W03_D01_introduction_STUDENT.pptx
@@ -607,12 +607,12 @@
           <a:lstStyle/>
           <a:p>
             <a:r>
-              <a:t>LIVE, the Programme Head, 4 minutes. Walk the days left to right. Three things to land:</a:t>
-            </a:r>
-          </a:p>
-          <a:p>
-            <a:r>
-              <a:t>the headline claim is stated on Wednesday so that Thursday tests it rather than finishes it; the</a:t>
+              <a:t>LIVE, the Programme Head, 4 minutes. Walk the stages left to right. Three things to land:</a:t>
+            </a:r>
+          </a:p>
+          <a:p>
+            <a:r>
+              <a:t>the headline claim is stated in stage 2 so that stage 3 tests it rather than finishes it; the</a:t>
             </a:r>
           </a:p>
           <a:p>
@@ -627,7 +627,7 @@
           </a:p>
           <a:p>
             <a:r>
-              <a:t>Tuesday 20 October is a gazetted holiday. The time after the second block each day is open build</a:t>
+              <a:t>One day this week is a gazetted holiday. The time after the second block each day is open build</a:t>
             </a:r>
           </a:p>
           <a:p>
@@ -1312,7 +1312,7 @@
           </a:p>
           <a:p>
             <a:r>
-              <a:t>collected report rested on. The Your-turn question is Wednesday's interview question, asked early on</a:t>
+              <a:t>collected report rested on. The Your-turn question is a later build day's interview question, asked early on</a:t>
             </a:r>
           </a:p>
           <a:p>
@@ -1552,12 +1552,12 @@
           <a:lstStyle/>
           <a:p>
             <a:r>
-              <a:t>LIVE, the Programme Head, 2 minutes. Thursday's viva reads this log. Prepared answers break where</a:t>
-            </a:r>
-          </a:p>
-          <a:p>
-            <a:r>
-              <a:t>the log is thin, so an entry written on Monday is worth more than three written on Thursday night.</a:t>
+              <a:t>LIVE, the Programme Head, 2 minutes. The mock's viva reads this log. Prepared answers break where</a:t>
+            </a:r>
+          </a:p>
+          <a:p>
+            <a:r>
+              <a:t>the log is thin, so an entry written today is worth more than three written the night before the viva.</a:t>
             </a:r>
           </a:p>
           <a:p>
@@ -1637,7 +1637,7 @@
           </a:p>
           <a:p>
             <a:r>
-              <a:t>cannot answer them on Wednesday is stuck and should say so, because Thursday opens the mocks.</a:t>
+              <a:t>cannot answer them at the checkpoint is stuck and should say so then, because the mocks follow.</a:t>
             </a:r>
           </a:p>
           <a:p>
@@ -1832,12 +1832,12 @@
           </a:p>
           <a:p>
             <a:r>
-              <a:t>it in your challenges log as a hypothesis, and test it on Wednesday. A hypothesis said aloud on</a:t>
-            </a:r>
-          </a:p>
-          <a:p>
-            <a:r>
-              <a:t>Monday is a guess the whole room hears.</a:t>
+              <a:t>it in your challenges log as a hypothesis, and test it once the build starts. A hypothesis said</a:t>
+            </a:r>
+          </a:p>
+          <a:p>
+            <a:r>
+              <a:t>aloud today is a guess the whole room hears.</a:t>
             </a:r>
           </a:p>
         </p:txBody>
@@ -6071,7 +6071,7 @@
                 </a:solidFill>
                 <a:latin typeface="Georgia"/>
               </a:rPr>
-              <a:t>The week, day by day</a:t>
+              <a:t>The week, in five stages</a:t>
             </a:r>
           </a:p>
         </p:txBody>
@@ -6106,7 +6106,7 @@
                 </a:solidFill>
                 <a:latin typeface="Calibri"/>
               </a:rPr>
-              <a:t>Tuesday is Dussehra, so Wednesday carries two build days.</a:t>
+              <a:t>A holiday falls inside the week, so one day carries two build days.</a:t>
             </a:r>
           </a:p>
         </p:txBody>
@@ -6185,7 +6185,7 @@
                 </a:solidFill>
                 <a:latin typeface="Calibri"/>
               </a:rPr>
-              <a:t>MONDAY</a:t>
+              <a:t>STAGE 1</a:t>
             </a:r>
           </a:p>
         </p:txBody>
@@ -6388,7 +6388,7 @@
                 </a:solidFill>
                 <a:latin typeface="Calibri"/>
               </a:rPr>
-              <a:t>WEDNESDAY</a:t>
+              <a:t>STAGE 2</a:t>
             </a:r>
           </a:p>
         </p:txBody>
@@ -6591,7 +6591,7 @@
                 </a:solidFill>
                 <a:latin typeface="Calibri"/>
               </a:rPr>
-              <a:t>THURSDAY</a:t>
+              <a:t>STAGE 3</a:t>
             </a:r>
           </a:p>
         </p:txBody>
@@ -6794,7 +6794,7 @@
                 </a:solidFill>
                 <a:latin typeface="Calibri"/>
               </a:rPr>
-              <a:t>FRIDAY</a:t>
+              <a:t>STAGE 4</a:t>
             </a:r>
           </a:p>
         </p:txBody>
@@ -6997,7 +6997,7 @@
                 </a:solidFill>
                 <a:latin typeface="Calibri"/>
               </a:rPr>
-              <a:t>SATURDAY</a:t>
+              <a:t>STAGE 5</a:t>
             </a:r>
           </a:p>
         </p:txBody>
@@ -17574,7 +17574,7 @@
                 </a:solidFill>
                 <a:latin typeface="Georgia"/>
               </a:rPr>
-              <a:t>The close, and Wednesday's checkpoint</a:t>
+              <a:t>The close, and the next checkpoint</a:t>
             </a:r>
           </a:p>
         </p:txBody>
@@ -17609,7 +17609,7 @@
                 </a:solidFill>
                 <a:latin typeface="Calibri"/>
               </a:rPr>
-              <a:t>Scopes pinned today; three checkpoint questions per group on Wednesday.</a:t>
+              <a:t>Scopes pinned today; three checkpoint questions per group next build day.</a:t>
             </a:r>
           </a:p>
         </p:txBody>
@@ -17624,7 +17624,7 @@
         </p:nvGraphicFramePr>
         <p:xfrm>
           <a:off x="530352" y="1956816"/>
-          <a:ext cx="11130990" cy="1849120"/>
+          <a:ext cx="11130990" cy="2332736"/>
         </p:xfrm>
         <a:graphic>
           <a:graphicData uri="http://schemas.openxmlformats.org/drawingml/2006/table">
@@ -17633,8 +17633,8 @@
                 <a:tableStyleId>{2D5ABB26-0587-4C30-8999-92F81FD0307C}</a:tableStyleId>
               </a:tblPr>
               <a:tblGrid>
-                <a:gridCol w="3380744"/>
-                <a:gridCol w="7750246"/>
+                <a:gridCol w="4389567"/>
+                <a:gridCol w="6741423"/>
               </a:tblGrid>
               <a:tr h="369824">
                 <a:tc>
@@ -17728,7 +17728,7 @@
                   </a:tcPr>
                 </a:tc>
               </a:tr>
-              <a:tr h="369824">
+              <a:tr h="611632">
                 <a:tc>
                   <a:txBody>
                     <a:bodyPr/>
@@ -17741,7 +17741,7 @@
                           </a:solidFill>
                           <a:latin typeface="Calibri"/>
                         </a:rPr>
-                        <a:t>Tonight, open build time</a:t>
+                        <a:t>After today's blocks, open build time</a:t>
                       </a:r>
                     </a:p>
                   </a:txBody>
@@ -17787,7 +17787,7 @@
                           </a:solidFill>
                           <a:latin typeface="Calibri"/>
                         </a:rPr>
-                        <a:t>Wednesday, 30 min</a:t>
+                        <a:t>Next build day, 30 min</a:t>
                       </a:r>
                     </a:p>
                   </a:txBody>
@@ -17820,7 +17820,7 @@
                   </a:tcPr>
                 </a:tc>
               </a:tr>
-              <a:tr h="369824">
+              <a:tr h="611632">
                 <a:tc>
                   <a:txBody>
                     <a:bodyPr/>
@@ -17833,7 +17833,7 @@
                           </a:solidFill>
                           <a:latin typeface="Calibri"/>
                         </a:rPr>
-                        <a:t>Wednesday, 20 min</a:t>
+                        <a:t>Next build day, 20 min</a:t>
                       </a:r>
                     </a:p>
                   </a:txBody>
@@ -17878,7 +17878,7 @@
         </p:nvSpPr>
         <p:spPr>
           <a:xfrm>
-            <a:off x="530352" y="4061968"/>
+            <a:off x="530352" y="4545584"/>
             <a:ext cx="11130991" cy="862584"/>
           </a:xfrm>
           <a:prstGeom prst="roundRect">
@@ -17932,7 +17932,7 @@
         </p:nvSpPr>
         <p:spPr>
           <a:xfrm>
-            <a:off x="758952" y="4264660"/>
+            <a:off x="758952" y="4748276"/>
             <a:ext cx="457200" cy="457200"/>
           </a:xfrm>
           <a:prstGeom prst="ellipse">
@@ -17984,7 +17984,7 @@
         </p:blipFill>
         <p:spPr>
           <a:xfrm>
-            <a:off x="868680" y="4374388"/>
+            <a:off x="868680" y="4858004"/>
             <a:ext cx="237744" cy="237744"/>
           </a:xfrm>
           <a:prstGeom prst="rect">
@@ -18000,7 +18000,7 @@
         </p:nvSpPr>
         <p:spPr>
           <a:xfrm>
-            <a:off x="1399031" y="4208272"/>
+            <a:off x="1399031" y="4691888"/>
             <a:ext cx="9987991" cy="160401"/>
           </a:xfrm>
           <a:prstGeom prst="rect">
@@ -18035,7 +18035,7 @@
         </p:nvSpPr>
         <p:spPr>
           <a:xfrm>
-            <a:off x="1399031" y="4427728"/>
+            <a:off x="1399031" y="4911344"/>
             <a:ext cx="9987991" cy="423672"/>
           </a:xfrm>
           <a:prstGeom prst="rect">
@@ -20562,7 +20562,7 @@
                 </a:solidFill>
                 <a:latin typeface="Calibri"/>
               </a:rPr>
-              <a:t>"I do not need a dashboard. I need to know where the 13 points went, and what to do on Monday."</a:t>
+              <a:t>"I do not need a dashboard. I need to know where the 13 points went, and what to do next."</a:t>
             </a:r>
           </a:p>
         </p:txBody>

--- a/content/W03/D1/slides/C2_W03_D01_introduction_STUDENT.pptx
+++ b/content/W03/D1/slides/C2_W03_D01_introduction_STUDENT.pptx
@@ -26,6 +26,9 @@
     <p:sldId id="274" r:id="rId26"/>
     <p:sldId id="275" r:id="rId27"/>
     <p:sldId id="276" r:id="rId28"/>
+    <p:sldId id="277" r:id="rId29"/>
+    <p:sldId id="278" r:id="rId30"/>
+    <p:sldId id="279" r:id="rId31"/>
   </p:sldIdLst>
   <p:sldSz cx="12191695" cy="6858000" type="screen4x3"/>
   <p:notesSz cx="6858000" cy="9144000"/>
@@ -607,12 +610,12 @@
           <a:lstStyle/>
           <a:p>
             <a:r>
-              <a:t>LIVE, the Programme Head, 4 minutes. Walk the stages left to right. Three things to land:</a:t>
-            </a:r>
-          </a:p>
-          <a:p>
-            <a:r>
-              <a:t>the headline claim is stated in stage 2 so that stage 3 tests it rather than finishes it; the</a:t>
+              <a:t>LIVE, the Programme Head, 4 minutes. Walk the days left to right. Three things to land:</a:t>
+            </a:r>
+          </a:p>
+          <a:p>
+            <a:r>
+              <a:t>the headline claim is stated on Wednesday so that Thursday tests it rather than finishes it; the</a:t>
             </a:r>
           </a:p>
           <a:p>
@@ -622,17 +625,17 @@
           </a:p>
           <a:p>
             <a:r>
-              <a:t>group discussions run on Kalpa Health's problem space and are a thread separate from the project.</a:t>
-            </a:r>
-          </a:p>
-          <a:p>
-            <a:r>
-              <a:t>One day this week is a gazetted holiday. The time after the second block each day is open build</a:t>
-            </a:r>
-          </a:p>
-          <a:p>
-            <a:r>
-              <a:t>time with the TAs.</a:t>
+              <a:t>GDs run on Kalpa Health's problem space and are a thread separate from the project.</a:t>
+            </a:r>
+          </a:p>
+          <a:p>
+            <a:r>
+              <a:t>Tuesday 20 October is Dussehra, a holiday with no session. The time after the second block each</a:t>
+            </a:r>
+          </a:p>
+          <a:p>
+            <a:r>
+              <a:t>day is open build time with the TAs.</a:t>
             </a:r>
           </a:p>
         </p:txBody>
@@ -792,12 +795,12 @@
           </a:p>
           <a:p>
             <a:r>
-              <a:t>presentation, mock 30, GD 30. Say nothing about criteria: the rubrics are not published yet, and a</a:t>
-            </a:r>
-          </a:p>
-          <a:p>
-            <a:r>
-              <a:t>learner who asks is told they arrive when they are approved.</a:t>
+              <a:t>presentation, mock 30, GD 30. The next three slides carry the three rubrics, and every brief</a:t>
+            </a:r>
+          </a:p>
+          <a:p>
+            <a:r>
+              <a:t>carries the mini project's.</a:t>
             </a:r>
           </a:p>
           <a:p>
@@ -877,17 +880,17 @@
           <a:lstStyle/>
           <a:p>
             <a:r>
-              <a:t>LIVE. Chapter three runs about 15 minutes. Every picture is shown exactly as the room drew it in</a:t>
-            </a:r>
-          </a:p>
-          <a:p>
-            <a:r>
-              <a:t>Kalpa Retail. None is redrawn for Kalpa Health on screen: drawing that version is each group's work</a:t>
-            </a:r>
-          </a:p>
-          <a:p>
-            <a:r>
-              <a:t>today, in the translation worksheet.</a:t>
+              <a:t>LIVE, the Programme Head, 2 minutes. Read the five criteria top to bottom and stop on the last</a:t>
+            </a:r>
+          </a:p>
+          <a:p>
+            <a:r>
+              <a:t>one: every member answers a challenge on the caveat, so a group that splits the work and not the</a:t>
+            </a:r>
+          </a:p>
+          <a:p>
+            <a:r>
+              <a:t>understanding loses marks one learner at a time.</a:t>
             </a:r>
           </a:p>
         </p:txBody>
@@ -957,27 +960,12 @@
           <a:lstStyle/>
           <a:p>
             <a:r>
-              <a:t>LIVE, the Programme Head, 3 minutes. This is Week 1 Monday's tree, word for word. Ask the room to</a:t>
-            </a:r>
-          </a:p>
-          <a:p>
-            <a:r>
-              <a:t>name one box's Kalpa Health word in the chat, and stop at one. Every group draws its own version in</a:t>
-            </a:r>
-          </a:p>
-          <a:p>
-            <a:r>
-              <a:t>the worksheet, and sub-problem 1 draws it in full.</a:t>
-            </a:r>
-          </a:p>
-          <a:p>
-            <a:r>
-              <a:t>Watch for a learner who draws the Kalpa Health tree in the chat. Thank them and ask them to take it</a:t>
-            </a:r>
-          </a:p>
-          <a:p>
-            <a:r>
-              <a:t>to their group; the room does not get a shared answer today.</a:t>
+              <a:t>LIVE, the Programme Head, 2 minutes. The technical half is Weeks 1 and 2; the viva half is the</a:t>
+            </a:r>
+          </a:p>
+          <a:p>
+            <a:r>
+              <a:t>group's own work, which is why the challenges log is revision material.</a:t>
             </a:r>
           </a:p>
         </p:txBody>
@@ -1047,17 +1035,12 @@
           <a:lstStyle/>
           <a:p>
             <a:r>
-              <a:t>LIVE, the Programme Head, 2 minutes. Week 1 Tuesday's ladder, unchanged. Remind the room that</a:t>
-            </a:r>
-          </a:p>
-          <a:p>
-            <a:r>
-              <a:t>Meera's "we are losing customers" was disproved on rung 1 in Kalpa Retail. Do not name any Kalpa</a:t>
-            </a:r>
-          </a:p>
-          <a:p>
-            <a:r>
-              <a:t>Health symptom that might fail rung 1; that is for the groups to find.</a:t>
+              <a:t>LIVE, the Programme Head, 2 minutes. The GD is a thread separate from the project. Point at</a:t>
+            </a:r>
+          </a:p>
+          <a:p>
+            <a:r>
+              <a:t>"Engages": bringing a quiet member in earns marks, and talking over one does not.</a:t>
             </a:r>
           </a:p>
         </p:txBody>
@@ -1127,27 +1110,17 @@
           <a:lstStyle/>
           <a:p>
             <a:r>
-              <a:t>LIVE, the Programme Head, 2 minutes. This is Anand's bridge from Week 1 Wednesday and one row of</a:t>
-            </a:r>
-          </a:p>
-          <a:p>
-            <a:r>
-              <a:t>that day's decisions log. The decisions log this week has the same five columns, in</a:t>
-            </a:r>
-          </a:p>
-          <a:p>
-            <a:r>
-              <a:t>C2_W03_D01_decisions_log_STUDENT.xlsx, and its Reconcile sheet checks input against clean plus</a:t>
-            </a:r>
-          </a:p>
-          <a:p>
-            <a:r>
-              <a:t>removed for every file.</a:t>
-            </a:r>
-          </a:p>
-          <a:p>
-            <a:r>
-              <a:t>Do not describe any Kalpa Health file's condition. "Profile before you touch" is the whole message.</a:t>
+              <a:t>LIVE. Chapter three runs about 15 minutes. Every picture is shown exactly as the room drew it in</a:t>
+            </a:r>
+          </a:p>
+          <a:p>
+            <a:r>
+              <a:t>Kalpa Retail. None is redrawn for Kalpa Health on screen: drawing that version is each group's work</a:t>
+            </a:r>
+          </a:p>
+          <a:p>
+            <a:r>
+              <a:t>today, in the translation worksheet.</a:t>
             </a:r>
           </a:p>
         </p:txBody>
@@ -1217,27 +1190,27 @@
           <a:lstStyle/>
           <a:p>
             <a:r>
-              <a:t>LIVE, the Programme Head, 2 minutes. Week 1 Thursday's picture of the monsoon discount. The</a:t>
-            </a:r>
-          </a:p>
-          <a:p>
-            <a:r>
-              <a:t>permutation test asked whether chance could produce a gap; the fair comparison asked what else</a:t>
-            </a:r>
-          </a:p>
-          <a:p>
-            <a:r>
-              <a:t>differed between the groups. Both are in the room's notes.</a:t>
-            </a:r>
-          </a:p>
-          <a:p>
-            <a:r>
-              <a:t>Do not answer the Your-turn question on screen. More than one sub-problem compares two groups, and</a:t>
-            </a:r>
-          </a:p>
-          <a:p>
-            <a:r>
-              <a:t>each group decides for itself what a fair comparison needs.</a:t>
+              <a:t>LIVE, the Programme Head, 3 minutes. This is Week 1 Monday's tree, word for word. Ask the room to</a:t>
+            </a:r>
+          </a:p>
+          <a:p>
+            <a:r>
+              <a:t>name one box's Kalpa Health word in the chat, and stop at one. Every group draws its own version in</a:t>
+            </a:r>
+          </a:p>
+          <a:p>
+            <a:r>
+              <a:t>the worksheet, and sub-problem 1 draws it in full.</a:t>
+            </a:r>
+          </a:p>
+          <a:p>
+            <a:r>
+              <a:t>Watch for a learner who draws the Kalpa Health tree in the chat. Thank them and ask them to take it</a:t>
+            </a:r>
+          </a:p>
+          <a:p>
+            <a:r>
+              <a:t>to their group; the room does not get a shared answer today.</a:t>
             </a:r>
           </a:p>
         </p:txBody>
@@ -1307,17 +1280,17 @@
           <a:lstStyle/>
           <a:p>
             <a:r>
-              <a:t>LIVE, the Programme Head, 2 minutes. Week 2 Tuesday's rule for joins, the one Anand's booked-against-</a:t>
-            </a:r>
-          </a:p>
-          <a:p>
-            <a:r>
-              <a:t>collected report rested on. The Your-turn question is a later build day's interview question, asked early on</a:t>
-            </a:r>
-          </a:p>
-          <a:p>
-            <a:r>
-              <a:t>purpose; leave it open.</a:t>
+              <a:t>LIVE, the Programme Head, 2 minutes. Week 1 Tuesday's ladder, unchanged. Remind the room that</a:t>
+            </a:r>
+          </a:p>
+          <a:p>
+            <a:r>
+              <a:t>Meera's "we are losing customers" was disproved on rung 1 in Kalpa Retail. Leave the Your-turn</a:t>
+            </a:r>
+          </a:p>
+          <a:p>
+            <a:r>
+              <a:t>question open; each group answers it for its own question.</a:t>
             </a:r>
           </a:p>
         </p:txBody>
@@ -1387,27 +1360,32 @@
           <a:lstStyle/>
           <a:p>
             <a:r>
-              <a:t>LIVE, the Programme Head, 3 minutes. The worksheet is C2_W03_D01_translation_worksheet_STUDENT.md in</a:t>
-            </a:r>
-          </a:p>
-          <a:p>
-            <a:r>
-              <a:t>the briefs folder; each group copies it into its own repository. The three pairs start the map, and</a:t>
-            </a:r>
-          </a:p>
-          <a:p>
-            <a:r>
-              <a:t>each group adds at least five of its own. The pairs that behave differently are the valuable ones.</a:t>
-            </a:r>
-          </a:p>
-          <a:p>
-            <a:r>
-              <a:t>The worksheet also asks the cost-of-error question and ends with a one-sentence scope the group pins</a:t>
-            </a:r>
-          </a:p>
-          <a:p>
-            <a:r>
-              <a:t>at the close. Entry one of the challenges log is due before the close.</a:t>
+              <a:t>LIVE, the Programme Head, 2 minutes. This is Anand's bridge from Week 1 Wednesday and two rows of</a:t>
+            </a:r>
+          </a:p>
+          <a:p>
+            <a:r>
+              <a:t>that day's decisions log. The duplicates were the only move; the order with no status stayed in</a:t>
+            </a:r>
+          </a:p>
+          <a:p>
+            <a:r>
+              <a:t>Q2, and the unreadable amount was one copy of a pair whose twin stayed. The decisions log this week has the same five columns, in</a:t>
+            </a:r>
+          </a:p>
+          <a:p>
+            <a:r>
+              <a:t>C2_W03_D01_decisions_log_STUDENT.xlsx, and its Reconcile sheet checks input against clean plus</a:t>
+            </a:r>
+          </a:p>
+          <a:p>
+            <a:r>
+              <a:t>removed for every file.</a:t>
+            </a:r>
+          </a:p>
+          <a:p>
+            <a:r>
+              <a:t>"Profile before you touch" is the whole message.</a:t>
             </a:r>
           </a:p>
         </p:txBody>
@@ -1552,17 +1530,27 @@
           <a:lstStyle/>
           <a:p>
             <a:r>
-              <a:t>LIVE, the Programme Head, 2 minutes. The mock's viva reads this log. Prepared answers break where</a:t>
-            </a:r>
-          </a:p>
-          <a:p>
-            <a:r>
-              <a:t>the log is thin, so an entry written today is worth more than three written the night before the viva.</a:t>
-            </a:r>
-          </a:p>
-          <a:p>
-            <a:r>
-              <a:t>A challenge that needed a cleaning or matching decision also goes in the decisions log.</a:t>
+              <a:t>LIVE, the Programme Head, 2 minutes. Week 1 Thursday's picture of the monsoon discount. The</a:t>
+            </a:r>
+          </a:p>
+          <a:p>
+            <a:r>
+              <a:t>permutation test asked whether chance could produce a gap; the fair comparison asked what else</a:t>
+            </a:r>
+          </a:p>
+          <a:p>
+            <a:r>
+              <a:t>differed between the groups. Both are in the room's notes.</a:t>
+            </a:r>
+          </a:p>
+          <a:p>
+            <a:r>
+              <a:t>Do not answer the Your-turn question on screen. More than one sub-problem compares two groups, and</a:t>
+            </a:r>
+          </a:p>
+          <a:p>
+            <a:r>
+              <a:t>each group decides for itself what a fair comparison needs.</a:t>
             </a:r>
           </a:p>
         </p:txBody>
@@ -1632,12 +1620,272 @@
           <a:lstStyle/>
           <a:p>
             <a:r>
+              <a:t>LIVE, the Programme Head, 2 minutes. Week 2 Tuesday's rule for joins, the one Anand's booked-against-</a:t>
+            </a:r>
+          </a:p>
+          <a:p>
+            <a:r>
+              <a:t>collected report rested on. Leave the Your-turn question open; each group answers it in its own</a:t>
+            </a:r>
+          </a:p>
+          <a:p>
+            <a:r>
+              <a:t>build.</a:t>
+            </a:r>
+          </a:p>
+        </p:txBody>
+      </p:sp>
+      <p:sp>
+        <p:nvSpPr>
+          <p:cNvPr id="4" name="Slide Number Placeholder 3"/>
+          <p:cNvSpPr>
+            <a:spLocks noGrp="1"/>
+          </p:cNvSpPr>
+          <p:nvPr>
+            <p:ph type="sldNum" idx="5" sz="quarter"/>
+          </p:nvPr>
+        </p:nvSpPr>
+        <p:spPr/>
+      </p:sp>
+    </p:spTree>
+  </p:cSld>
+  <p:clrMapOvr>
+    <a:masterClrMapping/>
+  </p:clrMapOvr>
+</p:notes>
+</file>
+
+<file path=ppt/notesSlides/notesSlide22.xml><?xml version="1.0" encoding="utf-8"?>
+<p:notes xmlns:a="http://schemas.openxmlformats.org/drawingml/2006/main" xmlns:p="http://schemas.openxmlformats.org/presentationml/2006/main" xmlns:r="http://schemas.openxmlformats.org/officeDocument/2006/relationships">
+  <p:cSld>
+    <p:spTree>
+      <p:nvGrpSpPr>
+        <p:cNvPr id="1" name=""/>
+        <p:cNvGrpSpPr/>
+        <p:nvPr/>
+      </p:nvGrpSpPr>
+      <p:grpSpPr>
+        <a:xfrm>
+          <a:off x="0" y="0"/>
+          <a:ext cx="0" cy="0"/>
+          <a:chOff x="0" y="0"/>
+          <a:chExt cx="0" cy="0"/>
+        </a:xfrm>
+      </p:grpSpPr>
+      <p:sp>
+        <p:nvSpPr>
+          <p:cNvPr id="2" name="Slide Image Placeholder 1"/>
+          <p:cNvSpPr>
+            <a:spLocks noGrp="1"/>
+          </p:cNvSpPr>
+          <p:nvPr>
+            <p:ph type="sldImg" idx="2"/>
+          </p:nvPr>
+        </p:nvSpPr>
+        <p:spPr/>
+      </p:sp>
+      <p:sp>
+        <p:nvSpPr>
+          <p:cNvPr id="3" name="Notes Placeholder 2"/>
+          <p:cNvSpPr>
+            <a:spLocks noGrp="1"/>
+          </p:cNvSpPr>
+          <p:nvPr>
+            <p:ph type="body" idx="3" sz="quarter"/>
+          </p:nvPr>
+        </p:nvSpPr>
+        <p:spPr/>
+        <p:txBody>
+          <a:bodyPr/>
+          <a:lstStyle/>
+          <a:p>
+            <a:r>
+              <a:t>LIVE, the Programme Head, 3 minutes. The worksheet is C2_W03_D01_translation_worksheet_STUDENT.md in</a:t>
+            </a:r>
+          </a:p>
+          <a:p>
+            <a:r>
+              <a:t>the briefs folder; each group copies it into its own repository. The three pairs start the map, and</a:t>
+            </a:r>
+          </a:p>
+          <a:p>
+            <a:r>
+              <a:t>each group adds at least five of its own. The pairs that behave differently are the valuable ones.</a:t>
+            </a:r>
+          </a:p>
+          <a:p>
+            <a:r>
+              <a:t>The worksheet also asks the cost-of-error question and ends with a one-sentence scope the group pins</a:t>
+            </a:r>
+          </a:p>
+          <a:p>
+            <a:r>
+              <a:t>at the close. Entry one of the challenges log is due before the close.</a:t>
+            </a:r>
+          </a:p>
+        </p:txBody>
+      </p:sp>
+      <p:sp>
+        <p:nvSpPr>
+          <p:cNvPr id="4" name="Slide Number Placeholder 3"/>
+          <p:cNvSpPr>
+            <a:spLocks noGrp="1"/>
+          </p:cNvSpPr>
+          <p:nvPr>
+            <p:ph type="sldNum" idx="5" sz="quarter"/>
+          </p:nvPr>
+        </p:nvSpPr>
+        <p:spPr/>
+      </p:sp>
+    </p:spTree>
+  </p:cSld>
+  <p:clrMapOvr>
+    <a:masterClrMapping/>
+  </p:clrMapOvr>
+</p:notes>
+</file>
+
+<file path=ppt/notesSlides/notesSlide23.xml><?xml version="1.0" encoding="utf-8"?>
+<p:notes xmlns:a="http://schemas.openxmlformats.org/drawingml/2006/main" xmlns:p="http://schemas.openxmlformats.org/presentationml/2006/main" xmlns:r="http://schemas.openxmlformats.org/officeDocument/2006/relationships">
+  <p:cSld>
+    <p:spTree>
+      <p:nvGrpSpPr>
+        <p:cNvPr id="1" name=""/>
+        <p:cNvGrpSpPr/>
+        <p:nvPr/>
+      </p:nvGrpSpPr>
+      <p:grpSpPr>
+        <a:xfrm>
+          <a:off x="0" y="0"/>
+          <a:ext cx="0" cy="0"/>
+          <a:chOff x="0" y="0"/>
+          <a:chExt cx="0" cy="0"/>
+        </a:xfrm>
+      </p:grpSpPr>
+      <p:sp>
+        <p:nvSpPr>
+          <p:cNvPr id="2" name="Slide Image Placeholder 1"/>
+          <p:cNvSpPr>
+            <a:spLocks noGrp="1"/>
+          </p:cNvSpPr>
+          <p:nvPr>
+            <p:ph type="sldImg" idx="2"/>
+          </p:nvPr>
+        </p:nvSpPr>
+        <p:spPr/>
+      </p:sp>
+      <p:sp>
+        <p:nvSpPr>
+          <p:cNvPr id="3" name="Notes Placeholder 2"/>
+          <p:cNvSpPr>
+            <a:spLocks noGrp="1"/>
+          </p:cNvSpPr>
+          <p:nvPr>
+            <p:ph type="body" idx="3" sz="quarter"/>
+          </p:nvPr>
+        </p:nvSpPr>
+        <p:spPr/>
+        <p:txBody>
+          <a:bodyPr/>
+          <a:lstStyle/>
+          <a:p>
+            <a:r>
+              <a:t>LIVE, the Programme Head, 2 minutes. The mock's viva reads this log. Prepared answers break where</a:t>
+            </a:r>
+          </a:p>
+          <a:p>
+            <a:r>
+              <a:t>the log is thin, so an entry written today is worth more than three written the night before Mock R1</a:t>
+            </a:r>
+          </a:p>
+          <a:p>
+            <a:r>
+              <a:t>on Thursday 22 October.</a:t>
+            </a:r>
+          </a:p>
+          <a:p>
+            <a:r>
+              <a:t>A challenge that needed a cleaning or matching decision also goes in the decisions log.</a:t>
+            </a:r>
+          </a:p>
+        </p:txBody>
+      </p:sp>
+      <p:sp>
+        <p:nvSpPr>
+          <p:cNvPr id="4" name="Slide Number Placeholder 3"/>
+          <p:cNvSpPr>
+            <a:spLocks noGrp="1"/>
+          </p:cNvSpPr>
+          <p:nvPr>
+            <p:ph type="sldNum" idx="5" sz="quarter"/>
+          </p:nvPr>
+        </p:nvSpPr>
+        <p:spPr/>
+      </p:sp>
+    </p:spTree>
+  </p:cSld>
+  <p:clrMapOvr>
+    <a:masterClrMapping/>
+  </p:clrMapOvr>
+</p:notes>
+</file>
+
+<file path=ppt/notesSlides/notesSlide24.xml><?xml version="1.0" encoding="utf-8"?>
+<p:notes xmlns:a="http://schemas.openxmlformats.org/drawingml/2006/main" xmlns:p="http://schemas.openxmlformats.org/presentationml/2006/main" xmlns:r="http://schemas.openxmlformats.org/officeDocument/2006/relationships">
+  <p:cSld>
+    <p:spTree>
+      <p:nvGrpSpPr>
+        <p:cNvPr id="1" name=""/>
+        <p:cNvGrpSpPr/>
+        <p:nvPr/>
+      </p:nvGrpSpPr>
+      <p:grpSpPr>
+        <a:xfrm>
+          <a:off x="0" y="0"/>
+          <a:ext cx="0" cy="0"/>
+          <a:chOff x="0" y="0"/>
+          <a:chExt cx="0" cy="0"/>
+        </a:xfrm>
+      </p:grpSpPr>
+      <p:sp>
+        <p:nvSpPr>
+          <p:cNvPr id="2" name="Slide Image Placeholder 1"/>
+          <p:cNvSpPr>
+            <a:spLocks noGrp="1"/>
+          </p:cNvSpPr>
+          <p:nvPr>
+            <p:ph type="sldImg" idx="2"/>
+          </p:nvPr>
+        </p:nvSpPr>
+        <p:spPr/>
+      </p:sp>
+      <p:sp>
+        <p:nvSpPr>
+          <p:cNvPr id="3" name="Notes Placeholder 2"/>
+          <p:cNvSpPr>
+            <a:spLocks noGrp="1"/>
+          </p:cNvSpPr>
+          <p:nvPr>
+            <p:ph type="body" idx="3" sz="quarter"/>
+          </p:nvPr>
+        </p:nvSpPr>
+        <p:spPr/>
+        <p:txBody>
+          <a:bodyPr/>
+          <a:lstStyle/>
+          <a:p>
+            <a:r>
               <a:t>LIVE, the Programme Head, 2 minutes. The checkpoint questions are not shared today; a group that</a:t>
             </a:r>
           </a:p>
           <a:p>
             <a:r>
-              <a:t>cannot answer them at the checkpoint is stuck and should say so then, because the mocks follow.</a:t>
+              <a:t>cannot answer them at the checkpoint is stuck and should say so then, because Mock R1 runs on</a:t>
+            </a:r>
+          </a:p>
+          <a:p>
+            <a:r>
+              <a:t>Thursday 22 October.</a:t>
             </a:r>
           </a:p>
           <a:p>
@@ -1732,17 +1980,12 @@
           </a:p>
           <a:p>
             <a:r>
-              <a:t>the four numbers they would want to check first. Any answer is fine; the point is that the 5 percent</a:t>
-            </a:r>
-          </a:p>
-          <a:p>
-            <a:r>
-              <a:t>is a number from a dashboard, and every number from a dashboard has a definition behind it.</a:t>
-            </a:r>
-          </a:p>
-          <a:p>
-            <a:r>
-              <a:t>Do not say anything about how the 5 percent was counted. That is for the groups to find.</a:t>
+              <a:t>the four numbers they would want to check first, hear two answers, and move on without ruling on</a:t>
+            </a:r>
+          </a:p>
+          <a:p>
+            <a:r>
+              <a:t>either.</a:t>
             </a:r>
           </a:p>
         </p:txBody>
@@ -1827,7 +2070,7 @@
           </a:p>
           <a:p>
             <a:r>
-              <a:t>Watch for learners who start explaining a row ("it must be the new system"). Say: hold that, write</a:t>
+              <a:t>Watch for learners who start explaining a row ("it must be a new competitor"). Say: hold that, write</a:t>
             </a:r>
           </a:p>
           <a:p>
@@ -5865,7 +6108,7 @@
                 </a:solidFill>
                 <a:latin typeface="Calibri"/>
               </a:rPr>
-              <a:t>1 / 21</a:t>
+              <a:t>1 / 24</a:t>
             </a:r>
           </a:p>
         </p:txBody>
@@ -6071,7 +6314,7 @@
                 </a:solidFill>
                 <a:latin typeface="Georgia"/>
               </a:rPr>
-              <a:t>The week, in five stages</a:t>
+              <a:t>The week, day by day</a:t>
             </a:r>
           </a:p>
         </p:txBody>
@@ -6106,7 +6349,7 @@
                 </a:solidFill>
                 <a:latin typeface="Calibri"/>
               </a:rPr>
-              <a:t>A holiday falls inside the week, so one day carries two build days.</a:t>
+              <a:t>Tuesday 20 October is Dussehra, so Wednesday carries two build days.</a:t>
             </a:r>
           </a:p>
         </p:txBody>
@@ -6185,7 +6428,7 @@
                 </a:solidFill>
                 <a:latin typeface="Calibri"/>
               </a:rPr>
-              <a:t>STAGE 1</a:t>
+              <a:t>MONDAY 19 OCTOBER</a:t>
             </a:r>
           </a:p>
         </p:txBody>
@@ -6388,7 +6631,7 @@
                 </a:solidFill>
                 <a:latin typeface="Calibri"/>
               </a:rPr>
-              <a:t>STAGE 2</a:t>
+              <a:t>WEDNESDAY 21 OCTOBER</a:t>
             </a:r>
           </a:p>
         </p:txBody>
@@ -6591,7 +6834,7 @@
                 </a:solidFill>
                 <a:latin typeface="Calibri"/>
               </a:rPr>
-              <a:t>STAGE 3</a:t>
+              <a:t>THURSDAY 22 OCTOBER</a:t>
             </a:r>
           </a:p>
         </p:txBody>
@@ -6724,7 +6967,7 @@
                 </a:solidFill>
                 <a:latin typeface="Calibri"/>
               </a:rPr>
-              <a:t>Mock round 1, build complete</a:t>
+              <a:t>Mock R1, build complete</a:t>
             </a:r>
           </a:p>
         </p:txBody>
@@ -6759,7 +7002,7 @@
                 </a:solidFill>
                 <a:latin typeface="Calibri"/>
               </a:rPr>
-              <a:t>Every learner mocked once, about 20 minutes: half technical on Weeks 1 and 2, half a viva on your group's work.</a:t>
+              <a:t>Every learner sits Mock R1, about 20 minutes: half technical on Weeks 1 and 2, half a viva on your group's work.</a:t>
             </a:r>
           </a:p>
         </p:txBody>
@@ -6794,7 +7037,7 @@
                 </a:solidFill>
                 <a:latin typeface="Calibri"/>
               </a:rPr>
-              <a:t>STAGE 4</a:t>
+              <a:t>FRIDAY 23 OCTOBER</a:t>
             </a:r>
           </a:p>
         </p:txBody>
@@ -6962,7 +7205,7 @@
                 </a:solidFill>
                 <a:latin typeface="Calibri"/>
               </a:rPr>
-              <a:t>The industry expert runs group discussions, about 30 minutes per group; builds freeze; two cold demo runs; the first presentations.</a:t>
+              <a:t>The industry expert runs the GD rounds, about 30 minutes per group; builds freeze; two cold demo runs; the first presentations where the roster allows.</a:t>
             </a:r>
           </a:p>
         </p:txBody>
@@ -6997,7 +7240,7 @@
                 </a:solidFill>
                 <a:latin typeface="Calibri"/>
               </a:rPr>
-              <a:t>STAGE 5</a:t>
+              <a:t>SATURDAY 24 OCTOBER</a:t>
             </a:r>
           </a:p>
         </p:txBody>
@@ -7150,7 +7393,7 @@
         <p:spPr>
           <a:xfrm>
             <a:off x="9746040" y="3492500"/>
-            <a:ext cx="1750710" cy="862076"/>
+            <a:ext cx="1750710" cy="1192276"/>
           </a:xfrm>
           <a:prstGeom prst="rect">
             <a:avLst/>
@@ -7171,7 +7414,7 @@
                 </a:solidFill>
                 <a:latin typeface="Calibri"/>
               </a:rPr>
-              <a:t>The remaining GDs, then presentations with live demos, 25 to 30 minutes per group, before the expert and a senior industry leader.</a:t>
+              <a:t>The GD rounds close in the morning, then presentations with live demos, 25 to 30 minutes per group, before the expert and a senior industry leader. Every Build 1 grade closes today.</a:t>
             </a:r>
           </a:p>
         </p:txBody>
@@ -7443,7 +7686,7 @@
                 </a:solidFill>
                 <a:latin typeface="Calibri"/>
               </a:rPr>
-              <a:t>S7  ·  10 / 21</a:t>
+              <a:t>S7  ·  10 / 24</a:t>
             </a:r>
           </a:p>
         </p:txBody>
@@ -8637,7 +8880,7 @@
                 </a:solidFill>
                 <a:latin typeface="Calibri"/>
               </a:rPr>
-              <a:t>S8  ·  11 / 21</a:t>
+              <a:t>S8  ·  11 / 24</a:t>
             </a:r>
           </a:p>
         </p:txBody>
@@ -9434,7 +9677,7 @@
                 </a:solidFill>
                 <a:latin typeface="Calibri"/>
               </a:rPr>
-              <a:t>marks, round 1 this week</a:t>
+              <a:t>marks, Mock R1 on Thursday 22 October</a:t>
             </a:r>
           </a:p>
         </p:txBody>
@@ -9583,7 +9826,7 @@
                 </a:solidFill>
                 <a:latin typeface="Calibri"/>
               </a:rPr>
-              <a:t>marks, this week</a:t>
+              <a:t>marks, Friday 23 and Saturday 24 October</a:t>
             </a:r>
           </a:p>
         </p:txBody>
@@ -9899,7 +10142,7 @@
                 </a:solidFill>
                 <a:latin typeface="Calibri"/>
               </a:rPr>
-              <a:t>S9  ·  12 / 21</a:t>
+              <a:t>S9  ·  12 / 24</a:t>
             </a:r>
           </a:p>
         </p:txBody>
@@ -9924,7 +10167,7 @@
       <p:grpSpPr/>
       <p:pic>
         <p:nvPicPr>
-          <p:cNvPr id="2" name="Picture 1" descr="bg_dark.jpg"/>
+          <p:cNvPr id="2" name="Picture 1" descr="bg_light.jpg"/>
           <p:cNvPicPr>
             <a:picLocks noChangeAspect="1"/>
           </p:cNvPicPr>
@@ -9996,7 +10239,7 @@
             <a:r>
               <a:rPr sz="900" b="1" i="0">
                 <a:solidFill>
-                  <a:srgbClr val="FFFFFF"/>
+                  <a:srgbClr val="1A0F5C"/>
                 </a:solidFill>
                 <a:latin typeface="Calibri"/>
               </a:rPr>
@@ -10031,7 +10274,7 @@
             <a:r>
               <a:rPr sz="550" b="1" i="0" spc="300">
                 <a:solidFill>
-                  <a:srgbClr val="CFC9EE"/>
+                  <a:srgbClr val="6B6690"/>
                 </a:solidFill>
                 <a:latin typeface="Calibri"/>
               </a:rPr>
@@ -10066,11 +10309,11 @@
             <a:r>
               <a:rPr sz="550" b="1" i="0" spc="300">
                 <a:solidFill>
-                  <a:srgbClr val="CFC9EE"/>
-                </a:solidFill>
-                <a:latin typeface="Calibri"/>
-              </a:rPr>
-              <a:t>PG DIPLOMA IN AI-ML AND AGENTIC AI ENGINEERING  ·  COHORT 2</a:t>
+                  <a:srgbClr val="6B6690"/>
+                </a:solidFill>
+                <a:latin typeface="Calibri"/>
+              </a:rPr>
+              <a:t>WEEK 3  ·  DAY 1  ·  KALPA GLOBAL CAPABILITY CENTRE</a:t>
             </a:r>
           </a:p>
         </p:txBody>
@@ -10083,29 +10326,29 @@
         </p:nvSpPr>
         <p:spPr>
           <a:xfrm>
-            <a:off x="731519" y="1143000"/>
-            <a:ext cx="3657600" cy="1371600"/>
-          </a:xfrm>
-          <a:prstGeom prst="rect">
-            <a:avLst/>
-          </a:prstGeom>
-          <a:noFill/>
-        </p:spPr>
-        <p:txBody>
-          <a:bodyPr wrap="square" anchor="t" lIns="0" rIns="0" tIns="0" bIns="0">
+            <a:off x="530352" y="676656"/>
+            <a:ext cx="11130991" cy="512064"/>
+          </a:xfrm>
+          <a:prstGeom prst="rect">
+            <a:avLst/>
+          </a:prstGeom>
+          <a:noFill/>
+        </p:spPr>
+        <p:txBody>
+          <a:bodyPr wrap="square" anchor="b" lIns="0" rIns="0" tIns="0" bIns="0">
             <a:spAutoFit/>
           </a:bodyPr>
           <a:lstStyle/>
           <a:p>
             <a:pPr algn="l"/>
             <a:r>
-              <a:rPr sz="9600" b="0" i="0">
-                <a:solidFill>
-                  <a:srgbClr val="D9A7FF"/>
+              <a:rPr sz="2600" b="0" i="0">
+                <a:solidFill>
+                  <a:srgbClr val="1A0F5C"/>
                 </a:solidFill>
                 <a:latin typeface="Georgia"/>
               </a:rPr>
-              <a:t>03</a:t>
+              <a:t>How the mini project is scored</a:t>
             </a:r>
           </a:p>
         </p:txBody>
@@ -10118,8 +10361,8 @@
         </p:nvSpPr>
         <p:spPr>
           <a:xfrm>
-            <a:off x="731519" y="2606040"/>
-            <a:ext cx="10673791" cy="731520"/>
+            <a:off x="530352" y="1243584"/>
+            <a:ext cx="11130991" cy="234696"/>
           </a:xfrm>
           <a:prstGeom prst="rect">
             <a:avLst/>
@@ -10134,72 +10377,39 @@
           <a:p>
             <a:pPr algn="l"/>
             <a:r>
-              <a:rPr sz="4000" b="0" i="0">
-                <a:solidFill>
-                  <a:srgbClr val="FFFFFF"/>
-                </a:solidFill>
-                <a:latin typeface="Georgia"/>
-              </a:rPr>
-              <a:t>The method you already own</a:t>
-            </a:r>
-          </a:p>
-        </p:txBody>
-      </p:sp>
-      <p:sp>
-        <p:nvSpPr>
-          <p:cNvPr id="9" name="TextBox 8"/>
-          <p:cNvSpPr txBox="1"/>
-          <p:nvPr/>
-        </p:nvSpPr>
-        <p:spPr>
-          <a:xfrm>
-            <a:off x="731519" y="3520440"/>
-            <a:ext cx="9509760" cy="284226"/>
-          </a:xfrm>
-          <a:prstGeom prst="rect">
-            <a:avLst/>
-          </a:prstGeom>
-          <a:noFill/>
-        </p:spPr>
-        <p:txBody>
-          <a:bodyPr wrap="square" anchor="t" lIns="0" rIns="0" tIns="0" bIns="0">
-            <a:spAutoFit/>
-          </a:bodyPr>
-          <a:lstStyle/>
-          <a:p>
-            <a:pPr algn="l"/>
-            <a:r>
-              <a:rPr sz="1500" b="0" i="0">
-                <a:solidFill>
-                  <a:srgbClr val="E4E1F1"/>
-                </a:solidFill>
-                <a:latin typeface="Calibri"/>
-              </a:rPr>
-              <a:t>The pictures you drew for Meera and Anand, and the Kalpa Health versions you draw today.</a:t>
-            </a:r>
-          </a:p>
-        </p:txBody>
-      </p:sp>
-      <p:sp>
-        <p:nvSpPr>
-          <p:cNvPr id="10" name="Rounded Rectangle 9"/>
+              <a:rPr sz="1200" b="0" i="0">
+                <a:solidFill>
+                  <a:srgbClr val="6B6690"/>
+                </a:solidFill>
+                <a:latin typeface="Calibri"/>
+              </a:rPr>
+              <a:t>Four criteria scored once for the group, and the defence scored for each of you.</a:t>
+            </a:r>
+          </a:p>
+        </p:txBody>
+      </p:sp>
+      <p:sp>
+        <p:nvSpPr>
+          <p:cNvPr id="9" name="Rounded Rectangle 8"/>
           <p:cNvSpPr/>
           <p:nvPr/>
         </p:nvSpPr>
         <p:spPr>
           <a:xfrm>
-            <a:off x="731519" y="5074920"/>
-            <a:ext cx="780271" cy="310896"/>
+            <a:off x="530352" y="1682496"/>
+            <a:ext cx="11130991" cy="736600"/>
           </a:xfrm>
           <a:prstGeom prst="roundRect">
             <a:avLst>
-              <a:gd name="adj" fmla="val 50000"/>
+              <a:gd name="adj" fmla="val 8000"/>
             </a:avLst>
           </a:prstGeom>
-          <a:noFill/>
+          <a:solidFill>
+            <a:srgbClr val="F7F5FD"/>
+          </a:solidFill>
           <a:ln w="9525">
             <a:solidFill>
-              <a:srgbClr val="CFC9EE"/>
+              <a:srgbClr val="E4E1F1"/>
             </a:solidFill>
           </a:ln>
           <a:effectLst/>
@@ -10219,43 +10429,34 @@
           </a:fontRef>
         </p:style>
         <p:txBody>
-          <a:bodyPr rtlCol="0" anchor="ctr" wrap="none" lIns="25400" rIns="25400" tIns="0" bIns="0"/>
+          <a:bodyPr rtlCol="0" anchor="ctr" wrap="square"/>
           <a:lstStyle/>
           <a:p>
             <a:pPr algn="ctr"/>
-            <a:r>
-              <a:rPr sz="850" b="0">
-                <a:solidFill>
-                  <a:srgbClr val="CFC9EE"/>
-                </a:solidFill>
-                <a:latin typeface="Calibri"/>
-              </a:rPr>
-              <a:t>The ask</a:t>
-            </a:r>
-          </a:p>
-        </p:txBody>
-      </p:sp>
-      <p:sp>
-        <p:nvSpPr>
-          <p:cNvPr id="11" name="Rounded Rectangle 10"/>
+          </a:p>
+        </p:txBody>
+      </p:sp>
+      <p:sp>
+        <p:nvSpPr>
+          <p:cNvPr id="10" name="Rounded Rectangle 9"/>
           <p:cNvSpPr/>
           <p:nvPr/>
         </p:nvSpPr>
         <p:spPr>
           <a:xfrm>
-            <a:off x="1621519" y="5074920"/>
-            <a:ext cx="839487" cy="310896"/>
+            <a:off x="676656" y="1810512"/>
+            <a:ext cx="45720" cy="480568"/>
           </a:xfrm>
           <a:prstGeom prst="roundRect">
             <a:avLst>
               <a:gd name="adj" fmla="val 50000"/>
             </a:avLst>
           </a:prstGeom>
-          <a:noFill/>
-          <a:ln w="9525">
-            <a:solidFill>
-              <a:srgbClr val="CFC9EE"/>
-            </a:solidFill>
+          <a:solidFill>
+            <a:srgbClr val="5B3FD6"/>
+          </a:solidFill>
+          <a:ln>
+            <a:noFill/>
           </a:ln>
           <a:effectLst/>
         </p:spPr>
@@ -10274,40 +10475,546 @@
           </a:fontRef>
         </p:style>
         <p:txBody>
-          <a:bodyPr rtlCol="0" anchor="ctr" wrap="none" lIns="25400" rIns="25400" tIns="0" bIns="0"/>
+          <a:bodyPr rtlCol="0" anchor="ctr" wrap="square"/>
           <a:lstStyle/>
           <a:p>
             <a:pPr algn="ctr"/>
-            <a:r>
-              <a:rPr sz="850" b="0">
-                <a:solidFill>
-                  <a:srgbClr val="CFC9EE"/>
-                </a:solidFill>
-                <a:latin typeface="Calibri"/>
-              </a:rPr>
-              <a:t>The week</a:t>
-            </a:r>
-          </a:p>
-        </p:txBody>
-      </p:sp>
-      <p:sp>
-        <p:nvSpPr>
-          <p:cNvPr id="12" name="Rounded Rectangle 11"/>
+          </a:p>
+        </p:txBody>
+      </p:sp>
+      <p:sp>
+        <p:nvSpPr>
+          <p:cNvPr id="11" name="TextBox 10"/>
+          <p:cNvSpPr txBox="1"/>
+          <p:nvPr/>
+        </p:nvSpPr>
+        <p:spPr>
+          <a:xfrm>
+            <a:off x="877824" y="1801368"/>
+            <a:ext cx="10564063" cy="553720"/>
+          </a:xfrm>
+          <a:prstGeom prst="rect">
+            <a:avLst/>
+          </a:prstGeom>
+          <a:noFill/>
+        </p:spPr>
+        <p:txBody>
+          <a:bodyPr wrap="square" anchor="ctr" lIns="0" rIns="0" tIns="0" bIns="0">
+            <a:spAutoFit/>
+          </a:bodyPr>
+          <a:lstStyle/>
+          <a:p>
+            <a:r>
+              <a:rPr sz="1300" b="1">
+                <a:solidFill>
+                  <a:srgbClr val="5B3FD6"/>
+                </a:solidFill>
+                <a:latin typeface="Calibri"/>
+              </a:rPr>
+              <a:t>Mini project, 40 marks. </a:t>
+            </a:r>
+            <a:r>
+              <a:rPr sz="1300" b="0" i="0">
+                <a:solidFill>
+                  <a:srgbClr val="1A1440"/>
+                </a:solidFill>
+                <a:latin typeface="Calibri"/>
+              </a:rPr>
+              <a:t>The first four criteria are scored once for the group, and every member receives those 34 marks; presentation and defence is scored for each learner on 6 marks, so a silent teammate cannot ride the group's score.</a:t>
+            </a:r>
+          </a:p>
+        </p:txBody>
+      </p:sp>
+      <p:graphicFrame>
+        <p:nvGraphicFramePr>
+          <p:cNvPr id="12" name="Table 11"/>
+          <p:cNvGraphicFramePr>
+            <a:graphicFrameLocks noGrp="1"/>
+          </p:cNvGraphicFramePr>
+          <p:nvPr/>
+        </p:nvGraphicFramePr>
+        <p:xfrm>
+          <a:off x="530352" y="2583688"/>
+          <a:ext cx="11130990" cy="2478024"/>
+        </p:xfrm>
+        <a:graphic>
+          <a:graphicData uri="http://schemas.openxmlformats.org/drawingml/2006/table">
+            <a:tbl>
+              <a:tblPr firstRow="0" bandRow="0">
+                <a:tableStyleId>{2D5ABB26-0587-4C30-8999-92F81FD0307C}</a:tableStyleId>
+              </a:tblPr>
+              <a:tblGrid>
+                <a:gridCol w="2886034"/>
+                <a:gridCol w="914400"/>
+                <a:gridCol w="7330556"/>
+              </a:tblGrid>
+              <a:tr h="318008">
+                <a:tc>
+                  <a:txBody>
+                    <a:bodyPr/>
+                    <a:lstStyle/>
+                    <a:p>
+                      <a:r>
+                        <a:rPr sz="1150" b="1" i="0">
+                          <a:solidFill>
+                            <a:srgbClr val="FFFFFF"/>
+                          </a:solidFill>
+                          <a:latin typeface="Calibri"/>
+                        </a:rPr>
+                        <a:t>Criterion</a:t>
+                      </a:r>
+                    </a:p>
+                  </a:txBody>
+                  <a:tcPr marL="101600" marR="101600" marT="38100" marB="38100" anchor="ctr">
+                    <a:solidFill>
+                      <a:srgbClr val="1A0F5C"/>
+                    </a:solidFill>
+                  </a:tcPr>
+                </a:tc>
+                <a:tc>
+                  <a:txBody>
+                    <a:bodyPr/>
+                    <a:lstStyle/>
+                    <a:p>
+                      <a:r>
+                        <a:rPr sz="1150" b="1" i="0">
+                          <a:solidFill>
+                            <a:srgbClr val="FFFFFF"/>
+                          </a:solidFill>
+                          <a:latin typeface="Calibri"/>
+                        </a:rPr>
+                        <a:t>Marks</a:t>
+                      </a:r>
+                    </a:p>
+                  </a:txBody>
+                  <a:tcPr marL="101600" marR="101600" marT="38100" marB="38100" anchor="ctr">
+                    <a:solidFill>
+                      <a:srgbClr val="1A0F5C"/>
+                    </a:solidFill>
+                  </a:tcPr>
+                </a:tc>
+                <a:tc>
+                  <a:txBody>
+                    <a:bodyPr/>
+                    <a:lstStyle/>
+                    <a:p>
+                      <a:r>
+                        <a:rPr sz="1150" b="1" i="0">
+                          <a:solidFill>
+                            <a:srgbClr val="FFFFFF"/>
+                          </a:solidFill>
+                          <a:latin typeface="Calibri"/>
+                        </a:rPr>
+                        <a:t>What full marks look like</a:t>
+                      </a:r>
+                    </a:p>
+                  </a:txBody>
+                  <a:tcPr marL="101600" marR="101600" marT="38100" marB="38100" anchor="ctr">
+                    <a:solidFill>
+                      <a:srgbClr val="1A0F5C"/>
+                    </a:solidFill>
+                  </a:tcPr>
+                </a:tc>
+              </a:tr>
+              <a:tr h="508000">
+                <a:tc>
+                  <a:txBody>
+                    <a:bodyPr/>
+                    <a:lstStyle/>
+                    <a:p>
+                      <a:r>
+                        <a:rPr sz="1100" b="0" i="0">
+                          <a:solidFill>
+                            <a:srgbClr val="1A1440"/>
+                          </a:solidFill>
+                          <a:latin typeface="Calibri"/>
+                        </a:rPr>
+                        <a:t>The question translated</a:t>
+                      </a:r>
+                    </a:p>
+                  </a:txBody>
+                  <a:tcPr marL="101600" marR="101600" marT="38100" marB="38100" anchor="ctr">
+                    <a:solidFill>
+                      <a:srgbClr val="FFFFFF"/>
+                    </a:solidFill>
+                  </a:tcPr>
+                </a:tc>
+                <a:tc>
+                  <a:txBody>
+                    <a:bodyPr/>
+                    <a:lstStyle/>
+                    <a:p>
+                      <a:r>
+                        <a:rPr sz="1100" b="0" i="0">
+                          <a:solidFill>
+                            <a:srgbClr val="1A1440"/>
+                          </a:solidFill>
+                          <a:latin typeface="Calibri"/>
+                        </a:rPr>
+                        <a:t>8</a:t>
+                      </a:r>
+                    </a:p>
+                  </a:txBody>
+                  <a:tcPr marL="101600" marR="101600" marT="38100" marB="38100" anchor="ctr">
+                    <a:solidFill>
+                      <a:srgbClr val="FFFFFF"/>
+                    </a:solidFill>
+                  </a:tcPr>
+                </a:tc>
+                <a:tc>
+                  <a:txBody>
+                    <a:bodyPr/>
+                    <a:lstStyle/>
+                    <a:p>
+                      <a:r>
+                        <a:rPr sz="1100" b="0" i="0">
+                          <a:solidFill>
+                            <a:srgbClr val="1A1440"/>
+                          </a:solidFill>
+                          <a:latin typeface="Calibri"/>
+                        </a:rPr>
+                        <a:t>Dr Menon's words are mapped to the right Weeks 1 and 2 method, with the metric defined and the decision it feeds named.</a:t>
+                      </a:r>
+                    </a:p>
+                  </a:txBody>
+                  <a:tcPr marL="101600" marR="101600" marT="38100" marB="38100" anchor="ctr">
+                    <a:solidFill>
+                      <a:srgbClr val="FFFFFF"/>
+                    </a:solidFill>
+                  </a:tcPr>
+                </a:tc>
+              </a:tr>
+              <a:tr h="508000">
+                <a:tc>
+                  <a:txBody>
+                    <a:bodyPr/>
+                    <a:lstStyle/>
+                    <a:p>
+                      <a:r>
+                        <a:rPr sz="1100" b="0" i="0">
+                          <a:solidFill>
+                            <a:srgbClr val="1A1440"/>
+                          </a:solidFill>
+                          <a:latin typeface="Calibri"/>
+                        </a:rPr>
+                        <a:t>The data made trustworthy</a:t>
+                      </a:r>
+                    </a:p>
+                  </a:txBody>
+                  <a:tcPr marL="101600" marR="101600" marT="38100" marB="38100" anchor="ctr">
+                    <a:solidFill>
+                      <a:srgbClr val="F4F2FA"/>
+                    </a:solidFill>
+                  </a:tcPr>
+                </a:tc>
+                <a:tc>
+                  <a:txBody>
+                    <a:bodyPr/>
+                    <a:lstStyle/>
+                    <a:p>
+                      <a:r>
+                        <a:rPr sz="1100" b="0" i="0">
+                          <a:solidFill>
+                            <a:srgbClr val="1A1440"/>
+                          </a:solidFill>
+                          <a:latin typeface="Calibri"/>
+                        </a:rPr>
+                        <a:t>10</a:t>
+                      </a:r>
+                    </a:p>
+                  </a:txBody>
+                  <a:tcPr marL="101600" marR="101600" marT="38100" marB="38100" anchor="ctr">
+                    <a:solidFill>
+                      <a:srgbClr val="F4F2FA"/>
+                    </a:solidFill>
+                  </a:tcPr>
+                </a:tc>
+                <a:tc>
+                  <a:txBody>
+                    <a:bodyPr/>
+                    <a:lstStyle/>
+                    <a:p>
+                      <a:r>
+                        <a:rPr sz="1100" b="0" i="0">
+                          <a:solidFill>
+                            <a:srgbClr val="1A1440"/>
+                          </a:solidFill>
+                          <a:latin typeface="Calibri"/>
+                        </a:rPr>
+                        <a:t>The data is profiled before it is touched, every cleaning call is in the decisions log with its reason, and counts and rupees reconcile across files.</a:t>
+                      </a:r>
+                    </a:p>
+                  </a:txBody>
+                  <a:tcPr marL="101600" marR="101600" marT="38100" marB="38100" anchor="ctr">
+                    <a:solidFill>
+                      <a:srgbClr val="F4F2FA"/>
+                    </a:solidFill>
+                  </a:tcPr>
+                </a:tc>
+              </a:tr>
+              <a:tr h="508000">
+                <a:tc>
+                  <a:txBody>
+                    <a:bodyPr/>
+                    <a:lstStyle/>
+                    <a:p>
+                      <a:r>
+                        <a:rPr sz="1100" b="0" i="0">
+                          <a:solidFill>
+                            <a:srgbClr val="1A1440"/>
+                          </a:solidFill>
+                          <a:latin typeface="Calibri"/>
+                        </a:rPr>
+                        <a:t>The analysis</a:t>
+                      </a:r>
+                    </a:p>
+                  </a:txBody>
+                  <a:tcPr marL="101600" marR="101600" marT="38100" marB="38100" anchor="ctr">
+                    <a:solidFill>
+                      <a:srgbClr val="FFFFFF"/>
+                    </a:solidFill>
+                  </a:tcPr>
+                </a:tc>
+                <a:tc>
+                  <a:txBody>
+                    <a:bodyPr/>
+                    <a:lstStyle/>
+                    <a:p>
+                      <a:r>
+                        <a:rPr sz="1100" b="0" i="0">
+                          <a:solidFill>
+                            <a:srgbClr val="1A1440"/>
+                          </a:solidFill>
+                          <a:latin typeface="Calibri"/>
+                        </a:rPr>
+                        <a:t>10</a:t>
+                      </a:r>
+                    </a:p>
+                  </a:txBody>
+                  <a:tcPr marL="101600" marR="101600" marT="38100" marB="38100" anchor="ctr">
+                    <a:solidFill>
+                      <a:srgbClr val="FFFFFF"/>
+                    </a:solidFill>
+                  </a:tcPr>
+                </a:tc>
+                <a:tc>
+                  <a:txBody>
+                    <a:bodyPr/>
+                    <a:lstStyle/>
+                    <a:p>
+                      <a:r>
+                        <a:rPr sz="1100" b="0" i="0">
+                          <a:solidFill>
+                            <a:srgbClr val="1A1440"/>
+                          </a:solidFill>
+                          <a:latin typeface="Calibri"/>
+                        </a:rPr>
+                        <a:t>The tree, ladder or fair comparison reaches the branch that explains the symptom, on the right denominator, with a chance test where one is needed.</a:t>
+                      </a:r>
+                    </a:p>
+                  </a:txBody>
+                  <a:tcPr marL="101600" marR="101600" marT="38100" marB="38100" anchor="ctr">
+                    <a:solidFill>
+                      <a:srgbClr val="FFFFFF"/>
+                    </a:solidFill>
+                  </a:tcPr>
+                </a:tc>
+              </a:tr>
+              <a:tr h="318008">
+                <a:tc>
+                  <a:txBody>
+                    <a:bodyPr/>
+                    <a:lstStyle/>
+                    <a:p>
+                      <a:r>
+                        <a:rPr sz="1100" b="0" i="0">
+                          <a:solidFill>
+                            <a:srgbClr val="1A1440"/>
+                          </a:solidFill>
+                          <a:latin typeface="Calibri"/>
+                        </a:rPr>
+                        <a:t>The claim</a:t>
+                      </a:r>
+                    </a:p>
+                  </a:txBody>
+                  <a:tcPr marL="101600" marR="101600" marT="38100" marB="38100" anchor="ctr">
+                    <a:solidFill>
+                      <a:srgbClr val="F4F2FA"/>
+                    </a:solidFill>
+                  </a:tcPr>
+                </a:tc>
+                <a:tc>
+                  <a:txBody>
+                    <a:bodyPr/>
+                    <a:lstStyle/>
+                    <a:p>
+                      <a:r>
+                        <a:rPr sz="1100" b="0" i="0">
+                          <a:solidFill>
+                            <a:srgbClr val="1A1440"/>
+                          </a:solidFill>
+                          <a:latin typeface="Calibri"/>
+                        </a:rPr>
+                        <a:t>6</a:t>
+                      </a:r>
+                    </a:p>
+                  </a:txBody>
+                  <a:tcPr marL="101600" marR="101600" marT="38100" marB="38100" anchor="ctr">
+                    <a:solidFill>
+                      <a:srgbClr val="F4F2FA"/>
+                    </a:solidFill>
+                  </a:tcPr>
+                </a:tc>
+                <a:tc>
+                  <a:txBody>
+                    <a:bodyPr/>
+                    <a:lstStyle/>
+                    <a:p>
+                      <a:r>
+                        <a:rPr sz="1100" b="0" i="0">
+                          <a:solidFill>
+                            <a:srgbClr val="1A1440"/>
+                          </a:solidFill>
+                          <a:latin typeface="Calibri"/>
+                        </a:rPr>
+                        <a:t>One sentence carries its number, denominator, period and caveat, plus an action Dr Menon can take.</a:t>
+                      </a:r>
+                    </a:p>
+                  </a:txBody>
+                  <a:tcPr marL="101600" marR="101600" marT="38100" marB="38100" anchor="ctr">
+                    <a:solidFill>
+                      <a:srgbClr val="F4F2FA"/>
+                    </a:solidFill>
+                  </a:tcPr>
+                </a:tc>
+              </a:tr>
+              <a:tr h="318008">
+                <a:tc>
+                  <a:txBody>
+                    <a:bodyPr/>
+                    <a:lstStyle/>
+                    <a:p>
+                      <a:r>
+                        <a:rPr sz="1100" b="0" i="0">
+                          <a:solidFill>
+                            <a:srgbClr val="1A1440"/>
+                          </a:solidFill>
+                          <a:latin typeface="Calibri"/>
+                        </a:rPr>
+                        <a:t>Presentation and defence</a:t>
+                      </a:r>
+                    </a:p>
+                  </a:txBody>
+                  <a:tcPr marL="101600" marR="101600" marT="38100" marB="38100" anchor="ctr">
+                    <a:solidFill>
+                      <a:srgbClr val="FFFFFF"/>
+                    </a:solidFill>
+                  </a:tcPr>
+                </a:tc>
+                <a:tc>
+                  <a:txBody>
+                    <a:bodyPr/>
+                    <a:lstStyle/>
+                    <a:p>
+                      <a:r>
+                        <a:rPr sz="1100" b="0" i="0">
+                          <a:solidFill>
+                            <a:srgbClr val="1A1440"/>
+                          </a:solidFill>
+                          <a:latin typeface="Calibri"/>
+                        </a:rPr>
+                        <a:t>6</a:t>
+                      </a:r>
+                    </a:p>
+                  </a:txBody>
+                  <a:tcPr marL="101600" marR="101600" marT="38100" marB="38100" anchor="ctr">
+                    <a:solidFill>
+                      <a:srgbClr val="FFFFFF"/>
+                    </a:solidFill>
+                  </a:tcPr>
+                </a:tc>
+                <a:tc>
+                  <a:txBody>
+                    <a:bodyPr/>
+                    <a:lstStyle/>
+                    <a:p>
+                      <a:r>
+                        <a:rPr sz="1100" b="0" i="0">
+                          <a:solidFill>
+                            <a:srgbClr val="1A1440"/>
+                          </a:solidFill>
+                          <a:latin typeface="Calibri"/>
+                        </a:rPr>
+                        <a:t>The live demo runs cold, and every member answers a challenge on the caveat.</a:t>
+                      </a:r>
+                    </a:p>
+                  </a:txBody>
+                  <a:tcPr marL="101600" marR="101600" marT="38100" marB="38100" anchor="ctr">
+                    <a:solidFill>
+                      <a:srgbClr val="FFFFFF"/>
+                    </a:solidFill>
+                  </a:tcPr>
+                </a:tc>
+              </a:tr>
+            </a:tbl>
+          </a:graphicData>
+        </a:graphic>
+      </p:graphicFrame>
+      <p:sp>
+        <p:nvSpPr>
+          <p:cNvPr id="13" name="TextBox 12"/>
+          <p:cNvSpPr txBox="1"/>
+          <p:nvPr/>
+        </p:nvSpPr>
+        <p:spPr>
+          <a:xfrm>
+            <a:off x="530352" y="5317744"/>
+            <a:ext cx="11130991" cy="703072"/>
+          </a:xfrm>
+          <a:prstGeom prst="rect">
+            <a:avLst/>
+          </a:prstGeom>
+          <a:noFill/>
+        </p:spPr>
+        <p:txBody>
+          <a:bodyPr wrap="square" anchor="t" lIns="0" rIns="0" tIns="0" bIns="0">
+            <a:spAutoFit/>
+          </a:bodyPr>
+          <a:lstStyle/>
+          <a:p>
+            <a:pPr>
+              <a:spcAft>
+                <a:spcPts val="700"/>
+              </a:spcAft>
+            </a:pPr>
+            <a:r>
+              <a:rPr sz="1400" b="0" i="0">
+                <a:solidFill>
+                  <a:srgbClr val="1A1440"/>
+                </a:solidFill>
+                <a:latin typeface="Calibri"/>
+              </a:rPr>
+              <a:t>The presentations run on Friday 23 October where the roster allows and on Saturday 24 October, when every Build 1 grade closes.</a:t>
+            </a:r>
+          </a:p>
+        </p:txBody>
+      </p:sp>
+      <p:sp>
+        <p:nvSpPr>
+          <p:cNvPr id="14" name="Oval 13"/>
           <p:cNvSpPr/>
           <p:nvPr/>
         </p:nvSpPr>
         <p:spPr>
           <a:xfrm>
-            <a:off x="2570735" y="5074920"/>
-            <a:ext cx="1905375" cy="310896"/>
-          </a:xfrm>
-          <a:prstGeom prst="roundRect">
-            <a:avLst>
-              <a:gd name="adj" fmla="val 50000"/>
-            </a:avLst>
+            <a:off x="530352" y="6492240"/>
+            <a:ext cx="64008" cy="64008"/>
+          </a:xfrm>
+          <a:prstGeom prst="ellipse">
+            <a:avLst/>
           </a:prstGeom>
           <a:solidFill>
-            <a:srgbClr val="D9A7FF"/>
+            <a:srgbClr val="CFC9EE"/>
           </a:solidFill>
           <a:ln>
             <a:noFill/>
@@ -10329,14 +11036,198 @@
           </a:fontRef>
         </p:style>
         <p:txBody>
-          <a:bodyPr rtlCol="0" anchor="ctr" wrap="none" lIns="25400" rIns="25400" tIns="0" bIns="0"/>
+          <a:bodyPr rtlCol="0" anchor="ctr" wrap="square"/>
           <a:lstStyle/>
           <a:p>
             <a:pPr algn="ctr"/>
-            <a:r>
-              <a:rPr sz="850" b="1">
-                <a:solidFill>
-                  <a:srgbClr val="1A0F5C"/>
+          </a:p>
+        </p:txBody>
+      </p:sp>
+      <p:sp>
+        <p:nvSpPr>
+          <p:cNvPr id="15" name="TextBox 14"/>
+          <p:cNvSpPr txBox="1"/>
+          <p:nvPr/>
+        </p:nvSpPr>
+        <p:spPr>
+          <a:xfrm>
+            <a:off x="640080" y="6437376"/>
+            <a:ext cx="596360" cy="152146"/>
+          </a:xfrm>
+          <a:prstGeom prst="rect">
+            <a:avLst/>
+          </a:prstGeom>
+          <a:noFill/>
+        </p:spPr>
+        <p:txBody>
+          <a:bodyPr wrap="square" anchor="t" lIns="0" rIns="0" tIns="0" bIns="0">
+            <a:spAutoFit/>
+          </a:bodyPr>
+          <a:lstStyle/>
+          <a:p>
+            <a:pPr algn="l"/>
+            <a:r>
+              <a:rPr sz="700" b="0" i="0">
+                <a:solidFill>
+                  <a:srgbClr val="6B6690"/>
+                </a:solidFill>
+                <a:latin typeface="Calibri"/>
+              </a:rPr>
+              <a:t>The ask</a:t>
+            </a:r>
+          </a:p>
+        </p:txBody>
+      </p:sp>
+      <p:sp>
+        <p:nvSpPr>
+          <p:cNvPr id="16" name="Oval 15"/>
+          <p:cNvSpPr/>
+          <p:nvPr/>
+        </p:nvSpPr>
+        <p:spPr>
+          <a:xfrm>
+            <a:off x="1327880" y="6492240"/>
+            <a:ext cx="64008" cy="64008"/>
+          </a:xfrm>
+          <a:prstGeom prst="ellipse">
+            <a:avLst/>
+          </a:prstGeom>
+          <a:solidFill>
+            <a:srgbClr val="5B3FD6"/>
+          </a:solidFill>
+          <a:ln>
+            <a:noFill/>
+          </a:ln>
+          <a:effectLst/>
+        </p:spPr>
+        <p:style>
+          <a:lnRef idx="1">
+            <a:schemeClr val="accent1"/>
+          </a:lnRef>
+          <a:fillRef idx="3">
+            <a:schemeClr val="accent1"/>
+          </a:fillRef>
+          <a:effectRef idx="2">
+            <a:schemeClr val="accent1"/>
+          </a:effectRef>
+          <a:fontRef idx="minor">
+            <a:schemeClr val="lt1"/>
+          </a:fontRef>
+        </p:style>
+        <p:txBody>
+          <a:bodyPr rtlCol="0" anchor="ctr" wrap="square"/>
+          <a:lstStyle/>
+          <a:p>
+            <a:pPr algn="ctr"/>
+          </a:p>
+        </p:txBody>
+      </p:sp>
+      <p:sp>
+        <p:nvSpPr>
+          <p:cNvPr id="17" name="TextBox 16"/>
+          <p:cNvSpPr txBox="1"/>
+          <p:nvPr/>
+        </p:nvSpPr>
+        <p:spPr>
+          <a:xfrm>
+            <a:off x="1437608" y="6437376"/>
+            <a:ext cx="642366" cy="152146"/>
+          </a:xfrm>
+          <a:prstGeom prst="rect">
+            <a:avLst/>
+          </a:prstGeom>
+          <a:noFill/>
+        </p:spPr>
+        <p:txBody>
+          <a:bodyPr wrap="square" anchor="t" lIns="0" rIns="0" tIns="0" bIns="0">
+            <a:spAutoFit/>
+          </a:bodyPr>
+          <a:lstStyle/>
+          <a:p>
+            <a:pPr algn="l"/>
+            <a:r>
+              <a:rPr sz="700" b="1" i="0">
+                <a:solidFill>
+                  <a:srgbClr val="5B3FD6"/>
+                </a:solidFill>
+                <a:latin typeface="Calibri"/>
+              </a:rPr>
+              <a:t>The week</a:t>
+            </a:r>
+          </a:p>
+        </p:txBody>
+      </p:sp>
+      <p:sp>
+        <p:nvSpPr>
+          <p:cNvPr id="18" name="Oval 17"/>
+          <p:cNvSpPr/>
+          <p:nvPr/>
+        </p:nvSpPr>
+        <p:spPr>
+          <a:xfrm>
+            <a:off x="2171414" y="6492240"/>
+            <a:ext cx="64008" cy="64008"/>
+          </a:xfrm>
+          <a:prstGeom prst="ellipse">
+            <a:avLst/>
+          </a:prstGeom>
+          <a:solidFill>
+            <a:srgbClr val="CFC9EE"/>
+          </a:solidFill>
+          <a:ln>
+            <a:noFill/>
+          </a:ln>
+          <a:effectLst/>
+        </p:spPr>
+        <p:style>
+          <a:lnRef idx="1">
+            <a:schemeClr val="accent1"/>
+          </a:lnRef>
+          <a:fillRef idx="3">
+            <a:schemeClr val="accent1"/>
+          </a:fillRef>
+          <a:effectRef idx="2">
+            <a:schemeClr val="accent1"/>
+          </a:effectRef>
+          <a:fontRef idx="minor">
+            <a:schemeClr val="lt1"/>
+          </a:fontRef>
+        </p:style>
+        <p:txBody>
+          <a:bodyPr rtlCol="0" anchor="ctr" wrap="square"/>
+          <a:lstStyle/>
+          <a:p>
+            <a:pPr algn="ctr"/>
+          </a:p>
+        </p:txBody>
+      </p:sp>
+      <p:sp>
+        <p:nvSpPr>
+          <p:cNvPr id="19" name="TextBox 18"/>
+          <p:cNvSpPr txBox="1"/>
+          <p:nvPr/>
+        </p:nvSpPr>
+        <p:spPr>
+          <a:xfrm>
+            <a:off x="2281142" y="6437376"/>
+            <a:ext cx="1470469" cy="152146"/>
+          </a:xfrm>
+          <a:prstGeom prst="rect">
+            <a:avLst/>
+          </a:prstGeom>
+          <a:noFill/>
+        </p:spPr>
+        <p:txBody>
+          <a:bodyPr wrap="square" anchor="t" lIns="0" rIns="0" tIns="0" bIns="0">
+            <a:spAutoFit/>
+          </a:bodyPr>
+          <a:lstStyle/>
+          <a:p>
+            <a:pPr algn="l"/>
+            <a:r>
+              <a:rPr sz="700" b="0" i="0">
+                <a:solidFill>
+                  <a:srgbClr val="6B6690"/>
                 </a:solidFill>
                 <a:latin typeface="Calibri"/>
               </a:rPr>
@@ -10347,42 +11238,7 @@
       </p:sp>
       <p:sp>
         <p:nvSpPr>
-          <p:cNvPr id="13" name="TextBox 12"/>
-          <p:cNvSpPr txBox="1"/>
-          <p:nvPr/>
-        </p:nvSpPr>
-        <p:spPr>
-          <a:xfrm>
-            <a:off x="530352" y="6437376"/>
-            <a:ext cx="9667951" cy="160401"/>
-          </a:xfrm>
-          <a:prstGeom prst="rect">
-            <a:avLst/>
-          </a:prstGeom>
-          <a:noFill/>
-        </p:spPr>
-        <p:txBody>
-          <a:bodyPr wrap="square" anchor="t" lIns="0" rIns="0" tIns="0" bIns="0">
-            <a:spAutoFit/>
-          </a:bodyPr>
-          <a:lstStyle/>
-          <a:p>
-            <a:pPr algn="l"/>
-            <a:r>
-              <a:rPr sz="750" b="0" i="0">
-                <a:solidFill>
-                  <a:srgbClr val="CFC9EE"/>
-                </a:solidFill>
-                <a:latin typeface="Calibri"/>
-              </a:rPr>
-              <a:t>Week 3 Day 1: Build 1 opens in Kalpa Health</a:t>
-            </a:r>
-          </a:p>
-        </p:txBody>
-      </p:sp>
-      <p:sp>
-        <p:nvSpPr>
-          <p:cNvPr id="14" name="TextBox 13"/>
+          <p:cNvPr id="20" name="TextBox 19"/>
           <p:cNvSpPr txBox="1"/>
           <p:nvPr/>
         </p:nvSpPr>
@@ -10406,11 +11262,11 @@
             <a:r>
               <a:rPr sz="750" b="0" i="0">
                 <a:solidFill>
-                  <a:srgbClr val="CFC9EE"/>
-                </a:solidFill>
-                <a:latin typeface="Calibri"/>
-              </a:rPr>
-              <a:t>13 / 21</a:t>
+                  <a:srgbClr val="6B6690"/>
+                </a:solidFill>
+                <a:latin typeface="Calibri"/>
+              </a:rPr>
+              <a:t>S9a  ·  13 / 24</a:t>
             </a:r>
           </a:p>
         </p:txBody>
@@ -10616,7 +11472,7 @@
                 </a:solidFill>
                 <a:latin typeface="Georgia"/>
               </a:rPr>
-              <a:t>The revenue tree, as you drew it for Meera</a:t>
+              <a:t>How Mock R1 is scored</a:t>
             </a:r>
           </a:p>
         </p:txBody>
@@ -10651,45 +11507,21 @@
                 </a:solidFill>
                 <a:latin typeface="Calibri"/>
               </a:rPr>
-              <a:t>Every branch a numerator over a denominator; the question is which branch is short.</a:t>
-            </a:r>
-          </a:p>
-        </p:txBody>
-      </p:sp>
-      <p:pic>
-        <p:nvPicPr>
-          <p:cNvPr id="9" name="mermaid diagram" descr="36716596709eae99.png"/>
-          <p:cNvPicPr>
-            <a:picLocks noChangeAspect="1"/>
-          </p:cNvPicPr>
-          <p:nvPr/>
-        </p:nvPicPr>
-        <p:blipFill>
-          <a:blip r:embed="rId5"/>
-          <a:stretch>
-            <a:fillRect/>
-          </a:stretch>
-        </p:blipFill>
-        <p:spPr>
-          <a:xfrm>
-            <a:off x="530352" y="1956816"/>
-            <a:ext cx="11130991" cy="2051553"/>
-          </a:xfrm>
-          <a:prstGeom prst="rect">
-            <a:avLst/>
-          </a:prstGeom>
-        </p:spPr>
-      </p:pic>
-      <p:sp>
-        <p:nvSpPr>
-          <p:cNvPr id="10" name="Rounded Rectangle 9"/>
+              <a:t>Scored for each of you alone: a technical half and a viva on your group's work.</a:t>
+            </a:r>
+          </a:p>
+        </p:txBody>
+      </p:sp>
+      <p:sp>
+        <p:nvSpPr>
+          <p:cNvPr id="9" name="Rounded Rectangle 8"/>
           <p:cNvSpPr/>
           <p:nvPr/>
         </p:nvSpPr>
         <p:spPr>
           <a:xfrm>
-            <a:off x="530352" y="4154673"/>
-            <a:ext cx="11130991" cy="541020"/>
+            <a:off x="530352" y="1682496"/>
+            <a:ext cx="11130991" cy="807720"/>
           </a:xfrm>
           <a:prstGeom prst="roundRect">
             <a:avLst>
@@ -10730,14 +11562,14 @@
       </p:sp>
       <p:sp>
         <p:nvSpPr>
-          <p:cNvPr id="11" name="Rounded Rectangle 10"/>
+          <p:cNvPr id="10" name="Rounded Rectangle 9"/>
           <p:cNvSpPr/>
           <p:nvPr/>
         </p:nvSpPr>
         <p:spPr>
           <a:xfrm>
-            <a:off x="676656" y="4282689"/>
-            <a:ext cx="45720" cy="284988"/>
+            <a:off x="676656" y="1810512"/>
+            <a:ext cx="45720" cy="551688"/>
           </a:xfrm>
           <a:prstGeom prst="roundRect">
             <a:avLst>
@@ -10776,14 +11608,14 @@
       </p:sp>
       <p:sp>
         <p:nvSpPr>
-          <p:cNvPr id="12" name="TextBox 11"/>
-          <p:cNvSpPr txBox="1"/>
-          <p:nvPr/>
-        </p:nvSpPr>
-        <p:spPr>
-          <a:xfrm>
-            <a:off x="877824" y="4273545"/>
-            <a:ext cx="10564063" cy="358140"/>
+          <p:cNvPr id="11" name="TextBox 10"/>
+          <p:cNvSpPr txBox="1"/>
+          <p:nvPr/>
+        </p:nvSpPr>
+        <p:spPr>
+          <a:xfrm>
+            <a:off x="877824" y="1801368"/>
+            <a:ext cx="10564063" cy="624840"/>
           </a:xfrm>
           <a:prstGeom prst="rect">
             <a:avLst/>
@@ -10803,7 +11635,7 @@
                 </a:solidFill>
                 <a:latin typeface="Calibri"/>
               </a:rPr>
-              <a:t>Your turn. </a:t>
+              <a:t>Mock interview R1, 30 marks. </a:t>
             </a:r>
             <a:r>
               <a:rPr sz="1500" b="0" i="0">
@@ -10812,14 +11644,556 @@
                 </a:solidFill>
                 <a:latin typeface="Calibri"/>
               </a:rPr>
-              <a:t>What is each box called in Kalpa Health, and which box has no clean twin?</a:t>
-            </a:r>
-          </a:p>
-        </p:txBody>
-      </p:sp>
-      <p:sp>
-        <p:nvSpPr>
-          <p:cNvPr id="13" name="Oval 12"/>
+              <a:t>Each learner is scored alone, 15 marks on the technical half and 15 on the project viva.</a:t>
+            </a:r>
+          </a:p>
+        </p:txBody>
+      </p:sp>
+      <p:graphicFrame>
+        <p:nvGraphicFramePr>
+          <p:cNvPr id="12" name="Table 11"/>
+          <p:cNvGraphicFramePr>
+            <a:graphicFrameLocks noGrp="1"/>
+          </p:cNvGraphicFramePr>
+          <p:nvPr/>
+        </p:nvGraphicFramePr>
+        <p:xfrm>
+          <a:off x="530352" y="2654808"/>
+          <a:ext cx="11130991" cy="2588768"/>
+        </p:xfrm>
+        <a:graphic>
+          <a:graphicData uri="http://schemas.openxmlformats.org/drawingml/2006/table">
+            <a:tbl>
+              <a:tblPr firstRow="0" bandRow="0">
+                <a:tableStyleId>{2D5ABB26-0587-4C30-8999-92F81FD0307C}</a:tableStyleId>
+              </a:tblPr>
+              <a:tblGrid>
+                <a:gridCol w="2047739"/>
+                <a:gridCol w="8168852"/>
+                <a:gridCol w="914400"/>
+              </a:tblGrid>
+              <a:tr h="369824">
+                <a:tc>
+                  <a:txBody>
+                    <a:bodyPr/>
+                    <a:lstStyle/>
+                    <a:p>
+                      <a:r>
+                        <a:rPr sz="1450" b="1" i="0">
+                          <a:solidFill>
+                            <a:srgbClr val="FFFFFF"/>
+                          </a:solidFill>
+                          <a:latin typeface="Calibri"/>
+                        </a:rPr>
+                        <a:t>Half</a:t>
+                      </a:r>
+                    </a:p>
+                  </a:txBody>
+                  <a:tcPr marL="101600" marR="101600" marT="38100" marB="38100" anchor="ctr">
+                    <a:solidFill>
+                      <a:srgbClr val="1A0F5C"/>
+                    </a:solidFill>
+                  </a:tcPr>
+                </a:tc>
+                <a:tc>
+                  <a:txBody>
+                    <a:bodyPr/>
+                    <a:lstStyle/>
+                    <a:p>
+                      <a:r>
+                        <a:rPr sz="1450" b="1" i="0">
+                          <a:solidFill>
+                            <a:srgbClr val="FFFFFF"/>
+                          </a:solidFill>
+                          <a:latin typeface="Calibri"/>
+                        </a:rPr>
+                        <a:t>Criterion</a:t>
+                      </a:r>
+                    </a:p>
+                  </a:txBody>
+                  <a:tcPr marL="101600" marR="101600" marT="38100" marB="38100" anchor="ctr">
+                    <a:solidFill>
+                      <a:srgbClr val="1A0F5C"/>
+                    </a:solidFill>
+                  </a:tcPr>
+                </a:tc>
+                <a:tc>
+                  <a:txBody>
+                    <a:bodyPr/>
+                    <a:lstStyle/>
+                    <a:p>
+                      <a:r>
+                        <a:rPr sz="1450" b="1" i="0">
+                          <a:solidFill>
+                            <a:srgbClr val="FFFFFF"/>
+                          </a:solidFill>
+                          <a:latin typeface="Calibri"/>
+                        </a:rPr>
+                        <a:t>Marks</a:t>
+                      </a:r>
+                    </a:p>
+                  </a:txBody>
+                  <a:tcPr marL="101600" marR="101600" marT="38100" marB="38100" anchor="ctr">
+                    <a:solidFill>
+                      <a:srgbClr val="1A0F5C"/>
+                    </a:solidFill>
+                  </a:tcPr>
+                </a:tc>
+              </a:tr>
+              <a:tr h="369824">
+                <a:tc>
+                  <a:txBody>
+                    <a:bodyPr/>
+                    <a:lstStyle/>
+                    <a:p>
+                      <a:r>
+                        <a:rPr sz="1400" b="0" i="0">
+                          <a:solidFill>
+                            <a:srgbClr val="1A1440"/>
+                          </a:solidFill>
+                          <a:latin typeface="Calibri"/>
+                        </a:rPr>
+                        <a:t>Technical</a:t>
+                      </a:r>
+                    </a:p>
+                  </a:txBody>
+                  <a:tcPr marL="101600" marR="101600" marT="38100" marB="38100" anchor="ctr">
+                    <a:solidFill>
+                      <a:srgbClr val="FFFFFF"/>
+                    </a:solidFill>
+                  </a:tcPr>
+                </a:tc>
+                <a:tc>
+                  <a:txBody>
+                    <a:bodyPr/>
+                    <a:lstStyle/>
+                    <a:p>
+                      <a:r>
+                        <a:rPr sz="1400" b="0" i="0">
+                          <a:solidFill>
+                            <a:srgbClr val="1A1440"/>
+                          </a:solidFill>
+                          <a:latin typeface="Calibri"/>
+                        </a:rPr>
+                        <a:t>Correctness</a:t>
+                      </a:r>
+                    </a:p>
+                  </a:txBody>
+                  <a:tcPr marL="101600" marR="101600" marT="38100" marB="38100" anchor="ctr">
+                    <a:solidFill>
+                      <a:srgbClr val="FFFFFF"/>
+                    </a:solidFill>
+                  </a:tcPr>
+                </a:tc>
+                <a:tc>
+                  <a:txBody>
+                    <a:bodyPr/>
+                    <a:lstStyle/>
+                    <a:p>
+                      <a:r>
+                        <a:rPr sz="1400" b="0" i="0">
+                          <a:solidFill>
+                            <a:srgbClr val="1A1440"/>
+                          </a:solidFill>
+                          <a:latin typeface="Calibri"/>
+                        </a:rPr>
+                        <a:t>8</a:t>
+                      </a:r>
+                    </a:p>
+                  </a:txBody>
+                  <a:tcPr marL="101600" marR="101600" marT="38100" marB="38100" anchor="ctr">
+                    <a:solidFill>
+                      <a:srgbClr val="FFFFFF"/>
+                    </a:solidFill>
+                  </a:tcPr>
+                </a:tc>
+              </a:tr>
+              <a:tr h="369824">
+                <a:tc>
+                  <a:txBody>
+                    <a:bodyPr/>
+                    <a:lstStyle/>
+                    <a:p>
+                      <a:r>
+                        <a:rPr sz="1400" b="0" i="0">
+                          <a:solidFill>
+                            <a:srgbClr val="1A1440"/>
+                          </a:solidFill>
+                          <a:latin typeface="Calibri"/>
+                        </a:rPr>
+                        <a:t>Technical</a:t>
+                      </a:r>
+                    </a:p>
+                  </a:txBody>
+                  <a:tcPr marL="101600" marR="101600" marT="38100" marB="38100" anchor="ctr">
+                    <a:solidFill>
+                      <a:srgbClr val="F4F2FA"/>
+                    </a:solidFill>
+                  </a:tcPr>
+                </a:tc>
+                <a:tc>
+                  <a:txBody>
+                    <a:bodyPr/>
+                    <a:lstStyle/>
+                    <a:p>
+                      <a:r>
+                        <a:rPr sz="1400" b="0" i="0">
+                          <a:solidFill>
+                            <a:srgbClr val="1A1440"/>
+                          </a:solidFill>
+                          <a:latin typeface="Calibri"/>
+                        </a:rPr>
+                        <a:t>Reasoning aloud with numbers</a:t>
+                      </a:r>
+                    </a:p>
+                  </a:txBody>
+                  <a:tcPr marL="101600" marR="101600" marT="38100" marB="38100" anchor="ctr">
+                    <a:solidFill>
+                      <a:srgbClr val="F4F2FA"/>
+                    </a:solidFill>
+                  </a:tcPr>
+                </a:tc>
+                <a:tc>
+                  <a:txBody>
+                    <a:bodyPr/>
+                    <a:lstStyle/>
+                    <a:p>
+                      <a:r>
+                        <a:rPr sz="1400" b="0" i="0">
+                          <a:solidFill>
+                            <a:srgbClr val="1A1440"/>
+                          </a:solidFill>
+                          <a:latin typeface="Calibri"/>
+                        </a:rPr>
+                        <a:t>4</a:t>
+                      </a:r>
+                    </a:p>
+                  </a:txBody>
+                  <a:tcPr marL="101600" marR="101600" marT="38100" marB="38100" anchor="ctr">
+                    <a:solidFill>
+                      <a:srgbClr val="F4F2FA"/>
+                    </a:solidFill>
+                  </a:tcPr>
+                </a:tc>
+              </a:tr>
+              <a:tr h="369824">
+                <a:tc>
+                  <a:txBody>
+                    <a:bodyPr/>
+                    <a:lstStyle/>
+                    <a:p>
+                      <a:r>
+                        <a:rPr sz="1400" b="0" i="0">
+                          <a:solidFill>
+                            <a:srgbClr val="1A1440"/>
+                          </a:solidFill>
+                          <a:latin typeface="Calibri"/>
+                        </a:rPr>
+                        <a:t>Technical</a:t>
+                      </a:r>
+                    </a:p>
+                  </a:txBody>
+                  <a:tcPr marL="101600" marR="101600" marT="38100" marB="38100" anchor="ctr">
+                    <a:solidFill>
+                      <a:srgbClr val="FFFFFF"/>
+                    </a:solidFill>
+                  </a:tcPr>
+                </a:tc>
+                <a:tc>
+                  <a:txBody>
+                    <a:bodyPr/>
+                    <a:lstStyle/>
+                    <a:p>
+                      <a:r>
+                        <a:rPr sz="1400" b="0" i="0">
+                          <a:solidFill>
+                            <a:srgbClr val="1A1440"/>
+                          </a:solidFill>
+                          <a:latin typeface="Calibri"/>
+                        </a:rPr>
+                        <a:t>Handling a follow-up</a:t>
+                      </a:r>
+                    </a:p>
+                  </a:txBody>
+                  <a:tcPr marL="101600" marR="101600" marT="38100" marB="38100" anchor="ctr">
+                    <a:solidFill>
+                      <a:srgbClr val="FFFFFF"/>
+                    </a:solidFill>
+                  </a:tcPr>
+                </a:tc>
+                <a:tc>
+                  <a:txBody>
+                    <a:bodyPr/>
+                    <a:lstStyle/>
+                    <a:p>
+                      <a:r>
+                        <a:rPr sz="1400" b="0" i="0">
+                          <a:solidFill>
+                            <a:srgbClr val="1A1440"/>
+                          </a:solidFill>
+                          <a:latin typeface="Calibri"/>
+                        </a:rPr>
+                        <a:t>3</a:t>
+                      </a:r>
+                    </a:p>
+                  </a:txBody>
+                  <a:tcPr marL="101600" marR="101600" marT="38100" marB="38100" anchor="ctr">
+                    <a:solidFill>
+                      <a:srgbClr val="FFFFFF"/>
+                    </a:solidFill>
+                  </a:tcPr>
+                </a:tc>
+              </a:tr>
+              <a:tr h="369824">
+                <a:tc>
+                  <a:txBody>
+                    <a:bodyPr/>
+                    <a:lstStyle/>
+                    <a:p>
+                      <a:r>
+                        <a:rPr sz="1400" b="0" i="0">
+                          <a:solidFill>
+                            <a:srgbClr val="1A1440"/>
+                          </a:solidFill>
+                          <a:latin typeface="Calibri"/>
+                        </a:rPr>
+                        <a:t>Project viva</a:t>
+                      </a:r>
+                    </a:p>
+                  </a:txBody>
+                  <a:tcPr marL="101600" marR="101600" marT="38100" marB="38100" anchor="ctr">
+                    <a:solidFill>
+                      <a:srgbClr val="F4F2FA"/>
+                    </a:solidFill>
+                  </a:tcPr>
+                </a:tc>
+                <a:tc>
+                  <a:txBody>
+                    <a:bodyPr/>
+                    <a:lstStyle/>
+                    <a:p>
+                      <a:r>
+                        <a:rPr sz="1400" b="0" i="0">
+                          <a:solidFill>
+                            <a:srgbClr val="1A1440"/>
+                          </a:solidFill>
+                          <a:latin typeface="Calibri"/>
+                        </a:rPr>
+                        <a:t>The translation, with one decision defended by evidence</a:t>
+                      </a:r>
+                    </a:p>
+                  </a:txBody>
+                  <a:tcPr marL="101600" marR="101600" marT="38100" marB="38100" anchor="ctr">
+                    <a:solidFill>
+                      <a:srgbClr val="F4F2FA"/>
+                    </a:solidFill>
+                  </a:tcPr>
+                </a:tc>
+                <a:tc>
+                  <a:txBody>
+                    <a:bodyPr/>
+                    <a:lstStyle/>
+                    <a:p>
+                      <a:r>
+                        <a:rPr sz="1400" b="0" i="0">
+                          <a:solidFill>
+                            <a:srgbClr val="1A1440"/>
+                          </a:solidFill>
+                          <a:latin typeface="Calibri"/>
+                        </a:rPr>
+                        <a:t>6</a:t>
+                      </a:r>
+                    </a:p>
+                  </a:txBody>
+                  <a:tcPr marL="101600" marR="101600" marT="38100" marB="38100" anchor="ctr">
+                    <a:solidFill>
+                      <a:srgbClr val="F4F2FA"/>
+                    </a:solidFill>
+                  </a:tcPr>
+                </a:tc>
+              </a:tr>
+              <a:tr h="369824">
+                <a:tc>
+                  <a:txBody>
+                    <a:bodyPr/>
+                    <a:lstStyle/>
+                    <a:p>
+                      <a:r>
+                        <a:rPr sz="1400" b="0" i="0">
+                          <a:solidFill>
+                            <a:srgbClr val="1A1440"/>
+                          </a:solidFill>
+                          <a:latin typeface="Calibri"/>
+                        </a:rPr>
+                        <a:t>Project viva</a:t>
+                      </a:r>
+                    </a:p>
+                  </a:txBody>
+                  <a:tcPr marL="101600" marR="101600" marT="38100" marB="38100" anchor="ctr">
+                    <a:solidFill>
+                      <a:srgbClr val="FFFFFF"/>
+                    </a:solidFill>
+                  </a:tcPr>
+                </a:tc>
+                <a:tc>
+                  <a:txBody>
+                    <a:bodyPr/>
+                    <a:lstStyle/>
+                    <a:p>
+                      <a:r>
+                        <a:rPr sz="1400" b="0" i="0">
+                          <a:solidFill>
+                            <a:srgbClr val="1A1440"/>
+                          </a:solidFill>
+                          <a:latin typeface="Calibri"/>
+                        </a:rPr>
+                        <a:t>Defending a caveat under challenge</a:t>
+                      </a:r>
+                    </a:p>
+                  </a:txBody>
+                  <a:tcPr marL="101600" marR="101600" marT="38100" marB="38100" anchor="ctr">
+                    <a:solidFill>
+                      <a:srgbClr val="FFFFFF"/>
+                    </a:solidFill>
+                  </a:tcPr>
+                </a:tc>
+                <a:tc>
+                  <a:txBody>
+                    <a:bodyPr/>
+                    <a:lstStyle/>
+                    <a:p>
+                      <a:r>
+                        <a:rPr sz="1400" b="0" i="0">
+                          <a:solidFill>
+                            <a:srgbClr val="1A1440"/>
+                          </a:solidFill>
+                          <a:latin typeface="Calibri"/>
+                        </a:rPr>
+                        <a:t>6</a:t>
+                      </a:r>
+                    </a:p>
+                  </a:txBody>
+                  <a:tcPr marL="101600" marR="101600" marT="38100" marB="38100" anchor="ctr">
+                    <a:solidFill>
+                      <a:srgbClr val="FFFFFF"/>
+                    </a:solidFill>
+                  </a:tcPr>
+                </a:tc>
+              </a:tr>
+              <a:tr h="369824">
+                <a:tc>
+                  <a:txBody>
+                    <a:bodyPr/>
+                    <a:lstStyle/>
+                    <a:p>
+                      <a:r>
+                        <a:rPr sz="1400" b="0" i="0">
+                          <a:solidFill>
+                            <a:srgbClr val="1A1440"/>
+                          </a:solidFill>
+                          <a:latin typeface="Calibri"/>
+                        </a:rPr>
+                        <a:t>Project viva</a:t>
+                      </a:r>
+                    </a:p>
+                  </a:txBody>
+                  <a:tcPr marL="101600" marR="101600" marT="38100" marB="38100" anchor="ctr">
+                    <a:solidFill>
+                      <a:srgbClr val="F4F2FA"/>
+                    </a:solidFill>
+                  </a:tcPr>
+                </a:tc>
+                <a:tc>
+                  <a:txBody>
+                    <a:bodyPr/>
+                    <a:lstStyle/>
+                    <a:p>
+                      <a:r>
+                        <a:rPr sz="1400" b="0" i="0">
+                          <a:solidFill>
+                            <a:srgbClr val="1A1440"/>
+                          </a:solidFill>
+                          <a:latin typeface="Calibri"/>
+                        </a:rPr>
+                        <a:t>What they would do differently</a:t>
+                      </a:r>
+                    </a:p>
+                  </a:txBody>
+                  <a:tcPr marL="101600" marR="101600" marT="38100" marB="38100" anchor="ctr">
+                    <a:solidFill>
+                      <a:srgbClr val="F4F2FA"/>
+                    </a:solidFill>
+                  </a:tcPr>
+                </a:tc>
+                <a:tc>
+                  <a:txBody>
+                    <a:bodyPr/>
+                    <a:lstStyle/>
+                    <a:p>
+                      <a:r>
+                        <a:rPr sz="1400" b="0" i="0">
+                          <a:solidFill>
+                            <a:srgbClr val="1A1440"/>
+                          </a:solidFill>
+                          <a:latin typeface="Calibri"/>
+                        </a:rPr>
+                        <a:t>3</a:t>
+                      </a:r>
+                    </a:p>
+                  </a:txBody>
+                  <a:tcPr marL="101600" marR="101600" marT="38100" marB="38100" anchor="ctr">
+                    <a:solidFill>
+                      <a:srgbClr val="F4F2FA"/>
+                    </a:solidFill>
+                  </a:tcPr>
+                </a:tc>
+              </a:tr>
+            </a:tbl>
+          </a:graphicData>
+        </a:graphic>
+      </p:graphicFrame>
+      <p:sp>
+        <p:nvSpPr>
+          <p:cNvPr id="13" name="TextBox 12"/>
+          <p:cNvSpPr txBox="1"/>
+          <p:nvPr/>
+        </p:nvSpPr>
+        <p:spPr>
+          <a:xfrm>
+            <a:off x="530352" y="5499608"/>
+            <a:ext cx="11130991" cy="495807"/>
+          </a:xfrm>
+          <a:prstGeom prst="rect">
+            <a:avLst/>
+          </a:prstGeom>
+          <a:noFill/>
+        </p:spPr>
+        <p:txBody>
+          <a:bodyPr wrap="square" anchor="t" lIns="0" rIns="0" tIns="0" bIns="0">
+            <a:spAutoFit/>
+          </a:bodyPr>
+          <a:lstStyle/>
+          <a:p>
+            <a:pPr>
+              <a:spcAft>
+                <a:spcPts val="800"/>
+              </a:spcAft>
+            </a:pPr>
+            <a:r>
+              <a:rPr sz="1600" b="0" i="0">
+                <a:solidFill>
+                  <a:srgbClr val="1A1440"/>
+                </a:solidFill>
+                <a:latin typeface="Calibri"/>
+              </a:rPr>
+              <a:t>Mock R1 runs for every learner on Thursday 22 October.</a:t>
+            </a:r>
+          </a:p>
+        </p:txBody>
+      </p:sp>
+      <p:sp>
+        <p:nvSpPr>
+          <p:cNvPr id="14" name="Oval 13"/>
           <p:cNvSpPr/>
           <p:nvPr/>
         </p:nvSpPr>
@@ -10863,7 +12237,7 @@
       </p:sp>
       <p:sp>
         <p:nvSpPr>
-          <p:cNvPr id="14" name="TextBox 13"/>
+          <p:cNvPr id="15" name="TextBox 14"/>
           <p:cNvSpPr txBox="1"/>
           <p:nvPr/>
         </p:nvSpPr>
@@ -10898,13 +12272,92 @@
       </p:sp>
       <p:sp>
         <p:nvSpPr>
-          <p:cNvPr id="15" name="Oval 14"/>
+          <p:cNvPr id="16" name="Oval 15"/>
           <p:cNvSpPr/>
           <p:nvPr/>
         </p:nvSpPr>
         <p:spPr>
           <a:xfrm>
             <a:off x="1327880" y="6492240"/>
+            <a:ext cx="64008" cy="64008"/>
+          </a:xfrm>
+          <a:prstGeom prst="ellipse">
+            <a:avLst/>
+          </a:prstGeom>
+          <a:solidFill>
+            <a:srgbClr val="5B3FD6"/>
+          </a:solidFill>
+          <a:ln>
+            <a:noFill/>
+          </a:ln>
+          <a:effectLst/>
+        </p:spPr>
+        <p:style>
+          <a:lnRef idx="1">
+            <a:schemeClr val="accent1"/>
+          </a:lnRef>
+          <a:fillRef idx="3">
+            <a:schemeClr val="accent1"/>
+          </a:fillRef>
+          <a:effectRef idx="2">
+            <a:schemeClr val="accent1"/>
+          </a:effectRef>
+          <a:fontRef idx="minor">
+            <a:schemeClr val="lt1"/>
+          </a:fontRef>
+        </p:style>
+        <p:txBody>
+          <a:bodyPr rtlCol="0" anchor="ctr" wrap="square"/>
+          <a:lstStyle/>
+          <a:p>
+            <a:pPr algn="ctr"/>
+          </a:p>
+        </p:txBody>
+      </p:sp>
+      <p:sp>
+        <p:nvSpPr>
+          <p:cNvPr id="17" name="TextBox 16"/>
+          <p:cNvSpPr txBox="1"/>
+          <p:nvPr/>
+        </p:nvSpPr>
+        <p:spPr>
+          <a:xfrm>
+            <a:off x="1437608" y="6437376"/>
+            <a:ext cx="642366" cy="152146"/>
+          </a:xfrm>
+          <a:prstGeom prst="rect">
+            <a:avLst/>
+          </a:prstGeom>
+          <a:noFill/>
+        </p:spPr>
+        <p:txBody>
+          <a:bodyPr wrap="square" anchor="t" lIns="0" rIns="0" tIns="0" bIns="0">
+            <a:spAutoFit/>
+          </a:bodyPr>
+          <a:lstStyle/>
+          <a:p>
+            <a:pPr algn="l"/>
+            <a:r>
+              <a:rPr sz="700" b="1" i="0">
+                <a:solidFill>
+                  <a:srgbClr val="5B3FD6"/>
+                </a:solidFill>
+                <a:latin typeface="Calibri"/>
+              </a:rPr>
+              <a:t>The week</a:t>
+            </a:r>
+          </a:p>
+        </p:txBody>
+      </p:sp>
+      <p:sp>
+        <p:nvSpPr>
+          <p:cNvPr id="18" name="Oval 17"/>
+          <p:cNvSpPr/>
+          <p:nvPr/>
+        </p:nvSpPr>
+        <p:spPr>
+          <a:xfrm>
+            <a:off x="2171414" y="6492240"/>
             <a:ext cx="64008" cy="64008"/>
           </a:xfrm>
           <a:prstGeom prst="ellipse">
@@ -10942,86 +12395,7 @@
       </p:sp>
       <p:sp>
         <p:nvSpPr>
-          <p:cNvPr id="16" name="TextBox 15"/>
-          <p:cNvSpPr txBox="1"/>
-          <p:nvPr/>
-        </p:nvSpPr>
-        <p:spPr>
-          <a:xfrm>
-            <a:off x="1437608" y="6437376"/>
-            <a:ext cx="642366" cy="152146"/>
-          </a:xfrm>
-          <a:prstGeom prst="rect">
-            <a:avLst/>
-          </a:prstGeom>
-          <a:noFill/>
-        </p:spPr>
-        <p:txBody>
-          <a:bodyPr wrap="square" anchor="t" lIns="0" rIns="0" tIns="0" bIns="0">
-            <a:spAutoFit/>
-          </a:bodyPr>
-          <a:lstStyle/>
-          <a:p>
-            <a:pPr algn="l"/>
-            <a:r>
-              <a:rPr sz="700" b="0" i="0">
-                <a:solidFill>
-                  <a:srgbClr val="6B6690"/>
-                </a:solidFill>
-                <a:latin typeface="Calibri"/>
-              </a:rPr>
-              <a:t>The week</a:t>
-            </a:r>
-          </a:p>
-        </p:txBody>
-      </p:sp>
-      <p:sp>
-        <p:nvSpPr>
-          <p:cNvPr id="17" name="Oval 16"/>
-          <p:cNvSpPr/>
-          <p:nvPr/>
-        </p:nvSpPr>
-        <p:spPr>
-          <a:xfrm>
-            <a:off x="2171414" y="6492240"/>
-            <a:ext cx="64008" cy="64008"/>
-          </a:xfrm>
-          <a:prstGeom prst="ellipse">
-            <a:avLst/>
-          </a:prstGeom>
-          <a:solidFill>
-            <a:srgbClr val="5B3FD6"/>
-          </a:solidFill>
-          <a:ln>
-            <a:noFill/>
-          </a:ln>
-          <a:effectLst/>
-        </p:spPr>
-        <p:style>
-          <a:lnRef idx="1">
-            <a:schemeClr val="accent1"/>
-          </a:lnRef>
-          <a:fillRef idx="3">
-            <a:schemeClr val="accent1"/>
-          </a:fillRef>
-          <a:effectRef idx="2">
-            <a:schemeClr val="accent1"/>
-          </a:effectRef>
-          <a:fontRef idx="minor">
-            <a:schemeClr val="lt1"/>
-          </a:fontRef>
-        </p:style>
-        <p:txBody>
-          <a:bodyPr rtlCol="0" anchor="ctr" wrap="square"/>
-          <a:lstStyle/>
-          <a:p>
-            <a:pPr algn="ctr"/>
-          </a:p>
-        </p:txBody>
-      </p:sp>
-      <p:sp>
-        <p:nvSpPr>
-          <p:cNvPr id="18" name="TextBox 17"/>
+          <p:cNvPr id="19" name="TextBox 18"/>
           <p:cNvSpPr txBox="1"/>
           <p:nvPr/>
         </p:nvSpPr>
@@ -11043,9 +12417,9 @@
           <a:p>
             <a:pPr algn="l"/>
             <a:r>
-              <a:rPr sz="700" b="1" i="0">
-                <a:solidFill>
-                  <a:srgbClr val="5B3FD6"/>
+              <a:rPr sz="700" b="0" i="0">
+                <a:solidFill>
+                  <a:srgbClr val="6B6690"/>
                 </a:solidFill>
                 <a:latin typeface="Calibri"/>
               </a:rPr>
@@ -11056,7 +12430,7 @@
       </p:sp>
       <p:sp>
         <p:nvSpPr>
-          <p:cNvPr id="19" name="TextBox 18"/>
+          <p:cNvPr id="20" name="TextBox 19"/>
           <p:cNvSpPr txBox="1"/>
           <p:nvPr/>
         </p:nvSpPr>
@@ -11084,7 +12458,7 @@
                 </a:solidFill>
                 <a:latin typeface="Calibri"/>
               </a:rPr>
-              <a:t>S10  ·  14 / 21</a:t>
+              <a:t>S9b  ·  14 / 24</a:t>
             </a:r>
           </a:p>
         </p:txBody>
@@ -11290,7 +12664,7 @@
                 </a:solidFill>
                 <a:latin typeface="Georgia"/>
               </a:rPr>
-              <a:t>The investigation ladder, from Week 1 Tuesday</a:t>
+              <a:t>How the group discussion is scored</a:t>
             </a:r>
           </a:p>
         </p:txBody>
@@ -11325,44 +12699,20 @@
                 </a:solidFill>
                 <a:latin typeface="Calibri"/>
               </a:rPr>
-              <a:t>Confirm the drop before explaining it, then compare like with like.</a:t>
-            </a:r>
-          </a:p>
-        </p:txBody>
-      </p:sp>
-      <p:pic>
-        <p:nvPicPr>
-          <p:cNvPr id="9" name="mermaid diagram" descr="cc65b150ac99033b.png"/>
-          <p:cNvPicPr>
-            <a:picLocks noChangeAspect="1"/>
-          </p:cNvPicPr>
-          <p:nvPr/>
-        </p:nvPicPr>
-        <p:blipFill>
-          <a:blip r:embed="rId5"/>
-          <a:stretch>
-            <a:fillRect/>
-          </a:stretch>
-        </p:blipFill>
-        <p:spPr>
-          <a:xfrm>
-            <a:off x="4928995" y="1664208"/>
-            <a:ext cx="2333705" cy="3784092"/>
-          </a:xfrm>
-          <a:prstGeom prst="rect">
-            <a:avLst/>
-          </a:prstGeom>
-        </p:spPr>
-      </p:pic>
-      <p:sp>
-        <p:nvSpPr>
-          <p:cNvPr id="10" name="Rounded Rectangle 9"/>
+              <a:t>Scored for each of you alone, on Kalpa Health's problem space.</a:t>
+            </a:r>
+          </a:p>
+        </p:txBody>
+      </p:sp>
+      <p:sp>
+        <p:nvSpPr>
+          <p:cNvPr id="9" name="Rounded Rectangle 8"/>
           <p:cNvSpPr/>
           <p:nvPr/>
         </p:nvSpPr>
         <p:spPr>
           <a:xfrm>
-            <a:off x="530352" y="5494020"/>
+            <a:off x="530352" y="1956816"/>
             <a:ext cx="11130991" cy="541020"/>
           </a:xfrm>
           <a:prstGeom prst="roundRect">
@@ -11404,13 +12754,13 @@
       </p:sp>
       <p:sp>
         <p:nvSpPr>
-          <p:cNvPr id="11" name="Rounded Rectangle 10"/>
+          <p:cNvPr id="10" name="Rounded Rectangle 9"/>
           <p:cNvSpPr/>
           <p:nvPr/>
         </p:nvSpPr>
         <p:spPr>
           <a:xfrm>
-            <a:off x="676656" y="5622036"/>
+            <a:off x="676656" y="2084832"/>
             <a:ext cx="45720" cy="284988"/>
           </a:xfrm>
           <a:prstGeom prst="roundRect">
@@ -11450,13 +12800,13 @@
       </p:sp>
       <p:sp>
         <p:nvSpPr>
-          <p:cNvPr id="12" name="TextBox 11"/>
-          <p:cNvSpPr txBox="1"/>
-          <p:nvPr/>
-        </p:nvSpPr>
-        <p:spPr>
-          <a:xfrm>
-            <a:off x="877824" y="5612892"/>
+          <p:cNvPr id="11" name="TextBox 10"/>
+          <p:cNvSpPr txBox="1"/>
+          <p:nvPr/>
+        </p:nvSpPr>
+        <p:spPr>
+          <a:xfrm>
+            <a:off x="877824" y="2075688"/>
             <a:ext cx="10564063" cy="358140"/>
           </a:xfrm>
           <a:prstGeom prst="rect">
@@ -11477,7 +12827,7 @@
                 </a:solidFill>
                 <a:latin typeface="Calibri"/>
               </a:rPr>
-              <a:t>Your turn. </a:t>
+              <a:t>Group discussion, 30 marks. </a:t>
             </a:r>
             <a:r>
               <a:rPr sz="1500" b="0" i="0">
@@ -11486,14 +12836,420 @@
                 </a:solidFill>
                 <a:latin typeface="Calibri"/>
               </a:rPr>
-              <a:t>Which rung does a Kalpa Health question skip most easily, and what would that cost?</a:t>
-            </a:r>
-          </a:p>
-        </p:txBody>
-      </p:sp>
-      <p:sp>
-        <p:nvSpPr>
-          <p:cNvPr id="13" name="Oval 12"/>
+              <a:t>Each learner is scored alone.</a:t>
+            </a:r>
+          </a:p>
+        </p:txBody>
+      </p:sp>
+      <p:graphicFrame>
+        <p:nvGraphicFramePr>
+          <p:cNvPr id="12" name="Table 11"/>
+          <p:cNvGraphicFramePr>
+            <a:graphicFrameLocks noGrp="1"/>
+          </p:cNvGraphicFramePr>
+          <p:nvPr/>
+        </p:nvGraphicFramePr>
+        <p:xfrm>
+          <a:off x="530352" y="2662428"/>
+          <a:ext cx="11130990" cy="2090928"/>
+        </p:xfrm>
+        <a:graphic>
+          <a:graphicData uri="http://schemas.openxmlformats.org/drawingml/2006/table">
+            <a:tbl>
+              <a:tblPr firstRow="0" bandRow="0">
+                <a:tableStyleId>{2D5ABB26-0587-4C30-8999-92F81FD0307C}</a:tableStyleId>
+              </a:tblPr>
+              <a:tblGrid>
+                <a:gridCol w="2935389"/>
+                <a:gridCol w="914400"/>
+                <a:gridCol w="7281201"/>
+              </a:tblGrid>
+              <a:tr h="369824">
+                <a:tc>
+                  <a:txBody>
+                    <a:bodyPr/>
+                    <a:lstStyle/>
+                    <a:p>
+                      <a:r>
+                        <a:rPr sz="1450" b="1" i="0">
+                          <a:solidFill>
+                            <a:srgbClr val="FFFFFF"/>
+                          </a:solidFill>
+                          <a:latin typeface="Calibri"/>
+                        </a:rPr>
+                        <a:t>Criterion</a:t>
+                      </a:r>
+                    </a:p>
+                  </a:txBody>
+                  <a:tcPr marL="101600" marR="101600" marT="38100" marB="38100" anchor="ctr">
+                    <a:solidFill>
+                      <a:srgbClr val="1A0F5C"/>
+                    </a:solidFill>
+                  </a:tcPr>
+                </a:tc>
+                <a:tc>
+                  <a:txBody>
+                    <a:bodyPr/>
+                    <a:lstStyle/>
+                    <a:p>
+                      <a:r>
+                        <a:rPr sz="1450" b="1" i="0">
+                          <a:solidFill>
+                            <a:srgbClr val="FFFFFF"/>
+                          </a:solidFill>
+                          <a:latin typeface="Calibri"/>
+                        </a:rPr>
+                        <a:t>Marks</a:t>
+                      </a:r>
+                    </a:p>
+                  </a:txBody>
+                  <a:tcPr marL="101600" marR="101600" marT="38100" marB="38100" anchor="ctr">
+                    <a:solidFill>
+                      <a:srgbClr val="1A0F5C"/>
+                    </a:solidFill>
+                  </a:tcPr>
+                </a:tc>
+                <a:tc>
+                  <a:txBody>
+                    <a:bodyPr/>
+                    <a:lstStyle/>
+                    <a:p>
+                      <a:r>
+                        <a:rPr sz="1450" b="1" i="0">
+                          <a:solidFill>
+                            <a:srgbClr val="FFFFFF"/>
+                          </a:solidFill>
+                          <a:latin typeface="Calibri"/>
+                        </a:rPr>
+                        <a:t>What full marks look like</a:t>
+                      </a:r>
+                    </a:p>
+                  </a:txBody>
+                  <a:tcPr marL="101600" marR="101600" marT="38100" marB="38100" anchor="ctr">
+                    <a:solidFill>
+                      <a:srgbClr val="1A0F5C"/>
+                    </a:solidFill>
+                  </a:tcPr>
+                </a:tc>
+              </a:tr>
+              <a:tr h="369824">
+                <a:tc>
+                  <a:txBody>
+                    <a:bodyPr/>
+                    <a:lstStyle/>
+                    <a:p>
+                      <a:r>
+                        <a:rPr sz="1400" b="0" i="0">
+                          <a:solidFill>
+                            <a:srgbClr val="1A1440"/>
+                          </a:solidFill>
+                          <a:latin typeface="Calibri"/>
+                        </a:rPr>
+                        <a:t>Structures the problem</a:t>
+                      </a:r>
+                    </a:p>
+                  </a:txBody>
+                  <a:tcPr marL="101600" marR="101600" marT="38100" marB="38100" anchor="ctr">
+                    <a:solidFill>
+                      <a:srgbClr val="FFFFFF"/>
+                    </a:solidFill>
+                  </a:tcPr>
+                </a:tc>
+                <a:tc>
+                  <a:txBody>
+                    <a:bodyPr/>
+                    <a:lstStyle/>
+                    <a:p>
+                      <a:r>
+                        <a:rPr sz="1400" b="0" i="0">
+                          <a:solidFill>
+                            <a:srgbClr val="1A1440"/>
+                          </a:solidFill>
+                          <a:latin typeface="Calibri"/>
+                        </a:rPr>
+                        <a:t>8</a:t>
+                      </a:r>
+                    </a:p>
+                  </a:txBody>
+                  <a:tcPr marL="101600" marR="101600" marT="38100" marB="38100" anchor="ctr">
+                    <a:solidFill>
+                      <a:srgbClr val="FFFFFF"/>
+                    </a:solidFill>
+                  </a:tcPr>
+                </a:tc>
+                <a:tc>
+                  <a:txBody>
+                    <a:bodyPr/>
+                    <a:lstStyle/>
+                    <a:p>
+                      <a:r>
+                        <a:rPr sz="1400" b="0" i="0">
+                          <a:solidFill>
+                            <a:srgbClr val="1A1440"/>
+                          </a:solidFill>
+                          <a:latin typeface="Calibri"/>
+                        </a:rPr>
+                        <a:t>The learner frames the decision and the metric before arguing.</a:t>
+                      </a:r>
+                    </a:p>
+                  </a:txBody>
+                  <a:tcPr marL="101600" marR="101600" marT="38100" marB="38100" anchor="ctr">
+                    <a:solidFill>
+                      <a:srgbClr val="FFFFFF"/>
+                    </a:solidFill>
+                  </a:tcPr>
+                </a:tc>
+              </a:tr>
+              <a:tr h="369824">
+                <a:tc>
+                  <a:txBody>
+                    <a:bodyPr/>
+                    <a:lstStyle/>
+                    <a:p>
+                      <a:r>
+                        <a:rPr sz="1400" b="0" i="0">
+                          <a:solidFill>
+                            <a:srgbClr val="1A1440"/>
+                          </a:solidFill>
+                          <a:latin typeface="Calibri"/>
+                        </a:rPr>
+                        <a:t>Uses evidence</a:t>
+                      </a:r>
+                    </a:p>
+                  </a:txBody>
+                  <a:tcPr marL="101600" marR="101600" marT="38100" marB="38100" anchor="ctr">
+                    <a:solidFill>
+                      <a:srgbClr val="F4F2FA"/>
+                    </a:solidFill>
+                  </a:tcPr>
+                </a:tc>
+                <a:tc>
+                  <a:txBody>
+                    <a:bodyPr/>
+                    <a:lstStyle/>
+                    <a:p>
+                      <a:r>
+                        <a:rPr sz="1400" b="0" i="0">
+                          <a:solidFill>
+                            <a:srgbClr val="1A1440"/>
+                          </a:solidFill>
+                          <a:latin typeface="Calibri"/>
+                        </a:rPr>
+                        <a:t>8</a:t>
+                      </a:r>
+                    </a:p>
+                  </a:txBody>
+                  <a:tcPr marL="101600" marR="101600" marT="38100" marB="38100" anchor="ctr">
+                    <a:solidFill>
+                      <a:srgbClr val="F4F2FA"/>
+                    </a:solidFill>
+                  </a:tcPr>
+                </a:tc>
+                <a:tc>
+                  <a:txBody>
+                    <a:bodyPr/>
+                    <a:lstStyle/>
+                    <a:p>
+                      <a:r>
+                        <a:rPr sz="1400" b="0" i="0">
+                          <a:solidFill>
+                            <a:srgbClr val="1A1440"/>
+                          </a:solidFill>
+                          <a:latin typeface="Calibri"/>
+                        </a:rPr>
+                        <a:t>The learner takes a position and defends it with a number from the exhibit.</a:t>
+                      </a:r>
+                    </a:p>
+                  </a:txBody>
+                  <a:tcPr marL="101600" marR="101600" marT="38100" marB="38100" anchor="ctr">
+                    <a:solidFill>
+                      <a:srgbClr val="F4F2FA"/>
+                    </a:solidFill>
+                  </a:tcPr>
+                </a:tc>
+              </a:tr>
+              <a:tr h="611632">
+                <a:tc>
+                  <a:txBody>
+                    <a:bodyPr/>
+                    <a:lstStyle/>
+                    <a:p>
+                      <a:r>
+                        <a:rPr sz="1400" b="0" i="0">
+                          <a:solidFill>
+                            <a:srgbClr val="1A1440"/>
+                          </a:solidFill>
+                          <a:latin typeface="Calibri"/>
+                        </a:rPr>
+                        <a:t>Engages</a:t>
+                      </a:r>
+                    </a:p>
+                  </a:txBody>
+                  <a:tcPr marL="101600" marR="101600" marT="38100" marB="38100" anchor="ctr">
+                    <a:solidFill>
+                      <a:srgbClr val="FFFFFF"/>
+                    </a:solidFill>
+                  </a:tcPr>
+                </a:tc>
+                <a:tc>
+                  <a:txBody>
+                    <a:bodyPr/>
+                    <a:lstStyle/>
+                    <a:p>
+                      <a:r>
+                        <a:rPr sz="1400" b="0" i="0">
+                          <a:solidFill>
+                            <a:srgbClr val="1A1440"/>
+                          </a:solidFill>
+                          <a:latin typeface="Calibri"/>
+                        </a:rPr>
+                        <a:t>8</a:t>
+                      </a:r>
+                    </a:p>
+                  </a:txBody>
+                  <a:tcPr marL="101600" marR="101600" marT="38100" marB="38100" anchor="ctr">
+                    <a:solidFill>
+                      <a:srgbClr val="FFFFFF"/>
+                    </a:solidFill>
+                  </a:tcPr>
+                </a:tc>
+                <a:tc>
+                  <a:txBody>
+                    <a:bodyPr/>
+                    <a:lstStyle/>
+                    <a:p>
+                      <a:r>
+                        <a:rPr sz="1400" b="0" i="0">
+                          <a:solidFill>
+                            <a:srgbClr val="1A1440"/>
+                          </a:solidFill>
+                          <a:latin typeface="Calibri"/>
+                        </a:rPr>
+                        <a:t>The learner builds on or challenges another member's point and brings a quiet member in.</a:t>
+                      </a:r>
+                    </a:p>
+                  </a:txBody>
+                  <a:tcPr marL="101600" marR="101600" marT="38100" marB="38100" anchor="ctr">
+                    <a:solidFill>
+                      <a:srgbClr val="FFFFFF"/>
+                    </a:solidFill>
+                  </a:tcPr>
+                </a:tc>
+              </a:tr>
+              <a:tr h="369824">
+                <a:tc>
+                  <a:txBody>
+                    <a:bodyPr/>
+                    <a:lstStyle/>
+                    <a:p>
+                      <a:r>
+                        <a:rPr sz="1400" b="0" i="0">
+                          <a:solidFill>
+                            <a:srgbClr val="1A1440"/>
+                          </a:solidFill>
+                          <a:latin typeface="Calibri"/>
+                        </a:rPr>
+                        <a:t>Lands a conclusion</a:t>
+                      </a:r>
+                    </a:p>
+                  </a:txBody>
+                  <a:tcPr marL="101600" marR="101600" marT="38100" marB="38100" anchor="ctr">
+                    <a:solidFill>
+                      <a:srgbClr val="F4F2FA"/>
+                    </a:solidFill>
+                  </a:tcPr>
+                </a:tc>
+                <a:tc>
+                  <a:txBody>
+                    <a:bodyPr/>
+                    <a:lstStyle/>
+                    <a:p>
+                      <a:r>
+                        <a:rPr sz="1400" b="0" i="0">
+                          <a:solidFill>
+                            <a:srgbClr val="1A1440"/>
+                          </a:solidFill>
+                          <a:latin typeface="Calibri"/>
+                        </a:rPr>
+                        <a:t>6</a:t>
+                      </a:r>
+                    </a:p>
+                  </a:txBody>
+                  <a:tcPr marL="101600" marR="101600" marT="38100" marB="38100" anchor="ctr">
+                    <a:solidFill>
+                      <a:srgbClr val="F4F2FA"/>
+                    </a:solidFill>
+                  </a:tcPr>
+                </a:tc>
+                <a:tc>
+                  <a:txBody>
+                    <a:bodyPr/>
+                    <a:lstStyle/>
+                    <a:p>
+                      <a:r>
+                        <a:rPr sz="1400" b="0" i="0">
+                          <a:solidFill>
+                            <a:srgbClr val="1A1440"/>
+                          </a:solidFill>
+                          <a:latin typeface="Calibri"/>
+                        </a:rPr>
+                        <a:t>The discussion ends on a recommendation and its main risk.</a:t>
+                      </a:r>
+                    </a:p>
+                  </a:txBody>
+                  <a:tcPr marL="101600" marR="101600" marT="38100" marB="38100" anchor="ctr">
+                    <a:solidFill>
+                      <a:srgbClr val="F4F2FA"/>
+                    </a:solidFill>
+                  </a:tcPr>
+                </a:tc>
+              </a:tr>
+            </a:tbl>
+          </a:graphicData>
+        </a:graphic>
+      </p:graphicFrame>
+      <p:sp>
+        <p:nvSpPr>
+          <p:cNvPr id="13" name="TextBox 12"/>
+          <p:cNvSpPr txBox="1"/>
+          <p:nvPr/>
+        </p:nvSpPr>
+        <p:spPr>
+          <a:xfrm>
+            <a:off x="530352" y="5009388"/>
+            <a:ext cx="11130991" cy="495807"/>
+          </a:xfrm>
+          <a:prstGeom prst="rect">
+            <a:avLst/>
+          </a:prstGeom>
+          <a:noFill/>
+        </p:spPr>
+        <p:txBody>
+          <a:bodyPr wrap="square" anchor="t" lIns="0" rIns="0" tIns="0" bIns="0">
+            <a:spAutoFit/>
+          </a:bodyPr>
+          <a:lstStyle/>
+          <a:p>
+            <a:pPr>
+              <a:spcAft>
+                <a:spcPts val="800"/>
+              </a:spcAft>
+            </a:pPr>
+            <a:r>
+              <a:rPr sz="1600" b="0" i="0">
+                <a:solidFill>
+                  <a:srgbClr val="1A1440"/>
+                </a:solidFill>
+                <a:latin typeface="Calibri"/>
+              </a:rPr>
+              <a:t>The GD rounds run on Friday 23 October and close on the morning of Saturday 24 October.</a:t>
+            </a:r>
+          </a:p>
+        </p:txBody>
+      </p:sp>
+      <p:sp>
+        <p:nvSpPr>
+          <p:cNvPr id="14" name="Oval 13"/>
           <p:cNvSpPr/>
           <p:nvPr/>
         </p:nvSpPr>
@@ -11537,7 +13293,7 @@
       </p:sp>
       <p:sp>
         <p:nvSpPr>
-          <p:cNvPr id="14" name="TextBox 13"/>
+          <p:cNvPr id="15" name="TextBox 14"/>
           <p:cNvSpPr txBox="1"/>
           <p:nvPr/>
         </p:nvSpPr>
@@ -11572,13 +13328,92 @@
       </p:sp>
       <p:sp>
         <p:nvSpPr>
-          <p:cNvPr id="15" name="Oval 14"/>
+          <p:cNvPr id="16" name="Oval 15"/>
           <p:cNvSpPr/>
           <p:nvPr/>
         </p:nvSpPr>
         <p:spPr>
           <a:xfrm>
             <a:off x="1327880" y="6492240"/>
+            <a:ext cx="64008" cy="64008"/>
+          </a:xfrm>
+          <a:prstGeom prst="ellipse">
+            <a:avLst/>
+          </a:prstGeom>
+          <a:solidFill>
+            <a:srgbClr val="5B3FD6"/>
+          </a:solidFill>
+          <a:ln>
+            <a:noFill/>
+          </a:ln>
+          <a:effectLst/>
+        </p:spPr>
+        <p:style>
+          <a:lnRef idx="1">
+            <a:schemeClr val="accent1"/>
+          </a:lnRef>
+          <a:fillRef idx="3">
+            <a:schemeClr val="accent1"/>
+          </a:fillRef>
+          <a:effectRef idx="2">
+            <a:schemeClr val="accent1"/>
+          </a:effectRef>
+          <a:fontRef idx="minor">
+            <a:schemeClr val="lt1"/>
+          </a:fontRef>
+        </p:style>
+        <p:txBody>
+          <a:bodyPr rtlCol="0" anchor="ctr" wrap="square"/>
+          <a:lstStyle/>
+          <a:p>
+            <a:pPr algn="ctr"/>
+          </a:p>
+        </p:txBody>
+      </p:sp>
+      <p:sp>
+        <p:nvSpPr>
+          <p:cNvPr id="17" name="TextBox 16"/>
+          <p:cNvSpPr txBox="1"/>
+          <p:nvPr/>
+        </p:nvSpPr>
+        <p:spPr>
+          <a:xfrm>
+            <a:off x="1437608" y="6437376"/>
+            <a:ext cx="642366" cy="152146"/>
+          </a:xfrm>
+          <a:prstGeom prst="rect">
+            <a:avLst/>
+          </a:prstGeom>
+          <a:noFill/>
+        </p:spPr>
+        <p:txBody>
+          <a:bodyPr wrap="square" anchor="t" lIns="0" rIns="0" tIns="0" bIns="0">
+            <a:spAutoFit/>
+          </a:bodyPr>
+          <a:lstStyle/>
+          <a:p>
+            <a:pPr algn="l"/>
+            <a:r>
+              <a:rPr sz="700" b="1" i="0">
+                <a:solidFill>
+                  <a:srgbClr val="5B3FD6"/>
+                </a:solidFill>
+                <a:latin typeface="Calibri"/>
+              </a:rPr>
+              <a:t>The week</a:t>
+            </a:r>
+          </a:p>
+        </p:txBody>
+      </p:sp>
+      <p:sp>
+        <p:nvSpPr>
+          <p:cNvPr id="18" name="Oval 17"/>
+          <p:cNvSpPr/>
+          <p:nvPr/>
+        </p:nvSpPr>
+        <p:spPr>
+          <a:xfrm>
+            <a:off x="2171414" y="6492240"/>
             <a:ext cx="64008" cy="64008"/>
           </a:xfrm>
           <a:prstGeom prst="ellipse">
@@ -11616,86 +13451,7 @@
       </p:sp>
       <p:sp>
         <p:nvSpPr>
-          <p:cNvPr id="16" name="TextBox 15"/>
-          <p:cNvSpPr txBox="1"/>
-          <p:nvPr/>
-        </p:nvSpPr>
-        <p:spPr>
-          <a:xfrm>
-            <a:off x="1437608" y="6437376"/>
-            <a:ext cx="642366" cy="152146"/>
-          </a:xfrm>
-          <a:prstGeom prst="rect">
-            <a:avLst/>
-          </a:prstGeom>
-          <a:noFill/>
-        </p:spPr>
-        <p:txBody>
-          <a:bodyPr wrap="square" anchor="t" lIns="0" rIns="0" tIns="0" bIns="0">
-            <a:spAutoFit/>
-          </a:bodyPr>
-          <a:lstStyle/>
-          <a:p>
-            <a:pPr algn="l"/>
-            <a:r>
-              <a:rPr sz="700" b="0" i="0">
-                <a:solidFill>
-                  <a:srgbClr val="6B6690"/>
-                </a:solidFill>
-                <a:latin typeface="Calibri"/>
-              </a:rPr>
-              <a:t>The week</a:t>
-            </a:r>
-          </a:p>
-        </p:txBody>
-      </p:sp>
-      <p:sp>
-        <p:nvSpPr>
-          <p:cNvPr id="17" name="Oval 16"/>
-          <p:cNvSpPr/>
-          <p:nvPr/>
-        </p:nvSpPr>
-        <p:spPr>
-          <a:xfrm>
-            <a:off x="2171414" y="6492240"/>
-            <a:ext cx="64008" cy="64008"/>
-          </a:xfrm>
-          <a:prstGeom prst="ellipse">
-            <a:avLst/>
-          </a:prstGeom>
-          <a:solidFill>
-            <a:srgbClr val="5B3FD6"/>
-          </a:solidFill>
-          <a:ln>
-            <a:noFill/>
-          </a:ln>
-          <a:effectLst/>
-        </p:spPr>
-        <p:style>
-          <a:lnRef idx="1">
-            <a:schemeClr val="accent1"/>
-          </a:lnRef>
-          <a:fillRef idx="3">
-            <a:schemeClr val="accent1"/>
-          </a:fillRef>
-          <a:effectRef idx="2">
-            <a:schemeClr val="accent1"/>
-          </a:effectRef>
-          <a:fontRef idx="minor">
-            <a:schemeClr val="lt1"/>
-          </a:fontRef>
-        </p:style>
-        <p:txBody>
-          <a:bodyPr rtlCol="0" anchor="ctr" wrap="square"/>
-          <a:lstStyle/>
-          <a:p>
-            <a:pPr algn="ctr"/>
-          </a:p>
-        </p:txBody>
-      </p:sp>
-      <p:sp>
-        <p:nvSpPr>
-          <p:cNvPr id="18" name="TextBox 17"/>
+          <p:cNvPr id="19" name="TextBox 18"/>
           <p:cNvSpPr txBox="1"/>
           <p:nvPr/>
         </p:nvSpPr>
@@ -11717,9 +13473,9 @@
           <a:p>
             <a:pPr algn="l"/>
             <a:r>
-              <a:rPr sz="700" b="1" i="0">
-                <a:solidFill>
-                  <a:srgbClr val="5B3FD6"/>
+              <a:rPr sz="700" b="0" i="0">
+                <a:solidFill>
+                  <a:srgbClr val="6B6690"/>
                 </a:solidFill>
                 <a:latin typeface="Calibri"/>
               </a:rPr>
@@ -11730,7 +13486,7 @@
       </p:sp>
       <p:sp>
         <p:nvSpPr>
-          <p:cNvPr id="19" name="TextBox 18"/>
+          <p:cNvPr id="20" name="TextBox 19"/>
           <p:cNvSpPr txBox="1"/>
           <p:nvPr/>
         </p:nvSpPr>
@@ -11758,7 +13514,7 @@
                 </a:solidFill>
                 <a:latin typeface="Calibri"/>
               </a:rPr>
-              <a:t>S11  ·  15 / 21</a:t>
+              <a:t>S9c  ·  15 / 24</a:t>
             </a:r>
           </a:p>
         </p:txBody>
@@ -11783,7 +13539,7 @@
       <p:grpSpPr/>
       <p:pic>
         <p:nvPicPr>
-          <p:cNvPr id="2" name="Picture 1" descr="bg_light.jpg"/>
+          <p:cNvPr id="2" name="Picture 1" descr="bg_dark.jpg"/>
           <p:cNvPicPr>
             <a:picLocks noChangeAspect="1"/>
           </p:cNvPicPr>
@@ -11855,7 +13611,7 @@
             <a:r>
               <a:rPr sz="900" b="1" i="0">
                 <a:solidFill>
-                  <a:srgbClr val="1A0F5C"/>
+                  <a:srgbClr val="FFFFFF"/>
                 </a:solidFill>
                 <a:latin typeface="Calibri"/>
               </a:rPr>
@@ -11890,7 +13646,7 @@
             <a:r>
               <a:rPr sz="550" b="1" i="0" spc="300">
                 <a:solidFill>
-                  <a:srgbClr val="6B6690"/>
+                  <a:srgbClr val="CFC9EE"/>
                 </a:solidFill>
                 <a:latin typeface="Calibri"/>
               </a:rPr>
@@ -11925,6 +13681,517 @@
             <a:r>
               <a:rPr sz="550" b="1" i="0" spc="300">
                 <a:solidFill>
+                  <a:srgbClr val="CFC9EE"/>
+                </a:solidFill>
+                <a:latin typeface="Calibri"/>
+              </a:rPr>
+              <a:t>PG DIPLOMA IN AI-ML AND AGENTIC AI ENGINEERING  ·  COHORT 2</a:t>
+            </a:r>
+          </a:p>
+        </p:txBody>
+      </p:sp>
+      <p:sp>
+        <p:nvSpPr>
+          <p:cNvPr id="7" name="TextBox 6"/>
+          <p:cNvSpPr txBox="1"/>
+          <p:nvPr/>
+        </p:nvSpPr>
+        <p:spPr>
+          <a:xfrm>
+            <a:off x="731519" y="1143000"/>
+            <a:ext cx="3657600" cy="1371600"/>
+          </a:xfrm>
+          <a:prstGeom prst="rect">
+            <a:avLst/>
+          </a:prstGeom>
+          <a:noFill/>
+        </p:spPr>
+        <p:txBody>
+          <a:bodyPr wrap="square" anchor="t" lIns="0" rIns="0" tIns="0" bIns="0">
+            <a:spAutoFit/>
+          </a:bodyPr>
+          <a:lstStyle/>
+          <a:p>
+            <a:pPr algn="l"/>
+            <a:r>
+              <a:rPr sz="9600" b="0" i="0">
+                <a:solidFill>
+                  <a:srgbClr val="D9A7FF"/>
+                </a:solidFill>
+                <a:latin typeface="Georgia"/>
+              </a:rPr>
+              <a:t>03</a:t>
+            </a:r>
+          </a:p>
+        </p:txBody>
+      </p:sp>
+      <p:sp>
+        <p:nvSpPr>
+          <p:cNvPr id="8" name="TextBox 7"/>
+          <p:cNvSpPr txBox="1"/>
+          <p:nvPr/>
+        </p:nvSpPr>
+        <p:spPr>
+          <a:xfrm>
+            <a:off x="731519" y="2606040"/>
+            <a:ext cx="10673791" cy="731520"/>
+          </a:xfrm>
+          <a:prstGeom prst="rect">
+            <a:avLst/>
+          </a:prstGeom>
+          <a:noFill/>
+        </p:spPr>
+        <p:txBody>
+          <a:bodyPr wrap="square" anchor="t" lIns="0" rIns="0" tIns="0" bIns="0">
+            <a:spAutoFit/>
+          </a:bodyPr>
+          <a:lstStyle/>
+          <a:p>
+            <a:pPr algn="l"/>
+            <a:r>
+              <a:rPr sz="4000" b="0" i="0">
+                <a:solidFill>
+                  <a:srgbClr val="FFFFFF"/>
+                </a:solidFill>
+                <a:latin typeface="Georgia"/>
+              </a:rPr>
+              <a:t>The method you already own</a:t>
+            </a:r>
+          </a:p>
+        </p:txBody>
+      </p:sp>
+      <p:sp>
+        <p:nvSpPr>
+          <p:cNvPr id="9" name="TextBox 8"/>
+          <p:cNvSpPr txBox="1"/>
+          <p:nvPr/>
+        </p:nvSpPr>
+        <p:spPr>
+          <a:xfrm>
+            <a:off x="731519" y="3520440"/>
+            <a:ext cx="9509760" cy="284226"/>
+          </a:xfrm>
+          <a:prstGeom prst="rect">
+            <a:avLst/>
+          </a:prstGeom>
+          <a:noFill/>
+        </p:spPr>
+        <p:txBody>
+          <a:bodyPr wrap="square" anchor="t" lIns="0" rIns="0" tIns="0" bIns="0">
+            <a:spAutoFit/>
+          </a:bodyPr>
+          <a:lstStyle/>
+          <a:p>
+            <a:pPr algn="l"/>
+            <a:r>
+              <a:rPr sz="1500" b="0" i="0">
+                <a:solidFill>
+                  <a:srgbClr val="E4E1F1"/>
+                </a:solidFill>
+                <a:latin typeface="Calibri"/>
+              </a:rPr>
+              <a:t>The pictures you drew for Meera and Anand, and the Kalpa Health versions you draw today.</a:t>
+            </a:r>
+          </a:p>
+        </p:txBody>
+      </p:sp>
+      <p:sp>
+        <p:nvSpPr>
+          <p:cNvPr id="10" name="Rounded Rectangle 9"/>
+          <p:cNvSpPr/>
+          <p:nvPr/>
+        </p:nvSpPr>
+        <p:spPr>
+          <a:xfrm>
+            <a:off x="731519" y="5074920"/>
+            <a:ext cx="780271" cy="310896"/>
+          </a:xfrm>
+          <a:prstGeom prst="roundRect">
+            <a:avLst>
+              <a:gd name="adj" fmla="val 50000"/>
+            </a:avLst>
+          </a:prstGeom>
+          <a:noFill/>
+          <a:ln w="9525">
+            <a:solidFill>
+              <a:srgbClr val="CFC9EE"/>
+            </a:solidFill>
+          </a:ln>
+          <a:effectLst/>
+        </p:spPr>
+        <p:style>
+          <a:lnRef idx="1">
+            <a:schemeClr val="accent1"/>
+          </a:lnRef>
+          <a:fillRef idx="3">
+            <a:schemeClr val="accent1"/>
+          </a:fillRef>
+          <a:effectRef idx="2">
+            <a:schemeClr val="accent1"/>
+          </a:effectRef>
+          <a:fontRef idx="minor">
+            <a:schemeClr val="lt1"/>
+          </a:fontRef>
+        </p:style>
+        <p:txBody>
+          <a:bodyPr rtlCol="0" anchor="ctr" wrap="none" lIns="25400" rIns="25400" tIns="0" bIns="0"/>
+          <a:lstStyle/>
+          <a:p>
+            <a:pPr algn="ctr"/>
+            <a:r>
+              <a:rPr sz="850" b="0">
+                <a:solidFill>
+                  <a:srgbClr val="CFC9EE"/>
+                </a:solidFill>
+                <a:latin typeface="Calibri"/>
+              </a:rPr>
+              <a:t>The ask</a:t>
+            </a:r>
+          </a:p>
+        </p:txBody>
+      </p:sp>
+      <p:sp>
+        <p:nvSpPr>
+          <p:cNvPr id="11" name="Rounded Rectangle 10"/>
+          <p:cNvSpPr/>
+          <p:nvPr/>
+        </p:nvSpPr>
+        <p:spPr>
+          <a:xfrm>
+            <a:off x="1621519" y="5074920"/>
+            <a:ext cx="839487" cy="310896"/>
+          </a:xfrm>
+          <a:prstGeom prst="roundRect">
+            <a:avLst>
+              <a:gd name="adj" fmla="val 50000"/>
+            </a:avLst>
+          </a:prstGeom>
+          <a:noFill/>
+          <a:ln w="9525">
+            <a:solidFill>
+              <a:srgbClr val="CFC9EE"/>
+            </a:solidFill>
+          </a:ln>
+          <a:effectLst/>
+        </p:spPr>
+        <p:style>
+          <a:lnRef idx="1">
+            <a:schemeClr val="accent1"/>
+          </a:lnRef>
+          <a:fillRef idx="3">
+            <a:schemeClr val="accent1"/>
+          </a:fillRef>
+          <a:effectRef idx="2">
+            <a:schemeClr val="accent1"/>
+          </a:effectRef>
+          <a:fontRef idx="minor">
+            <a:schemeClr val="lt1"/>
+          </a:fontRef>
+        </p:style>
+        <p:txBody>
+          <a:bodyPr rtlCol="0" anchor="ctr" wrap="none" lIns="25400" rIns="25400" tIns="0" bIns="0"/>
+          <a:lstStyle/>
+          <a:p>
+            <a:pPr algn="ctr"/>
+            <a:r>
+              <a:rPr sz="850" b="0">
+                <a:solidFill>
+                  <a:srgbClr val="CFC9EE"/>
+                </a:solidFill>
+                <a:latin typeface="Calibri"/>
+              </a:rPr>
+              <a:t>The week</a:t>
+            </a:r>
+          </a:p>
+        </p:txBody>
+      </p:sp>
+      <p:sp>
+        <p:nvSpPr>
+          <p:cNvPr id="12" name="Rounded Rectangle 11"/>
+          <p:cNvSpPr/>
+          <p:nvPr/>
+        </p:nvSpPr>
+        <p:spPr>
+          <a:xfrm>
+            <a:off x="2570735" y="5074920"/>
+            <a:ext cx="1905375" cy="310896"/>
+          </a:xfrm>
+          <a:prstGeom prst="roundRect">
+            <a:avLst>
+              <a:gd name="adj" fmla="val 50000"/>
+            </a:avLst>
+          </a:prstGeom>
+          <a:solidFill>
+            <a:srgbClr val="D9A7FF"/>
+          </a:solidFill>
+          <a:ln>
+            <a:noFill/>
+          </a:ln>
+          <a:effectLst/>
+        </p:spPr>
+        <p:style>
+          <a:lnRef idx="1">
+            <a:schemeClr val="accent1"/>
+          </a:lnRef>
+          <a:fillRef idx="3">
+            <a:schemeClr val="accent1"/>
+          </a:fillRef>
+          <a:effectRef idx="2">
+            <a:schemeClr val="accent1"/>
+          </a:effectRef>
+          <a:fontRef idx="minor">
+            <a:schemeClr val="lt1"/>
+          </a:fontRef>
+        </p:style>
+        <p:txBody>
+          <a:bodyPr rtlCol="0" anchor="ctr" wrap="none" lIns="25400" rIns="25400" tIns="0" bIns="0"/>
+          <a:lstStyle/>
+          <a:p>
+            <a:pPr algn="ctr"/>
+            <a:r>
+              <a:rPr sz="850" b="1">
+                <a:solidFill>
+                  <a:srgbClr val="1A0F5C"/>
+                </a:solidFill>
+                <a:latin typeface="Calibri"/>
+              </a:rPr>
+              <a:t>The method you already own</a:t>
+            </a:r>
+          </a:p>
+        </p:txBody>
+      </p:sp>
+      <p:sp>
+        <p:nvSpPr>
+          <p:cNvPr id="13" name="TextBox 12"/>
+          <p:cNvSpPr txBox="1"/>
+          <p:nvPr/>
+        </p:nvSpPr>
+        <p:spPr>
+          <a:xfrm>
+            <a:off x="530352" y="6437376"/>
+            <a:ext cx="9667951" cy="160401"/>
+          </a:xfrm>
+          <a:prstGeom prst="rect">
+            <a:avLst/>
+          </a:prstGeom>
+          <a:noFill/>
+        </p:spPr>
+        <p:txBody>
+          <a:bodyPr wrap="square" anchor="t" lIns="0" rIns="0" tIns="0" bIns="0">
+            <a:spAutoFit/>
+          </a:bodyPr>
+          <a:lstStyle/>
+          <a:p>
+            <a:pPr algn="l"/>
+            <a:r>
+              <a:rPr sz="750" b="0" i="0">
+                <a:solidFill>
+                  <a:srgbClr val="CFC9EE"/>
+                </a:solidFill>
+                <a:latin typeface="Calibri"/>
+              </a:rPr>
+              <a:t>Week 3, Day 1. Build 1: Kalpa Health</a:t>
+            </a:r>
+          </a:p>
+        </p:txBody>
+      </p:sp>
+      <p:sp>
+        <p:nvSpPr>
+          <p:cNvPr id="14" name="TextBox 13"/>
+          <p:cNvSpPr txBox="1"/>
+          <p:nvPr/>
+        </p:nvSpPr>
+        <p:spPr>
+          <a:xfrm>
+            <a:off x="10198303" y="6437376"/>
+            <a:ext cx="1463040" cy="160401"/>
+          </a:xfrm>
+          <a:prstGeom prst="rect">
+            <a:avLst/>
+          </a:prstGeom>
+          <a:noFill/>
+        </p:spPr>
+        <p:txBody>
+          <a:bodyPr wrap="square" anchor="t" lIns="0" rIns="0" tIns="0" bIns="0">
+            <a:spAutoFit/>
+          </a:bodyPr>
+          <a:lstStyle/>
+          <a:p>
+            <a:pPr algn="r"/>
+            <a:r>
+              <a:rPr sz="750" b="0" i="0">
+                <a:solidFill>
+                  <a:srgbClr val="CFC9EE"/>
+                </a:solidFill>
+                <a:latin typeface="Calibri"/>
+              </a:rPr>
+              <a:t>16 / 24</a:t>
+            </a:r>
+          </a:p>
+        </p:txBody>
+      </p:sp>
+    </p:spTree>
+  </p:cSld>
+  <p:clrMapOvr>
+    <a:masterClrMapping/>
+  </p:clrMapOvr>
+</p:sld>
+</file>
+
+<file path=ppt/slides/slide17.xml><?xml version="1.0" encoding="utf-8"?>
+<p:sld xmlns:a="http://schemas.openxmlformats.org/drawingml/2006/main" xmlns:p="http://schemas.openxmlformats.org/presentationml/2006/main" xmlns:r="http://schemas.openxmlformats.org/officeDocument/2006/relationships">
+  <p:cSld>
+    <p:spTree>
+      <p:nvGrpSpPr>
+        <p:cNvPr id="1" name=""/>
+        <p:cNvGrpSpPr/>
+        <p:nvPr/>
+      </p:nvGrpSpPr>
+      <p:grpSpPr/>
+      <p:pic>
+        <p:nvPicPr>
+          <p:cNvPr id="2" name="Picture 1" descr="bg_light.jpg"/>
+          <p:cNvPicPr>
+            <a:picLocks noChangeAspect="1"/>
+          </p:cNvPicPr>
+          <p:nvPr/>
+        </p:nvPicPr>
+        <p:blipFill>
+          <a:blip r:embed="rId2"/>
+          <a:stretch>
+            <a:fillRect/>
+          </a:stretch>
+        </p:blipFill>
+        <p:spPr>
+          <a:xfrm>
+            <a:off x="0" y="0"/>
+            <a:ext cx="12191695" cy="6858000"/>
+          </a:xfrm>
+          <a:prstGeom prst="rect">
+            <a:avLst/>
+          </a:prstGeom>
+        </p:spPr>
+      </p:pic>
+      <p:pic>
+        <p:nvPicPr>
+          <p:cNvPr id="3" name="Picture 2" descr="iitgn_logo.png"/>
+          <p:cNvPicPr>
+            <a:picLocks noChangeAspect="1"/>
+          </p:cNvPicPr>
+          <p:nvPr/>
+        </p:nvPicPr>
+        <p:blipFill>
+          <a:blip r:embed="rId3"/>
+          <a:stretch>
+            <a:fillRect/>
+          </a:stretch>
+        </p:blipFill>
+        <p:spPr>
+          <a:xfrm>
+            <a:off x="530352" y="201168"/>
+            <a:ext cx="420624" cy="420624"/>
+          </a:xfrm>
+          <a:prstGeom prst="rect">
+            <a:avLst/>
+          </a:prstGeom>
+        </p:spPr>
+      </p:pic>
+      <p:sp>
+        <p:nvSpPr>
+          <p:cNvPr id="4" name="TextBox 3"/>
+          <p:cNvSpPr txBox="1"/>
+          <p:nvPr/>
+        </p:nvSpPr>
+        <p:spPr>
+          <a:xfrm>
+            <a:off x="1042416" y="228600"/>
+            <a:ext cx="5120640" cy="185166"/>
+          </a:xfrm>
+          <a:prstGeom prst="rect">
+            <a:avLst/>
+          </a:prstGeom>
+          <a:noFill/>
+        </p:spPr>
+        <p:txBody>
+          <a:bodyPr wrap="square" anchor="t" lIns="0" rIns="0" tIns="0" bIns="0">
+            <a:spAutoFit/>
+          </a:bodyPr>
+          <a:lstStyle/>
+          <a:p>
+            <a:pPr algn="l"/>
+            <a:r>
+              <a:rPr sz="900" b="1" i="0">
+                <a:solidFill>
+                  <a:srgbClr val="1A0F5C"/>
+                </a:solidFill>
+                <a:latin typeface="Calibri"/>
+              </a:rPr>
+              <a:t>Indian Institute of Technology Gandhinagar</a:t>
+            </a:r>
+          </a:p>
+        </p:txBody>
+      </p:sp>
+      <p:sp>
+        <p:nvSpPr>
+          <p:cNvPr id="5" name="TextBox 4"/>
+          <p:cNvSpPr txBox="1"/>
+          <p:nvPr/>
+        </p:nvSpPr>
+        <p:spPr>
+          <a:xfrm>
+            <a:off x="1042416" y="420623"/>
+            <a:ext cx="5852160" cy="127381"/>
+          </a:xfrm>
+          <a:prstGeom prst="rect">
+            <a:avLst/>
+          </a:prstGeom>
+          <a:noFill/>
+        </p:spPr>
+        <p:txBody>
+          <a:bodyPr wrap="square" anchor="t" lIns="0" rIns="0" tIns="0" bIns="0">
+            <a:spAutoFit/>
+          </a:bodyPr>
+          <a:lstStyle/>
+          <a:p>
+            <a:pPr algn="l"/>
+            <a:r>
+              <a:rPr sz="550" b="1" i="0" spc="300">
+                <a:solidFill>
+                  <a:srgbClr val="6B6690"/>
+                </a:solidFill>
+                <a:latin typeface="Calibri"/>
+              </a:rPr>
+              <a:t>ADMINISTERED THROUGH THE COMPETENCY ADVANCEMENT ACADEMY</a:t>
+            </a:r>
+          </a:p>
+        </p:txBody>
+      </p:sp>
+      <p:sp>
+        <p:nvSpPr>
+          <p:cNvPr id="6" name="TextBox 5"/>
+          <p:cNvSpPr txBox="1"/>
+          <p:nvPr/>
+        </p:nvSpPr>
+        <p:spPr>
+          <a:xfrm>
+            <a:off x="5992063" y="310896"/>
+            <a:ext cx="5669280" cy="127381"/>
+          </a:xfrm>
+          <a:prstGeom prst="rect">
+            <a:avLst/>
+          </a:prstGeom>
+          <a:noFill/>
+        </p:spPr>
+        <p:txBody>
+          <a:bodyPr wrap="square" anchor="t" lIns="0" rIns="0" tIns="0" bIns="0">
+            <a:spAutoFit/>
+          </a:bodyPr>
+          <a:lstStyle/>
+          <a:p>
+            <a:pPr algn="r"/>
+            <a:r>
+              <a:rPr sz="550" b="1" i="0" spc="300">
+                <a:solidFill>
                   <a:srgbClr val="6B6690"/>
                 </a:solidFill>
                 <a:latin typeface="Calibri"/>
@@ -11964,7 +14231,7 @@
                 </a:solidFill>
                 <a:latin typeface="Georgia"/>
               </a:rPr>
-              <a:t>Profile, clean, reconcile: Week 1 Wednesday</a:t>
+              <a:t>The revenue tree, as you drew it for Meera</a:t>
             </a:r>
           </a:p>
         </p:txBody>
@@ -11999,14 +14266,14 @@
                 </a:solidFill>
                 <a:latin typeface="Calibri"/>
               </a:rPr>
-              <a:t>Input equals clean plus rejected, and every decision is written down.</a:t>
+              <a:t>Every branch a numerator over a denominator; the question is which branch is short.</a:t>
             </a:r>
           </a:p>
         </p:txBody>
       </p:sp>
       <p:pic>
         <p:nvPicPr>
-          <p:cNvPr id="9" name="mermaid diagram" descr="954e50bb0e6bb9be.png"/>
+          <p:cNvPr id="9" name="mermaid diagram" descr="c56837485a6fad29.png"/>
           <p:cNvPicPr>
             <a:picLocks noChangeAspect="1"/>
           </p:cNvPicPr>
@@ -12020,8 +14287,1356 @@
         </p:blipFill>
         <p:spPr>
           <a:xfrm>
-            <a:off x="530352" y="1956816"/>
-            <a:ext cx="11130991" cy="864956"/>
+            <a:off x="1681010" y="1956816"/>
+            <a:ext cx="8829675" cy="3186112"/>
+          </a:xfrm>
+          <a:prstGeom prst="rect">
+            <a:avLst/>
+          </a:prstGeom>
+        </p:spPr>
+      </p:pic>
+      <p:sp>
+        <p:nvSpPr>
+          <p:cNvPr id="10" name="Rounded Rectangle 9"/>
+          <p:cNvSpPr/>
+          <p:nvPr/>
+        </p:nvSpPr>
+        <p:spPr>
+          <a:xfrm>
+            <a:off x="530352" y="5289232"/>
+            <a:ext cx="11130991" cy="541020"/>
+          </a:xfrm>
+          <a:prstGeom prst="roundRect">
+            <a:avLst>
+              <a:gd name="adj" fmla="val 8000"/>
+            </a:avLst>
+          </a:prstGeom>
+          <a:solidFill>
+            <a:srgbClr val="F7F5FD"/>
+          </a:solidFill>
+          <a:ln w="9525">
+            <a:solidFill>
+              <a:srgbClr val="E4E1F1"/>
+            </a:solidFill>
+          </a:ln>
+          <a:effectLst/>
+        </p:spPr>
+        <p:style>
+          <a:lnRef idx="1">
+            <a:schemeClr val="accent1"/>
+          </a:lnRef>
+          <a:fillRef idx="3">
+            <a:schemeClr val="accent1"/>
+          </a:fillRef>
+          <a:effectRef idx="2">
+            <a:schemeClr val="accent1"/>
+          </a:effectRef>
+          <a:fontRef idx="minor">
+            <a:schemeClr val="lt1"/>
+          </a:fontRef>
+        </p:style>
+        <p:txBody>
+          <a:bodyPr rtlCol="0" anchor="ctr" wrap="square"/>
+          <a:lstStyle/>
+          <a:p>
+            <a:pPr algn="ctr"/>
+          </a:p>
+        </p:txBody>
+      </p:sp>
+      <p:sp>
+        <p:nvSpPr>
+          <p:cNvPr id="11" name="Rounded Rectangle 10"/>
+          <p:cNvSpPr/>
+          <p:nvPr/>
+        </p:nvSpPr>
+        <p:spPr>
+          <a:xfrm>
+            <a:off x="676656" y="5417248"/>
+            <a:ext cx="45720" cy="284988"/>
+          </a:xfrm>
+          <a:prstGeom prst="roundRect">
+            <a:avLst>
+              <a:gd name="adj" fmla="val 50000"/>
+            </a:avLst>
+          </a:prstGeom>
+          <a:solidFill>
+            <a:srgbClr val="5B3FD6"/>
+          </a:solidFill>
+          <a:ln>
+            <a:noFill/>
+          </a:ln>
+          <a:effectLst/>
+        </p:spPr>
+        <p:style>
+          <a:lnRef idx="1">
+            <a:schemeClr val="accent1"/>
+          </a:lnRef>
+          <a:fillRef idx="3">
+            <a:schemeClr val="accent1"/>
+          </a:fillRef>
+          <a:effectRef idx="2">
+            <a:schemeClr val="accent1"/>
+          </a:effectRef>
+          <a:fontRef idx="minor">
+            <a:schemeClr val="lt1"/>
+          </a:fontRef>
+        </p:style>
+        <p:txBody>
+          <a:bodyPr rtlCol="0" anchor="ctr" wrap="square"/>
+          <a:lstStyle/>
+          <a:p>
+            <a:pPr algn="ctr"/>
+          </a:p>
+        </p:txBody>
+      </p:sp>
+      <p:sp>
+        <p:nvSpPr>
+          <p:cNvPr id="12" name="TextBox 11"/>
+          <p:cNvSpPr txBox="1"/>
+          <p:nvPr/>
+        </p:nvSpPr>
+        <p:spPr>
+          <a:xfrm>
+            <a:off x="877824" y="5408104"/>
+            <a:ext cx="10564063" cy="358140"/>
+          </a:xfrm>
+          <a:prstGeom prst="rect">
+            <a:avLst/>
+          </a:prstGeom>
+          <a:noFill/>
+        </p:spPr>
+        <p:txBody>
+          <a:bodyPr wrap="square" anchor="ctr" lIns="0" rIns="0" tIns="0" bIns="0">
+            <a:spAutoFit/>
+          </a:bodyPr>
+          <a:lstStyle/>
+          <a:p>
+            <a:r>
+              <a:rPr sz="1500" b="1">
+                <a:solidFill>
+                  <a:srgbClr val="5B3FD6"/>
+                </a:solidFill>
+                <a:latin typeface="Calibri"/>
+              </a:rPr>
+              <a:t>Your turn. </a:t>
+            </a:r>
+            <a:r>
+              <a:rPr sz="1500" b="0" i="0">
+                <a:solidFill>
+                  <a:srgbClr val="1A1440"/>
+                </a:solidFill>
+                <a:latin typeface="Calibri"/>
+              </a:rPr>
+              <a:t>What is each box called in Kalpa Health, and which box has no clean twin?</a:t>
+            </a:r>
+          </a:p>
+        </p:txBody>
+      </p:sp>
+      <p:sp>
+        <p:nvSpPr>
+          <p:cNvPr id="13" name="Oval 12"/>
+          <p:cNvSpPr/>
+          <p:nvPr/>
+        </p:nvSpPr>
+        <p:spPr>
+          <a:xfrm>
+            <a:off x="530352" y="6492240"/>
+            <a:ext cx="64008" cy="64008"/>
+          </a:xfrm>
+          <a:prstGeom prst="ellipse">
+            <a:avLst/>
+          </a:prstGeom>
+          <a:solidFill>
+            <a:srgbClr val="CFC9EE"/>
+          </a:solidFill>
+          <a:ln>
+            <a:noFill/>
+          </a:ln>
+          <a:effectLst/>
+        </p:spPr>
+        <p:style>
+          <a:lnRef idx="1">
+            <a:schemeClr val="accent1"/>
+          </a:lnRef>
+          <a:fillRef idx="3">
+            <a:schemeClr val="accent1"/>
+          </a:fillRef>
+          <a:effectRef idx="2">
+            <a:schemeClr val="accent1"/>
+          </a:effectRef>
+          <a:fontRef idx="minor">
+            <a:schemeClr val="lt1"/>
+          </a:fontRef>
+        </p:style>
+        <p:txBody>
+          <a:bodyPr rtlCol="0" anchor="ctr" wrap="square"/>
+          <a:lstStyle/>
+          <a:p>
+            <a:pPr algn="ctr"/>
+          </a:p>
+        </p:txBody>
+      </p:sp>
+      <p:sp>
+        <p:nvSpPr>
+          <p:cNvPr id="14" name="TextBox 13"/>
+          <p:cNvSpPr txBox="1"/>
+          <p:nvPr/>
+        </p:nvSpPr>
+        <p:spPr>
+          <a:xfrm>
+            <a:off x="640080" y="6437376"/>
+            <a:ext cx="596360" cy="152146"/>
+          </a:xfrm>
+          <a:prstGeom prst="rect">
+            <a:avLst/>
+          </a:prstGeom>
+          <a:noFill/>
+        </p:spPr>
+        <p:txBody>
+          <a:bodyPr wrap="square" anchor="t" lIns="0" rIns="0" tIns="0" bIns="0">
+            <a:spAutoFit/>
+          </a:bodyPr>
+          <a:lstStyle/>
+          <a:p>
+            <a:pPr algn="l"/>
+            <a:r>
+              <a:rPr sz="700" b="0" i="0">
+                <a:solidFill>
+                  <a:srgbClr val="6B6690"/>
+                </a:solidFill>
+                <a:latin typeface="Calibri"/>
+              </a:rPr>
+              <a:t>The ask</a:t>
+            </a:r>
+          </a:p>
+        </p:txBody>
+      </p:sp>
+      <p:sp>
+        <p:nvSpPr>
+          <p:cNvPr id="15" name="Oval 14"/>
+          <p:cNvSpPr/>
+          <p:nvPr/>
+        </p:nvSpPr>
+        <p:spPr>
+          <a:xfrm>
+            <a:off x="1327880" y="6492240"/>
+            <a:ext cx="64008" cy="64008"/>
+          </a:xfrm>
+          <a:prstGeom prst="ellipse">
+            <a:avLst/>
+          </a:prstGeom>
+          <a:solidFill>
+            <a:srgbClr val="CFC9EE"/>
+          </a:solidFill>
+          <a:ln>
+            <a:noFill/>
+          </a:ln>
+          <a:effectLst/>
+        </p:spPr>
+        <p:style>
+          <a:lnRef idx="1">
+            <a:schemeClr val="accent1"/>
+          </a:lnRef>
+          <a:fillRef idx="3">
+            <a:schemeClr val="accent1"/>
+          </a:fillRef>
+          <a:effectRef idx="2">
+            <a:schemeClr val="accent1"/>
+          </a:effectRef>
+          <a:fontRef idx="minor">
+            <a:schemeClr val="lt1"/>
+          </a:fontRef>
+        </p:style>
+        <p:txBody>
+          <a:bodyPr rtlCol="0" anchor="ctr" wrap="square"/>
+          <a:lstStyle/>
+          <a:p>
+            <a:pPr algn="ctr"/>
+          </a:p>
+        </p:txBody>
+      </p:sp>
+      <p:sp>
+        <p:nvSpPr>
+          <p:cNvPr id="16" name="TextBox 15"/>
+          <p:cNvSpPr txBox="1"/>
+          <p:nvPr/>
+        </p:nvSpPr>
+        <p:spPr>
+          <a:xfrm>
+            <a:off x="1437608" y="6437376"/>
+            <a:ext cx="642366" cy="152146"/>
+          </a:xfrm>
+          <a:prstGeom prst="rect">
+            <a:avLst/>
+          </a:prstGeom>
+          <a:noFill/>
+        </p:spPr>
+        <p:txBody>
+          <a:bodyPr wrap="square" anchor="t" lIns="0" rIns="0" tIns="0" bIns="0">
+            <a:spAutoFit/>
+          </a:bodyPr>
+          <a:lstStyle/>
+          <a:p>
+            <a:pPr algn="l"/>
+            <a:r>
+              <a:rPr sz="700" b="0" i="0">
+                <a:solidFill>
+                  <a:srgbClr val="6B6690"/>
+                </a:solidFill>
+                <a:latin typeface="Calibri"/>
+              </a:rPr>
+              <a:t>The week</a:t>
+            </a:r>
+          </a:p>
+        </p:txBody>
+      </p:sp>
+      <p:sp>
+        <p:nvSpPr>
+          <p:cNvPr id="17" name="Oval 16"/>
+          <p:cNvSpPr/>
+          <p:nvPr/>
+        </p:nvSpPr>
+        <p:spPr>
+          <a:xfrm>
+            <a:off x="2171414" y="6492240"/>
+            <a:ext cx="64008" cy="64008"/>
+          </a:xfrm>
+          <a:prstGeom prst="ellipse">
+            <a:avLst/>
+          </a:prstGeom>
+          <a:solidFill>
+            <a:srgbClr val="5B3FD6"/>
+          </a:solidFill>
+          <a:ln>
+            <a:noFill/>
+          </a:ln>
+          <a:effectLst/>
+        </p:spPr>
+        <p:style>
+          <a:lnRef idx="1">
+            <a:schemeClr val="accent1"/>
+          </a:lnRef>
+          <a:fillRef idx="3">
+            <a:schemeClr val="accent1"/>
+          </a:fillRef>
+          <a:effectRef idx="2">
+            <a:schemeClr val="accent1"/>
+          </a:effectRef>
+          <a:fontRef idx="minor">
+            <a:schemeClr val="lt1"/>
+          </a:fontRef>
+        </p:style>
+        <p:txBody>
+          <a:bodyPr rtlCol="0" anchor="ctr" wrap="square"/>
+          <a:lstStyle/>
+          <a:p>
+            <a:pPr algn="ctr"/>
+          </a:p>
+        </p:txBody>
+      </p:sp>
+      <p:sp>
+        <p:nvSpPr>
+          <p:cNvPr id="18" name="TextBox 17"/>
+          <p:cNvSpPr txBox="1"/>
+          <p:nvPr/>
+        </p:nvSpPr>
+        <p:spPr>
+          <a:xfrm>
+            <a:off x="2281142" y="6437376"/>
+            <a:ext cx="1470469" cy="152146"/>
+          </a:xfrm>
+          <a:prstGeom prst="rect">
+            <a:avLst/>
+          </a:prstGeom>
+          <a:noFill/>
+        </p:spPr>
+        <p:txBody>
+          <a:bodyPr wrap="square" anchor="t" lIns="0" rIns="0" tIns="0" bIns="0">
+            <a:spAutoFit/>
+          </a:bodyPr>
+          <a:lstStyle/>
+          <a:p>
+            <a:pPr algn="l"/>
+            <a:r>
+              <a:rPr sz="700" b="1" i="0">
+                <a:solidFill>
+                  <a:srgbClr val="5B3FD6"/>
+                </a:solidFill>
+                <a:latin typeface="Calibri"/>
+              </a:rPr>
+              <a:t>The method you already own</a:t>
+            </a:r>
+          </a:p>
+        </p:txBody>
+      </p:sp>
+      <p:sp>
+        <p:nvSpPr>
+          <p:cNvPr id="19" name="TextBox 18"/>
+          <p:cNvSpPr txBox="1"/>
+          <p:nvPr/>
+        </p:nvSpPr>
+        <p:spPr>
+          <a:xfrm>
+            <a:off x="10198303" y="6437376"/>
+            <a:ext cx="1463040" cy="160401"/>
+          </a:xfrm>
+          <a:prstGeom prst="rect">
+            <a:avLst/>
+          </a:prstGeom>
+          <a:noFill/>
+        </p:spPr>
+        <p:txBody>
+          <a:bodyPr wrap="square" anchor="t" lIns="0" rIns="0" tIns="0" bIns="0">
+            <a:spAutoFit/>
+          </a:bodyPr>
+          <a:lstStyle/>
+          <a:p>
+            <a:pPr algn="r"/>
+            <a:r>
+              <a:rPr sz="750" b="0" i="0">
+                <a:solidFill>
+                  <a:srgbClr val="6B6690"/>
+                </a:solidFill>
+                <a:latin typeface="Calibri"/>
+              </a:rPr>
+              <a:t>S10  ·  17 / 24</a:t>
+            </a:r>
+          </a:p>
+        </p:txBody>
+      </p:sp>
+    </p:spTree>
+  </p:cSld>
+  <p:clrMapOvr>
+    <a:masterClrMapping/>
+  </p:clrMapOvr>
+</p:sld>
+</file>
+
+<file path=ppt/slides/slide18.xml><?xml version="1.0" encoding="utf-8"?>
+<p:sld xmlns:a="http://schemas.openxmlformats.org/drawingml/2006/main" xmlns:p="http://schemas.openxmlformats.org/presentationml/2006/main" xmlns:r="http://schemas.openxmlformats.org/officeDocument/2006/relationships">
+  <p:cSld>
+    <p:spTree>
+      <p:nvGrpSpPr>
+        <p:cNvPr id="1" name=""/>
+        <p:cNvGrpSpPr/>
+        <p:nvPr/>
+      </p:nvGrpSpPr>
+      <p:grpSpPr/>
+      <p:pic>
+        <p:nvPicPr>
+          <p:cNvPr id="2" name="Picture 1" descr="bg_light.jpg"/>
+          <p:cNvPicPr>
+            <a:picLocks noChangeAspect="1"/>
+          </p:cNvPicPr>
+          <p:nvPr/>
+        </p:nvPicPr>
+        <p:blipFill>
+          <a:blip r:embed="rId2"/>
+          <a:stretch>
+            <a:fillRect/>
+          </a:stretch>
+        </p:blipFill>
+        <p:spPr>
+          <a:xfrm>
+            <a:off x="0" y="0"/>
+            <a:ext cx="12191695" cy="6858000"/>
+          </a:xfrm>
+          <a:prstGeom prst="rect">
+            <a:avLst/>
+          </a:prstGeom>
+        </p:spPr>
+      </p:pic>
+      <p:pic>
+        <p:nvPicPr>
+          <p:cNvPr id="3" name="Picture 2" descr="iitgn_logo.png"/>
+          <p:cNvPicPr>
+            <a:picLocks noChangeAspect="1"/>
+          </p:cNvPicPr>
+          <p:nvPr/>
+        </p:nvPicPr>
+        <p:blipFill>
+          <a:blip r:embed="rId3"/>
+          <a:stretch>
+            <a:fillRect/>
+          </a:stretch>
+        </p:blipFill>
+        <p:spPr>
+          <a:xfrm>
+            <a:off x="530352" y="201168"/>
+            <a:ext cx="420624" cy="420624"/>
+          </a:xfrm>
+          <a:prstGeom prst="rect">
+            <a:avLst/>
+          </a:prstGeom>
+        </p:spPr>
+      </p:pic>
+      <p:sp>
+        <p:nvSpPr>
+          <p:cNvPr id="4" name="TextBox 3"/>
+          <p:cNvSpPr txBox="1"/>
+          <p:nvPr/>
+        </p:nvSpPr>
+        <p:spPr>
+          <a:xfrm>
+            <a:off x="1042416" y="228600"/>
+            <a:ext cx="5120640" cy="185166"/>
+          </a:xfrm>
+          <a:prstGeom prst="rect">
+            <a:avLst/>
+          </a:prstGeom>
+          <a:noFill/>
+        </p:spPr>
+        <p:txBody>
+          <a:bodyPr wrap="square" anchor="t" lIns="0" rIns="0" tIns="0" bIns="0">
+            <a:spAutoFit/>
+          </a:bodyPr>
+          <a:lstStyle/>
+          <a:p>
+            <a:pPr algn="l"/>
+            <a:r>
+              <a:rPr sz="900" b="1" i="0">
+                <a:solidFill>
+                  <a:srgbClr val="1A0F5C"/>
+                </a:solidFill>
+                <a:latin typeface="Calibri"/>
+              </a:rPr>
+              <a:t>Indian Institute of Technology Gandhinagar</a:t>
+            </a:r>
+          </a:p>
+        </p:txBody>
+      </p:sp>
+      <p:sp>
+        <p:nvSpPr>
+          <p:cNvPr id="5" name="TextBox 4"/>
+          <p:cNvSpPr txBox="1"/>
+          <p:nvPr/>
+        </p:nvSpPr>
+        <p:spPr>
+          <a:xfrm>
+            <a:off x="1042416" y="420623"/>
+            <a:ext cx="5852160" cy="127381"/>
+          </a:xfrm>
+          <a:prstGeom prst="rect">
+            <a:avLst/>
+          </a:prstGeom>
+          <a:noFill/>
+        </p:spPr>
+        <p:txBody>
+          <a:bodyPr wrap="square" anchor="t" lIns="0" rIns="0" tIns="0" bIns="0">
+            <a:spAutoFit/>
+          </a:bodyPr>
+          <a:lstStyle/>
+          <a:p>
+            <a:pPr algn="l"/>
+            <a:r>
+              <a:rPr sz="550" b="1" i="0" spc="300">
+                <a:solidFill>
+                  <a:srgbClr val="6B6690"/>
+                </a:solidFill>
+                <a:latin typeface="Calibri"/>
+              </a:rPr>
+              <a:t>ADMINISTERED THROUGH THE COMPETENCY ADVANCEMENT ACADEMY</a:t>
+            </a:r>
+          </a:p>
+        </p:txBody>
+      </p:sp>
+      <p:sp>
+        <p:nvSpPr>
+          <p:cNvPr id="6" name="TextBox 5"/>
+          <p:cNvSpPr txBox="1"/>
+          <p:nvPr/>
+        </p:nvSpPr>
+        <p:spPr>
+          <a:xfrm>
+            <a:off x="5992063" y="310896"/>
+            <a:ext cx="5669280" cy="127381"/>
+          </a:xfrm>
+          <a:prstGeom prst="rect">
+            <a:avLst/>
+          </a:prstGeom>
+          <a:noFill/>
+        </p:spPr>
+        <p:txBody>
+          <a:bodyPr wrap="square" anchor="t" lIns="0" rIns="0" tIns="0" bIns="0">
+            <a:spAutoFit/>
+          </a:bodyPr>
+          <a:lstStyle/>
+          <a:p>
+            <a:pPr algn="r"/>
+            <a:r>
+              <a:rPr sz="550" b="1" i="0" spc="300">
+                <a:solidFill>
+                  <a:srgbClr val="6B6690"/>
+                </a:solidFill>
+                <a:latin typeface="Calibri"/>
+              </a:rPr>
+              <a:t>WEEK 3  ·  DAY 1  ·  KALPA GLOBAL CAPABILITY CENTRE</a:t>
+            </a:r>
+          </a:p>
+        </p:txBody>
+      </p:sp>
+      <p:sp>
+        <p:nvSpPr>
+          <p:cNvPr id="7" name="TextBox 6"/>
+          <p:cNvSpPr txBox="1"/>
+          <p:nvPr/>
+        </p:nvSpPr>
+        <p:spPr>
+          <a:xfrm>
+            <a:off x="530352" y="676656"/>
+            <a:ext cx="11130991" cy="512064"/>
+          </a:xfrm>
+          <a:prstGeom prst="rect">
+            <a:avLst/>
+          </a:prstGeom>
+          <a:noFill/>
+        </p:spPr>
+        <p:txBody>
+          <a:bodyPr wrap="square" anchor="b" lIns="0" rIns="0" tIns="0" bIns="0">
+            <a:spAutoFit/>
+          </a:bodyPr>
+          <a:lstStyle/>
+          <a:p>
+            <a:pPr algn="l"/>
+            <a:r>
+              <a:rPr sz="2600" b="0" i="0">
+                <a:solidFill>
+                  <a:srgbClr val="1A0F5C"/>
+                </a:solidFill>
+                <a:latin typeface="Georgia"/>
+              </a:rPr>
+              <a:t>The investigation ladder, from Week 1 Tuesday</a:t>
+            </a:r>
+          </a:p>
+        </p:txBody>
+      </p:sp>
+      <p:sp>
+        <p:nvSpPr>
+          <p:cNvPr id="8" name="TextBox 7"/>
+          <p:cNvSpPr txBox="1"/>
+          <p:nvPr/>
+        </p:nvSpPr>
+        <p:spPr>
+          <a:xfrm>
+            <a:off x="530352" y="1243584"/>
+            <a:ext cx="11130991" cy="234696"/>
+          </a:xfrm>
+          <a:prstGeom prst="rect">
+            <a:avLst/>
+          </a:prstGeom>
+          <a:noFill/>
+        </p:spPr>
+        <p:txBody>
+          <a:bodyPr wrap="square" anchor="t" lIns="0" rIns="0" tIns="0" bIns="0">
+            <a:spAutoFit/>
+          </a:bodyPr>
+          <a:lstStyle/>
+          <a:p>
+            <a:pPr algn="l"/>
+            <a:r>
+              <a:rPr sz="1200" b="0" i="0">
+                <a:solidFill>
+                  <a:srgbClr val="6B6690"/>
+                </a:solidFill>
+                <a:latin typeface="Calibri"/>
+              </a:rPr>
+              <a:t>Confirm the drop before explaining it, then compare like with like.</a:t>
+            </a:r>
+          </a:p>
+        </p:txBody>
+      </p:sp>
+      <p:pic>
+        <p:nvPicPr>
+          <p:cNvPr id="9" name="mermaid diagram" descr="cc65b150ac99033b.png"/>
+          <p:cNvPicPr>
+            <a:picLocks noChangeAspect="1"/>
+          </p:cNvPicPr>
+          <p:nvPr/>
+        </p:nvPicPr>
+        <p:blipFill>
+          <a:blip r:embed="rId5"/>
+          <a:stretch>
+            <a:fillRect/>
+          </a:stretch>
+        </p:blipFill>
+        <p:spPr>
+          <a:xfrm>
+            <a:off x="1530623" y="1682496"/>
+            <a:ext cx="2785784" cy="4517136"/>
+          </a:xfrm>
+          <a:prstGeom prst="rect">
+            <a:avLst/>
+          </a:prstGeom>
+        </p:spPr>
+      </p:pic>
+      <p:sp>
+        <p:nvSpPr>
+          <p:cNvPr id="10" name="Rounded Rectangle 9"/>
+          <p:cNvSpPr/>
+          <p:nvPr/>
+        </p:nvSpPr>
+        <p:spPr>
+          <a:xfrm>
+            <a:off x="5761917" y="1956816"/>
+            <a:ext cx="5899425" cy="807720"/>
+          </a:xfrm>
+          <a:prstGeom prst="roundRect">
+            <a:avLst>
+              <a:gd name="adj" fmla="val 8000"/>
+            </a:avLst>
+          </a:prstGeom>
+          <a:solidFill>
+            <a:srgbClr val="F7F5FD"/>
+          </a:solidFill>
+          <a:ln w="9525">
+            <a:solidFill>
+              <a:srgbClr val="E4E1F1"/>
+            </a:solidFill>
+          </a:ln>
+          <a:effectLst/>
+        </p:spPr>
+        <p:style>
+          <a:lnRef idx="1">
+            <a:schemeClr val="accent1"/>
+          </a:lnRef>
+          <a:fillRef idx="3">
+            <a:schemeClr val="accent1"/>
+          </a:fillRef>
+          <a:effectRef idx="2">
+            <a:schemeClr val="accent1"/>
+          </a:effectRef>
+          <a:fontRef idx="minor">
+            <a:schemeClr val="lt1"/>
+          </a:fontRef>
+        </p:style>
+        <p:txBody>
+          <a:bodyPr rtlCol="0" anchor="ctr" wrap="square"/>
+          <a:lstStyle/>
+          <a:p>
+            <a:pPr algn="ctr"/>
+          </a:p>
+        </p:txBody>
+      </p:sp>
+      <p:sp>
+        <p:nvSpPr>
+          <p:cNvPr id="11" name="Rounded Rectangle 10"/>
+          <p:cNvSpPr/>
+          <p:nvPr/>
+        </p:nvSpPr>
+        <p:spPr>
+          <a:xfrm>
+            <a:off x="5908221" y="2084832"/>
+            <a:ext cx="45720" cy="551688"/>
+          </a:xfrm>
+          <a:prstGeom prst="roundRect">
+            <a:avLst>
+              <a:gd name="adj" fmla="val 50000"/>
+            </a:avLst>
+          </a:prstGeom>
+          <a:solidFill>
+            <a:srgbClr val="5B3FD6"/>
+          </a:solidFill>
+          <a:ln>
+            <a:noFill/>
+          </a:ln>
+          <a:effectLst/>
+        </p:spPr>
+        <p:style>
+          <a:lnRef idx="1">
+            <a:schemeClr val="accent1"/>
+          </a:lnRef>
+          <a:fillRef idx="3">
+            <a:schemeClr val="accent1"/>
+          </a:fillRef>
+          <a:effectRef idx="2">
+            <a:schemeClr val="accent1"/>
+          </a:effectRef>
+          <a:fontRef idx="minor">
+            <a:schemeClr val="lt1"/>
+          </a:fontRef>
+        </p:style>
+        <p:txBody>
+          <a:bodyPr rtlCol="0" anchor="ctr" wrap="square"/>
+          <a:lstStyle/>
+          <a:p>
+            <a:pPr algn="ctr"/>
+          </a:p>
+        </p:txBody>
+      </p:sp>
+      <p:sp>
+        <p:nvSpPr>
+          <p:cNvPr id="12" name="TextBox 11"/>
+          <p:cNvSpPr txBox="1"/>
+          <p:nvPr/>
+        </p:nvSpPr>
+        <p:spPr>
+          <a:xfrm>
+            <a:off x="6109389" y="2075688"/>
+            <a:ext cx="5332497" cy="624840"/>
+          </a:xfrm>
+          <a:prstGeom prst="rect">
+            <a:avLst/>
+          </a:prstGeom>
+          <a:noFill/>
+        </p:spPr>
+        <p:txBody>
+          <a:bodyPr wrap="square" anchor="ctr" lIns="0" rIns="0" tIns="0" bIns="0">
+            <a:spAutoFit/>
+          </a:bodyPr>
+          <a:lstStyle/>
+          <a:p>
+            <a:r>
+              <a:rPr sz="1500" b="1">
+                <a:solidFill>
+                  <a:srgbClr val="5B3FD6"/>
+                </a:solidFill>
+                <a:latin typeface="Calibri"/>
+              </a:rPr>
+              <a:t>Your turn. </a:t>
+            </a:r>
+            <a:r>
+              <a:rPr sz="1500" b="0" i="0">
+                <a:solidFill>
+                  <a:srgbClr val="1A1440"/>
+                </a:solidFill>
+                <a:latin typeface="Calibri"/>
+              </a:rPr>
+              <a:t>Which rung does a Kalpa Health question skip most easily, and what would that cost?</a:t>
+            </a:r>
+          </a:p>
+        </p:txBody>
+      </p:sp>
+      <p:sp>
+        <p:nvSpPr>
+          <p:cNvPr id="13" name="Oval 12"/>
+          <p:cNvSpPr/>
+          <p:nvPr/>
+        </p:nvSpPr>
+        <p:spPr>
+          <a:xfrm>
+            <a:off x="530352" y="6492240"/>
+            <a:ext cx="64008" cy="64008"/>
+          </a:xfrm>
+          <a:prstGeom prst="ellipse">
+            <a:avLst/>
+          </a:prstGeom>
+          <a:solidFill>
+            <a:srgbClr val="CFC9EE"/>
+          </a:solidFill>
+          <a:ln>
+            <a:noFill/>
+          </a:ln>
+          <a:effectLst/>
+        </p:spPr>
+        <p:style>
+          <a:lnRef idx="1">
+            <a:schemeClr val="accent1"/>
+          </a:lnRef>
+          <a:fillRef idx="3">
+            <a:schemeClr val="accent1"/>
+          </a:fillRef>
+          <a:effectRef idx="2">
+            <a:schemeClr val="accent1"/>
+          </a:effectRef>
+          <a:fontRef idx="minor">
+            <a:schemeClr val="lt1"/>
+          </a:fontRef>
+        </p:style>
+        <p:txBody>
+          <a:bodyPr rtlCol="0" anchor="ctr" wrap="square"/>
+          <a:lstStyle/>
+          <a:p>
+            <a:pPr algn="ctr"/>
+          </a:p>
+        </p:txBody>
+      </p:sp>
+      <p:sp>
+        <p:nvSpPr>
+          <p:cNvPr id="14" name="TextBox 13"/>
+          <p:cNvSpPr txBox="1"/>
+          <p:nvPr/>
+        </p:nvSpPr>
+        <p:spPr>
+          <a:xfrm>
+            <a:off x="640080" y="6437376"/>
+            <a:ext cx="596360" cy="152146"/>
+          </a:xfrm>
+          <a:prstGeom prst="rect">
+            <a:avLst/>
+          </a:prstGeom>
+          <a:noFill/>
+        </p:spPr>
+        <p:txBody>
+          <a:bodyPr wrap="square" anchor="t" lIns="0" rIns="0" tIns="0" bIns="0">
+            <a:spAutoFit/>
+          </a:bodyPr>
+          <a:lstStyle/>
+          <a:p>
+            <a:pPr algn="l"/>
+            <a:r>
+              <a:rPr sz="700" b="0" i="0">
+                <a:solidFill>
+                  <a:srgbClr val="6B6690"/>
+                </a:solidFill>
+                <a:latin typeface="Calibri"/>
+              </a:rPr>
+              <a:t>The ask</a:t>
+            </a:r>
+          </a:p>
+        </p:txBody>
+      </p:sp>
+      <p:sp>
+        <p:nvSpPr>
+          <p:cNvPr id="15" name="Oval 14"/>
+          <p:cNvSpPr/>
+          <p:nvPr/>
+        </p:nvSpPr>
+        <p:spPr>
+          <a:xfrm>
+            <a:off x="1327880" y="6492240"/>
+            <a:ext cx="64008" cy="64008"/>
+          </a:xfrm>
+          <a:prstGeom prst="ellipse">
+            <a:avLst/>
+          </a:prstGeom>
+          <a:solidFill>
+            <a:srgbClr val="CFC9EE"/>
+          </a:solidFill>
+          <a:ln>
+            <a:noFill/>
+          </a:ln>
+          <a:effectLst/>
+        </p:spPr>
+        <p:style>
+          <a:lnRef idx="1">
+            <a:schemeClr val="accent1"/>
+          </a:lnRef>
+          <a:fillRef idx="3">
+            <a:schemeClr val="accent1"/>
+          </a:fillRef>
+          <a:effectRef idx="2">
+            <a:schemeClr val="accent1"/>
+          </a:effectRef>
+          <a:fontRef idx="minor">
+            <a:schemeClr val="lt1"/>
+          </a:fontRef>
+        </p:style>
+        <p:txBody>
+          <a:bodyPr rtlCol="0" anchor="ctr" wrap="square"/>
+          <a:lstStyle/>
+          <a:p>
+            <a:pPr algn="ctr"/>
+          </a:p>
+        </p:txBody>
+      </p:sp>
+      <p:sp>
+        <p:nvSpPr>
+          <p:cNvPr id="16" name="TextBox 15"/>
+          <p:cNvSpPr txBox="1"/>
+          <p:nvPr/>
+        </p:nvSpPr>
+        <p:spPr>
+          <a:xfrm>
+            <a:off x="1437608" y="6437376"/>
+            <a:ext cx="642366" cy="152146"/>
+          </a:xfrm>
+          <a:prstGeom prst="rect">
+            <a:avLst/>
+          </a:prstGeom>
+          <a:noFill/>
+        </p:spPr>
+        <p:txBody>
+          <a:bodyPr wrap="square" anchor="t" lIns="0" rIns="0" tIns="0" bIns="0">
+            <a:spAutoFit/>
+          </a:bodyPr>
+          <a:lstStyle/>
+          <a:p>
+            <a:pPr algn="l"/>
+            <a:r>
+              <a:rPr sz="700" b="0" i="0">
+                <a:solidFill>
+                  <a:srgbClr val="6B6690"/>
+                </a:solidFill>
+                <a:latin typeface="Calibri"/>
+              </a:rPr>
+              <a:t>The week</a:t>
+            </a:r>
+          </a:p>
+        </p:txBody>
+      </p:sp>
+      <p:sp>
+        <p:nvSpPr>
+          <p:cNvPr id="17" name="Oval 16"/>
+          <p:cNvSpPr/>
+          <p:nvPr/>
+        </p:nvSpPr>
+        <p:spPr>
+          <a:xfrm>
+            <a:off x="2171414" y="6492240"/>
+            <a:ext cx="64008" cy="64008"/>
+          </a:xfrm>
+          <a:prstGeom prst="ellipse">
+            <a:avLst/>
+          </a:prstGeom>
+          <a:solidFill>
+            <a:srgbClr val="5B3FD6"/>
+          </a:solidFill>
+          <a:ln>
+            <a:noFill/>
+          </a:ln>
+          <a:effectLst/>
+        </p:spPr>
+        <p:style>
+          <a:lnRef idx="1">
+            <a:schemeClr val="accent1"/>
+          </a:lnRef>
+          <a:fillRef idx="3">
+            <a:schemeClr val="accent1"/>
+          </a:fillRef>
+          <a:effectRef idx="2">
+            <a:schemeClr val="accent1"/>
+          </a:effectRef>
+          <a:fontRef idx="minor">
+            <a:schemeClr val="lt1"/>
+          </a:fontRef>
+        </p:style>
+        <p:txBody>
+          <a:bodyPr rtlCol="0" anchor="ctr" wrap="square"/>
+          <a:lstStyle/>
+          <a:p>
+            <a:pPr algn="ctr"/>
+          </a:p>
+        </p:txBody>
+      </p:sp>
+      <p:sp>
+        <p:nvSpPr>
+          <p:cNvPr id="18" name="TextBox 17"/>
+          <p:cNvSpPr txBox="1"/>
+          <p:nvPr/>
+        </p:nvSpPr>
+        <p:spPr>
+          <a:xfrm>
+            <a:off x="2281142" y="6437376"/>
+            <a:ext cx="1470469" cy="152146"/>
+          </a:xfrm>
+          <a:prstGeom prst="rect">
+            <a:avLst/>
+          </a:prstGeom>
+          <a:noFill/>
+        </p:spPr>
+        <p:txBody>
+          <a:bodyPr wrap="square" anchor="t" lIns="0" rIns="0" tIns="0" bIns="0">
+            <a:spAutoFit/>
+          </a:bodyPr>
+          <a:lstStyle/>
+          <a:p>
+            <a:pPr algn="l"/>
+            <a:r>
+              <a:rPr sz="700" b="1" i="0">
+                <a:solidFill>
+                  <a:srgbClr val="5B3FD6"/>
+                </a:solidFill>
+                <a:latin typeface="Calibri"/>
+              </a:rPr>
+              <a:t>The method you already own</a:t>
+            </a:r>
+          </a:p>
+        </p:txBody>
+      </p:sp>
+      <p:sp>
+        <p:nvSpPr>
+          <p:cNvPr id="19" name="TextBox 18"/>
+          <p:cNvSpPr txBox="1"/>
+          <p:nvPr/>
+        </p:nvSpPr>
+        <p:spPr>
+          <a:xfrm>
+            <a:off x="10198303" y="6437376"/>
+            <a:ext cx="1463040" cy="160401"/>
+          </a:xfrm>
+          <a:prstGeom prst="rect">
+            <a:avLst/>
+          </a:prstGeom>
+          <a:noFill/>
+        </p:spPr>
+        <p:txBody>
+          <a:bodyPr wrap="square" anchor="t" lIns="0" rIns="0" tIns="0" bIns="0">
+            <a:spAutoFit/>
+          </a:bodyPr>
+          <a:lstStyle/>
+          <a:p>
+            <a:pPr algn="r"/>
+            <a:r>
+              <a:rPr sz="750" b="0" i="0">
+                <a:solidFill>
+                  <a:srgbClr val="6B6690"/>
+                </a:solidFill>
+                <a:latin typeface="Calibri"/>
+              </a:rPr>
+              <a:t>S11  ·  18 / 24</a:t>
+            </a:r>
+          </a:p>
+        </p:txBody>
+      </p:sp>
+    </p:spTree>
+  </p:cSld>
+  <p:clrMapOvr>
+    <a:masterClrMapping/>
+  </p:clrMapOvr>
+</p:sld>
+</file>
+
+<file path=ppt/slides/slide19.xml><?xml version="1.0" encoding="utf-8"?>
+<p:sld xmlns:a="http://schemas.openxmlformats.org/drawingml/2006/main" xmlns:p="http://schemas.openxmlformats.org/presentationml/2006/main" xmlns:r="http://schemas.openxmlformats.org/officeDocument/2006/relationships">
+  <p:cSld>
+    <p:spTree>
+      <p:nvGrpSpPr>
+        <p:cNvPr id="1" name=""/>
+        <p:cNvGrpSpPr/>
+        <p:nvPr/>
+      </p:nvGrpSpPr>
+      <p:grpSpPr/>
+      <p:pic>
+        <p:nvPicPr>
+          <p:cNvPr id="2" name="Picture 1" descr="bg_light.jpg"/>
+          <p:cNvPicPr>
+            <a:picLocks noChangeAspect="1"/>
+          </p:cNvPicPr>
+          <p:nvPr/>
+        </p:nvPicPr>
+        <p:blipFill>
+          <a:blip r:embed="rId2"/>
+          <a:stretch>
+            <a:fillRect/>
+          </a:stretch>
+        </p:blipFill>
+        <p:spPr>
+          <a:xfrm>
+            <a:off x="0" y="0"/>
+            <a:ext cx="12191695" cy="6858000"/>
+          </a:xfrm>
+          <a:prstGeom prst="rect">
+            <a:avLst/>
+          </a:prstGeom>
+        </p:spPr>
+      </p:pic>
+      <p:pic>
+        <p:nvPicPr>
+          <p:cNvPr id="3" name="Picture 2" descr="iitgn_logo.png"/>
+          <p:cNvPicPr>
+            <a:picLocks noChangeAspect="1"/>
+          </p:cNvPicPr>
+          <p:nvPr/>
+        </p:nvPicPr>
+        <p:blipFill>
+          <a:blip r:embed="rId3"/>
+          <a:stretch>
+            <a:fillRect/>
+          </a:stretch>
+        </p:blipFill>
+        <p:spPr>
+          <a:xfrm>
+            <a:off x="530352" y="201168"/>
+            <a:ext cx="420624" cy="420624"/>
+          </a:xfrm>
+          <a:prstGeom prst="rect">
+            <a:avLst/>
+          </a:prstGeom>
+        </p:spPr>
+      </p:pic>
+      <p:sp>
+        <p:nvSpPr>
+          <p:cNvPr id="4" name="TextBox 3"/>
+          <p:cNvSpPr txBox="1"/>
+          <p:nvPr/>
+        </p:nvSpPr>
+        <p:spPr>
+          <a:xfrm>
+            <a:off x="1042416" y="228600"/>
+            <a:ext cx="5120640" cy="185166"/>
+          </a:xfrm>
+          <a:prstGeom prst="rect">
+            <a:avLst/>
+          </a:prstGeom>
+          <a:noFill/>
+        </p:spPr>
+        <p:txBody>
+          <a:bodyPr wrap="square" anchor="t" lIns="0" rIns="0" tIns="0" bIns="0">
+            <a:spAutoFit/>
+          </a:bodyPr>
+          <a:lstStyle/>
+          <a:p>
+            <a:pPr algn="l"/>
+            <a:r>
+              <a:rPr sz="900" b="1" i="0">
+                <a:solidFill>
+                  <a:srgbClr val="1A0F5C"/>
+                </a:solidFill>
+                <a:latin typeface="Calibri"/>
+              </a:rPr>
+              <a:t>Indian Institute of Technology Gandhinagar</a:t>
+            </a:r>
+          </a:p>
+        </p:txBody>
+      </p:sp>
+      <p:sp>
+        <p:nvSpPr>
+          <p:cNvPr id="5" name="TextBox 4"/>
+          <p:cNvSpPr txBox="1"/>
+          <p:nvPr/>
+        </p:nvSpPr>
+        <p:spPr>
+          <a:xfrm>
+            <a:off x="1042416" y="420623"/>
+            <a:ext cx="5852160" cy="127381"/>
+          </a:xfrm>
+          <a:prstGeom prst="rect">
+            <a:avLst/>
+          </a:prstGeom>
+          <a:noFill/>
+        </p:spPr>
+        <p:txBody>
+          <a:bodyPr wrap="square" anchor="t" lIns="0" rIns="0" tIns="0" bIns="0">
+            <a:spAutoFit/>
+          </a:bodyPr>
+          <a:lstStyle/>
+          <a:p>
+            <a:pPr algn="l"/>
+            <a:r>
+              <a:rPr sz="550" b="1" i="0" spc="300">
+                <a:solidFill>
+                  <a:srgbClr val="6B6690"/>
+                </a:solidFill>
+                <a:latin typeface="Calibri"/>
+              </a:rPr>
+              <a:t>ADMINISTERED THROUGH THE COMPETENCY ADVANCEMENT ACADEMY</a:t>
+            </a:r>
+          </a:p>
+        </p:txBody>
+      </p:sp>
+      <p:sp>
+        <p:nvSpPr>
+          <p:cNvPr id="6" name="TextBox 5"/>
+          <p:cNvSpPr txBox="1"/>
+          <p:nvPr/>
+        </p:nvSpPr>
+        <p:spPr>
+          <a:xfrm>
+            <a:off x="5992063" y="310896"/>
+            <a:ext cx="5669280" cy="127381"/>
+          </a:xfrm>
+          <a:prstGeom prst="rect">
+            <a:avLst/>
+          </a:prstGeom>
+          <a:noFill/>
+        </p:spPr>
+        <p:txBody>
+          <a:bodyPr wrap="square" anchor="t" lIns="0" rIns="0" tIns="0" bIns="0">
+            <a:spAutoFit/>
+          </a:bodyPr>
+          <a:lstStyle/>
+          <a:p>
+            <a:pPr algn="r"/>
+            <a:r>
+              <a:rPr sz="550" b="1" i="0" spc="300">
+                <a:solidFill>
+                  <a:srgbClr val="6B6690"/>
+                </a:solidFill>
+                <a:latin typeface="Calibri"/>
+              </a:rPr>
+              <a:t>WEEK 3  ·  DAY 1  ·  KALPA GLOBAL CAPABILITY CENTRE</a:t>
+            </a:r>
+          </a:p>
+        </p:txBody>
+      </p:sp>
+      <p:sp>
+        <p:nvSpPr>
+          <p:cNvPr id="7" name="TextBox 6"/>
+          <p:cNvSpPr txBox="1"/>
+          <p:nvPr/>
+        </p:nvSpPr>
+        <p:spPr>
+          <a:xfrm>
+            <a:off x="530352" y="676656"/>
+            <a:ext cx="11130991" cy="512064"/>
+          </a:xfrm>
+          <a:prstGeom prst="rect">
+            <a:avLst/>
+          </a:prstGeom>
+          <a:noFill/>
+        </p:spPr>
+        <p:txBody>
+          <a:bodyPr wrap="square" anchor="b" lIns="0" rIns="0" tIns="0" bIns="0">
+            <a:spAutoFit/>
+          </a:bodyPr>
+          <a:lstStyle/>
+          <a:p>
+            <a:pPr algn="l"/>
+            <a:r>
+              <a:rPr sz="2600" b="0" i="0">
+                <a:solidFill>
+                  <a:srgbClr val="1A0F5C"/>
+                </a:solidFill>
+                <a:latin typeface="Georgia"/>
+              </a:rPr>
+              <a:t>Profile, clean, reconcile: Week 1 Wednesday</a:t>
+            </a:r>
+          </a:p>
+        </p:txBody>
+      </p:sp>
+      <p:sp>
+        <p:nvSpPr>
+          <p:cNvPr id="8" name="TextBox 7"/>
+          <p:cNvSpPr txBox="1"/>
+          <p:nvPr/>
+        </p:nvSpPr>
+        <p:spPr>
+          <a:xfrm>
+            <a:off x="530352" y="1243584"/>
+            <a:ext cx="11130991" cy="234696"/>
+          </a:xfrm>
+          <a:prstGeom prst="rect">
+            <a:avLst/>
+          </a:prstGeom>
+          <a:noFill/>
+        </p:spPr>
+        <p:txBody>
+          <a:bodyPr wrap="square" anchor="t" lIns="0" rIns="0" tIns="0" bIns="0">
+            <a:spAutoFit/>
+          </a:bodyPr>
+          <a:lstStyle/>
+          <a:p>
+            <a:pPr algn="l"/>
+            <a:r>
+              <a:rPr sz="1200" b="0" i="0">
+                <a:solidFill>
+                  <a:srgbClr val="6B6690"/>
+                </a:solidFill>
+                <a:latin typeface="Calibri"/>
+              </a:rPr>
+              <a:t>Rows in equal rows kept plus set aside, and every decision is written down.</a:t>
+            </a:r>
+          </a:p>
+        </p:txBody>
+      </p:sp>
+      <p:pic>
+        <p:nvPicPr>
+          <p:cNvPr id="9" name="mermaid diagram" descr="4ac7ebb1a98e4b61.png"/>
+          <p:cNvPicPr>
+            <a:picLocks noChangeAspect="1"/>
+          </p:cNvPicPr>
+          <p:nvPr/>
+        </p:nvPicPr>
+        <p:blipFill>
+          <a:blip r:embed="rId5"/>
+          <a:stretch>
+            <a:fillRect/>
+          </a:stretch>
+        </p:blipFill>
+        <p:spPr>
+          <a:xfrm>
+            <a:off x="1230953" y="1956816"/>
+            <a:ext cx="9729787" cy="1128712"/>
           </a:xfrm>
           <a:prstGeom prst="rect">
             <a:avLst/>
@@ -12037,8 +15652,8 @@
           <p:nvPr/>
         </p:nvGraphicFramePr>
         <p:xfrm>
-          <a:off x="530352" y="2968076"/>
-          <a:ext cx="11130990" cy="670560"/>
+          <a:off x="530352" y="3231832"/>
+          <a:ext cx="11130990" cy="1005840"/>
         </p:xfrm>
         <a:graphic>
           <a:graphicData uri="http://schemas.openxmlformats.org/drawingml/2006/table">
@@ -12050,8 +15665,8 @@
                 <a:gridCol w="914400"/>
                 <a:gridCol w="914400"/>
                 <a:gridCol w="914400"/>
-                <a:gridCol w="3741033"/>
-                <a:gridCol w="4646757"/>
+                <a:gridCol w="5334909"/>
+                <a:gridCol w="3052881"/>
               </a:tblGrid>
               <a:tr h="335280">
                 <a:tc>
@@ -12244,7 +15859,7 @@
                           </a:solidFill>
                           <a:latin typeface="Calibri"/>
                         </a:rPr>
-                        <a:t>Drop later occurrences</a:t>
+                        <a:t>Keep one row per order, preferring the copy that validates</a:t>
                       </a:r>
                     </a:p>
                   </a:txBody>
@@ -12266,7 +15881,7 @@
                           </a:solidFill>
                           <a:latin typeface="Calibri"/>
                         </a:rPr>
-                        <a:t>The migration re-ran a batch</a:t>
+                        <a:t>201 rows, 186 orders</a:t>
                       </a:r>
                     </a:p>
                   </a:txBody>
@@ -12277,6 +15892,118 @@
                   </a:tcPr>
                 </a:tc>
               </a:tr>
+              <a:tr h="335280">
+                <a:tc>
+                  <a:txBody>
+                    <a:bodyPr/>
+                    <a:lstStyle/>
+                    <a:p>
+                      <a:r>
+                        <a:rPr sz="1200" b="0" i="0">
+                          <a:solidFill>
+                            <a:srgbClr val="1A1440"/>
+                          </a:solidFill>
+                          <a:latin typeface="Calibri"/>
+                        </a:rPr>
+                        <a:t>status</a:t>
+                      </a:r>
+                    </a:p>
+                  </a:txBody>
+                  <a:tcPr marL="101600" marR="101600" marT="38100" marB="38100" anchor="ctr">
+                    <a:solidFill>
+                      <a:srgbClr val="F4F2FA"/>
+                    </a:solidFill>
+                  </a:tcPr>
+                </a:tc>
+                <a:tc>
+                  <a:txBody>
+                    <a:bodyPr/>
+                    <a:lstStyle/>
+                    <a:p>
+                      <a:r>
+                        <a:rPr sz="1200" b="0" i="0">
+                          <a:solidFill>
+                            <a:srgbClr val="1A1440"/>
+                          </a:solidFill>
+                          <a:latin typeface="Calibri"/>
+                        </a:rPr>
+                        <a:t>Empty</a:t>
+                      </a:r>
+                    </a:p>
+                  </a:txBody>
+                  <a:tcPr marL="101600" marR="101600" marT="38100" marB="38100" anchor="ctr">
+                    <a:solidFill>
+                      <a:srgbClr val="F4F2FA"/>
+                    </a:solidFill>
+                  </a:tcPr>
+                </a:tc>
+                <a:tc>
+                  <a:txBody>
+                    <a:bodyPr/>
+                    <a:lstStyle/>
+                    <a:p>
+                      <a:r>
+                        <a:rPr sz="1200" b="0" i="0">
+                          <a:solidFill>
+                            <a:srgbClr val="1A1440"/>
+                          </a:solidFill>
+                          <a:latin typeface="Calibri"/>
+                        </a:rPr>
+                        <a:t>1</a:t>
+                      </a:r>
+                    </a:p>
+                  </a:txBody>
+                  <a:tcPr marL="101600" marR="101600" marT="38100" marB="38100" anchor="ctr">
+                    <a:solidFill>
+                      <a:srgbClr val="F4F2FA"/>
+                    </a:solidFill>
+                  </a:tcPr>
+                </a:tc>
+                <a:tc>
+                  <a:txBody>
+                    <a:bodyPr/>
+                    <a:lstStyle/>
+                    <a:p>
+                      <a:r>
+                        <a:rPr sz="1200" b="0" i="0">
+                          <a:solidFill>
+                            <a:srgbClr val="1A1440"/>
+                          </a:solidFill>
+                          <a:latin typeface="Calibri"/>
+                        </a:rPr>
+                        <a:t>Keep and flag</a:t>
+                      </a:r>
+                    </a:p>
+                  </a:txBody>
+                  <a:tcPr marL="101600" marR="101600" marT="38100" marB="38100" anchor="ctr">
+                    <a:solidFill>
+                      <a:srgbClr val="F4F2FA"/>
+                    </a:solidFill>
+                  </a:tcPr>
+                </a:tc>
+                <a:tc>
+                  <a:txBody>
+                    <a:bodyPr/>
+                    <a:lstStyle/>
+                    <a:p>
+                      <a:r>
+                        <a:rPr sz="1200" b="0" i="0">
+                          <a:solidFill>
+                            <a:srgbClr val="1A1440"/>
+                          </a:solidFill>
+                          <a:latin typeface="Calibri"/>
+                        </a:rPr>
+                        <a:t>It happened; its fate is unknown</a:t>
+                      </a:r>
+                    </a:p>
+                  </a:txBody>
+                  <a:tcPr marL="101600" marR="101600" marT="38100" marB="38100" anchor="ctr">
+                    <a:solidFill>
+                      <a:srgbClr val="F4F2FA"/>
+                    </a:solidFill>
+                  </a:tcPr>
+                </a:tc>
+              </a:tr>
             </a:tbl>
           </a:graphicData>
         </a:graphic>
@@ -12289,7 +16016,7 @@
         </p:nvSpPr>
         <p:spPr>
           <a:xfrm>
-            <a:off x="530352" y="3894668"/>
+            <a:off x="530352" y="4493704"/>
             <a:ext cx="11130991" cy="541020"/>
           </a:xfrm>
           <a:prstGeom prst="roundRect">
@@ -12337,7 +16064,7 @@
         </p:nvSpPr>
         <p:spPr>
           <a:xfrm>
-            <a:off x="676656" y="4022684"/>
+            <a:off x="676656" y="4621720"/>
             <a:ext cx="45720" cy="284988"/>
           </a:xfrm>
           <a:prstGeom prst="roundRect">
@@ -12383,7 +16110,7 @@
         </p:nvSpPr>
         <p:spPr>
           <a:xfrm>
-            <a:off x="877824" y="4013540"/>
+            <a:off x="877824" y="4612576"/>
             <a:ext cx="10564063" cy="358140"/>
           </a:xfrm>
           <a:prstGeom prst="rect">
@@ -12685,7 +16412,7 @@
                 </a:solidFill>
                 <a:latin typeface="Calibri"/>
               </a:rPr>
-              <a:t>S12  ·  16 / 21</a:t>
+              <a:t>S12  ·  19 / 24</a:t>
             </a:r>
           </a:p>
         </p:txBody>
@@ -12698,7 +16425,518 @@
 </p:sld>
 </file>
 
-<file path=ppt/slides/slide17.xml><?xml version="1.0" encoding="utf-8"?>
+<file path=ppt/slides/slide2.xml><?xml version="1.0" encoding="utf-8"?>
+<p:sld xmlns:a="http://schemas.openxmlformats.org/drawingml/2006/main" xmlns:p="http://schemas.openxmlformats.org/presentationml/2006/main" xmlns:r="http://schemas.openxmlformats.org/officeDocument/2006/relationships">
+  <p:cSld>
+    <p:spTree>
+      <p:nvGrpSpPr>
+        <p:cNvPr id="1" name=""/>
+        <p:cNvGrpSpPr/>
+        <p:nvPr/>
+      </p:nvGrpSpPr>
+      <p:grpSpPr/>
+      <p:pic>
+        <p:nvPicPr>
+          <p:cNvPr id="2" name="Picture 1" descr="bg_dark.jpg"/>
+          <p:cNvPicPr>
+            <a:picLocks noChangeAspect="1"/>
+          </p:cNvPicPr>
+          <p:nvPr/>
+        </p:nvPicPr>
+        <p:blipFill>
+          <a:blip r:embed="rId2"/>
+          <a:stretch>
+            <a:fillRect/>
+          </a:stretch>
+        </p:blipFill>
+        <p:spPr>
+          <a:xfrm>
+            <a:off x="0" y="0"/>
+            <a:ext cx="12191695" cy="6858000"/>
+          </a:xfrm>
+          <a:prstGeom prst="rect">
+            <a:avLst/>
+          </a:prstGeom>
+        </p:spPr>
+      </p:pic>
+      <p:pic>
+        <p:nvPicPr>
+          <p:cNvPr id="3" name="Picture 2" descr="iitgn_logo.png"/>
+          <p:cNvPicPr>
+            <a:picLocks noChangeAspect="1"/>
+          </p:cNvPicPr>
+          <p:nvPr/>
+        </p:nvPicPr>
+        <p:blipFill>
+          <a:blip r:embed="rId3"/>
+          <a:stretch>
+            <a:fillRect/>
+          </a:stretch>
+        </p:blipFill>
+        <p:spPr>
+          <a:xfrm>
+            <a:off x="530352" y="201168"/>
+            <a:ext cx="420624" cy="420624"/>
+          </a:xfrm>
+          <a:prstGeom prst="rect">
+            <a:avLst/>
+          </a:prstGeom>
+        </p:spPr>
+      </p:pic>
+      <p:sp>
+        <p:nvSpPr>
+          <p:cNvPr id="4" name="TextBox 3"/>
+          <p:cNvSpPr txBox="1"/>
+          <p:nvPr/>
+        </p:nvSpPr>
+        <p:spPr>
+          <a:xfrm>
+            <a:off x="1042416" y="228600"/>
+            <a:ext cx="5120640" cy="185166"/>
+          </a:xfrm>
+          <a:prstGeom prst="rect">
+            <a:avLst/>
+          </a:prstGeom>
+          <a:noFill/>
+        </p:spPr>
+        <p:txBody>
+          <a:bodyPr wrap="square" anchor="t" lIns="0" rIns="0" tIns="0" bIns="0">
+            <a:spAutoFit/>
+          </a:bodyPr>
+          <a:lstStyle/>
+          <a:p>
+            <a:pPr algn="l"/>
+            <a:r>
+              <a:rPr sz="900" b="1" i="0">
+                <a:solidFill>
+                  <a:srgbClr val="FFFFFF"/>
+                </a:solidFill>
+                <a:latin typeface="Calibri"/>
+              </a:rPr>
+              <a:t>Indian Institute of Technology Gandhinagar</a:t>
+            </a:r>
+          </a:p>
+        </p:txBody>
+      </p:sp>
+      <p:sp>
+        <p:nvSpPr>
+          <p:cNvPr id="5" name="TextBox 4"/>
+          <p:cNvSpPr txBox="1"/>
+          <p:nvPr/>
+        </p:nvSpPr>
+        <p:spPr>
+          <a:xfrm>
+            <a:off x="1042416" y="420623"/>
+            <a:ext cx="5852160" cy="127381"/>
+          </a:xfrm>
+          <a:prstGeom prst="rect">
+            <a:avLst/>
+          </a:prstGeom>
+          <a:noFill/>
+        </p:spPr>
+        <p:txBody>
+          <a:bodyPr wrap="square" anchor="t" lIns="0" rIns="0" tIns="0" bIns="0">
+            <a:spAutoFit/>
+          </a:bodyPr>
+          <a:lstStyle/>
+          <a:p>
+            <a:pPr algn="l"/>
+            <a:r>
+              <a:rPr sz="550" b="1" i="0" spc="300">
+                <a:solidFill>
+                  <a:srgbClr val="CFC9EE"/>
+                </a:solidFill>
+                <a:latin typeface="Calibri"/>
+              </a:rPr>
+              <a:t>ADMINISTERED THROUGH THE COMPETENCY ADVANCEMENT ACADEMY</a:t>
+            </a:r>
+          </a:p>
+        </p:txBody>
+      </p:sp>
+      <p:sp>
+        <p:nvSpPr>
+          <p:cNvPr id="6" name="TextBox 5"/>
+          <p:cNvSpPr txBox="1"/>
+          <p:nvPr/>
+        </p:nvSpPr>
+        <p:spPr>
+          <a:xfrm>
+            <a:off x="5992063" y="310896"/>
+            <a:ext cx="5669280" cy="127381"/>
+          </a:xfrm>
+          <a:prstGeom prst="rect">
+            <a:avLst/>
+          </a:prstGeom>
+          <a:noFill/>
+        </p:spPr>
+        <p:txBody>
+          <a:bodyPr wrap="square" anchor="t" lIns="0" rIns="0" tIns="0" bIns="0">
+            <a:spAutoFit/>
+          </a:bodyPr>
+          <a:lstStyle/>
+          <a:p>
+            <a:pPr algn="r"/>
+            <a:r>
+              <a:rPr sz="550" b="1" i="0" spc="300">
+                <a:solidFill>
+                  <a:srgbClr val="CFC9EE"/>
+                </a:solidFill>
+                <a:latin typeface="Calibri"/>
+              </a:rPr>
+              <a:t>PG DIPLOMA IN AI-ML AND AGENTIC AI ENGINEERING  ·  COHORT 2</a:t>
+            </a:r>
+          </a:p>
+        </p:txBody>
+      </p:sp>
+      <p:sp>
+        <p:nvSpPr>
+          <p:cNvPr id="7" name="TextBox 6"/>
+          <p:cNvSpPr txBox="1"/>
+          <p:nvPr/>
+        </p:nvSpPr>
+        <p:spPr>
+          <a:xfrm>
+            <a:off x="731519" y="1143000"/>
+            <a:ext cx="3657600" cy="1371600"/>
+          </a:xfrm>
+          <a:prstGeom prst="rect">
+            <a:avLst/>
+          </a:prstGeom>
+          <a:noFill/>
+        </p:spPr>
+        <p:txBody>
+          <a:bodyPr wrap="square" anchor="t" lIns="0" rIns="0" tIns="0" bIns="0">
+            <a:spAutoFit/>
+          </a:bodyPr>
+          <a:lstStyle/>
+          <a:p>
+            <a:pPr algn="l"/>
+            <a:r>
+              <a:rPr sz="9600" b="0" i="0">
+                <a:solidFill>
+                  <a:srgbClr val="D9A7FF"/>
+                </a:solidFill>
+                <a:latin typeface="Georgia"/>
+              </a:rPr>
+              <a:t>01</a:t>
+            </a:r>
+          </a:p>
+        </p:txBody>
+      </p:sp>
+      <p:sp>
+        <p:nvSpPr>
+          <p:cNvPr id="8" name="TextBox 7"/>
+          <p:cNvSpPr txBox="1"/>
+          <p:nvPr/>
+        </p:nvSpPr>
+        <p:spPr>
+          <a:xfrm>
+            <a:off x="731519" y="2606040"/>
+            <a:ext cx="10673791" cy="731520"/>
+          </a:xfrm>
+          <a:prstGeom prst="rect">
+            <a:avLst/>
+          </a:prstGeom>
+          <a:noFill/>
+        </p:spPr>
+        <p:txBody>
+          <a:bodyPr wrap="square" anchor="t" lIns="0" rIns="0" tIns="0" bIns="0">
+            <a:spAutoFit/>
+          </a:bodyPr>
+          <a:lstStyle/>
+          <a:p>
+            <a:pPr algn="l"/>
+            <a:r>
+              <a:rPr sz="4000" b="0" i="0">
+                <a:solidFill>
+                  <a:srgbClr val="FFFFFF"/>
+                </a:solidFill>
+                <a:latin typeface="Georgia"/>
+              </a:rPr>
+              <a:t>The ask</a:t>
+            </a:r>
+          </a:p>
+        </p:txBody>
+      </p:sp>
+      <p:sp>
+        <p:nvSpPr>
+          <p:cNvPr id="9" name="TextBox 8"/>
+          <p:cNvSpPr txBox="1"/>
+          <p:nvPr/>
+        </p:nvSpPr>
+        <p:spPr>
+          <a:xfrm>
+            <a:off x="731519" y="3520440"/>
+            <a:ext cx="9509760" cy="284226"/>
+          </a:xfrm>
+          <a:prstGeom prst="rect">
+            <a:avLst/>
+          </a:prstGeom>
+          <a:noFill/>
+        </p:spPr>
+        <p:txBody>
+          <a:bodyPr wrap="square" anchor="t" lIns="0" rIns="0" tIns="0" bIns="0">
+            <a:spAutoFit/>
+          </a:bodyPr>
+          <a:lstStyle/>
+          <a:p>
+            <a:pPr algn="l"/>
+            <a:r>
+              <a:rPr sz="1500" b="0" i="0">
+                <a:solidFill>
+                  <a:srgbClr val="E4E1F1"/>
+                </a:solidFill>
+                <a:latin typeface="Calibri"/>
+              </a:rPr>
+              <a:t>A second Kalpa COO has Meera's problem, in a business with its own words.</a:t>
+            </a:r>
+          </a:p>
+        </p:txBody>
+      </p:sp>
+      <p:sp>
+        <p:nvSpPr>
+          <p:cNvPr id="10" name="Rounded Rectangle 9"/>
+          <p:cNvSpPr/>
+          <p:nvPr/>
+        </p:nvSpPr>
+        <p:spPr>
+          <a:xfrm>
+            <a:off x="731519" y="5074920"/>
+            <a:ext cx="780271" cy="310896"/>
+          </a:xfrm>
+          <a:prstGeom prst="roundRect">
+            <a:avLst>
+              <a:gd name="adj" fmla="val 50000"/>
+            </a:avLst>
+          </a:prstGeom>
+          <a:solidFill>
+            <a:srgbClr val="D9A7FF"/>
+          </a:solidFill>
+          <a:ln>
+            <a:noFill/>
+          </a:ln>
+          <a:effectLst/>
+        </p:spPr>
+        <p:style>
+          <a:lnRef idx="1">
+            <a:schemeClr val="accent1"/>
+          </a:lnRef>
+          <a:fillRef idx="3">
+            <a:schemeClr val="accent1"/>
+          </a:fillRef>
+          <a:effectRef idx="2">
+            <a:schemeClr val="accent1"/>
+          </a:effectRef>
+          <a:fontRef idx="minor">
+            <a:schemeClr val="lt1"/>
+          </a:fontRef>
+        </p:style>
+        <p:txBody>
+          <a:bodyPr rtlCol="0" anchor="ctr" wrap="none" lIns="25400" rIns="25400" tIns="0" bIns="0"/>
+          <a:lstStyle/>
+          <a:p>
+            <a:pPr algn="ctr"/>
+            <a:r>
+              <a:rPr sz="850" b="1">
+                <a:solidFill>
+                  <a:srgbClr val="1A0F5C"/>
+                </a:solidFill>
+                <a:latin typeface="Calibri"/>
+              </a:rPr>
+              <a:t>The ask</a:t>
+            </a:r>
+          </a:p>
+        </p:txBody>
+      </p:sp>
+      <p:sp>
+        <p:nvSpPr>
+          <p:cNvPr id="11" name="Rounded Rectangle 10"/>
+          <p:cNvSpPr/>
+          <p:nvPr/>
+        </p:nvSpPr>
+        <p:spPr>
+          <a:xfrm>
+            <a:off x="1621519" y="5074920"/>
+            <a:ext cx="839487" cy="310896"/>
+          </a:xfrm>
+          <a:prstGeom prst="roundRect">
+            <a:avLst>
+              <a:gd name="adj" fmla="val 50000"/>
+            </a:avLst>
+          </a:prstGeom>
+          <a:noFill/>
+          <a:ln w="9525">
+            <a:solidFill>
+              <a:srgbClr val="CFC9EE"/>
+            </a:solidFill>
+          </a:ln>
+          <a:effectLst/>
+        </p:spPr>
+        <p:style>
+          <a:lnRef idx="1">
+            <a:schemeClr val="accent1"/>
+          </a:lnRef>
+          <a:fillRef idx="3">
+            <a:schemeClr val="accent1"/>
+          </a:fillRef>
+          <a:effectRef idx="2">
+            <a:schemeClr val="accent1"/>
+          </a:effectRef>
+          <a:fontRef idx="minor">
+            <a:schemeClr val="lt1"/>
+          </a:fontRef>
+        </p:style>
+        <p:txBody>
+          <a:bodyPr rtlCol="0" anchor="ctr" wrap="none" lIns="25400" rIns="25400" tIns="0" bIns="0"/>
+          <a:lstStyle/>
+          <a:p>
+            <a:pPr algn="ctr"/>
+            <a:r>
+              <a:rPr sz="850" b="0">
+                <a:solidFill>
+                  <a:srgbClr val="CFC9EE"/>
+                </a:solidFill>
+                <a:latin typeface="Calibri"/>
+              </a:rPr>
+              <a:t>The week</a:t>
+            </a:r>
+          </a:p>
+        </p:txBody>
+      </p:sp>
+      <p:sp>
+        <p:nvSpPr>
+          <p:cNvPr id="12" name="Rounded Rectangle 11"/>
+          <p:cNvSpPr/>
+          <p:nvPr/>
+        </p:nvSpPr>
+        <p:spPr>
+          <a:xfrm>
+            <a:off x="2570735" y="5074920"/>
+            <a:ext cx="1905375" cy="310896"/>
+          </a:xfrm>
+          <a:prstGeom prst="roundRect">
+            <a:avLst>
+              <a:gd name="adj" fmla="val 50000"/>
+            </a:avLst>
+          </a:prstGeom>
+          <a:noFill/>
+          <a:ln w="9525">
+            <a:solidFill>
+              <a:srgbClr val="CFC9EE"/>
+            </a:solidFill>
+          </a:ln>
+          <a:effectLst/>
+        </p:spPr>
+        <p:style>
+          <a:lnRef idx="1">
+            <a:schemeClr val="accent1"/>
+          </a:lnRef>
+          <a:fillRef idx="3">
+            <a:schemeClr val="accent1"/>
+          </a:fillRef>
+          <a:effectRef idx="2">
+            <a:schemeClr val="accent1"/>
+          </a:effectRef>
+          <a:fontRef idx="minor">
+            <a:schemeClr val="lt1"/>
+          </a:fontRef>
+        </p:style>
+        <p:txBody>
+          <a:bodyPr rtlCol="0" anchor="ctr" wrap="none" lIns="25400" rIns="25400" tIns="0" bIns="0"/>
+          <a:lstStyle/>
+          <a:p>
+            <a:pPr algn="ctr"/>
+            <a:r>
+              <a:rPr sz="850" b="0">
+                <a:solidFill>
+                  <a:srgbClr val="CFC9EE"/>
+                </a:solidFill>
+                <a:latin typeface="Calibri"/>
+              </a:rPr>
+              <a:t>The method you already own</a:t>
+            </a:r>
+          </a:p>
+        </p:txBody>
+      </p:sp>
+      <p:sp>
+        <p:nvSpPr>
+          <p:cNvPr id="13" name="TextBox 12"/>
+          <p:cNvSpPr txBox="1"/>
+          <p:nvPr/>
+        </p:nvSpPr>
+        <p:spPr>
+          <a:xfrm>
+            <a:off x="530352" y="6437376"/>
+            <a:ext cx="9667951" cy="160401"/>
+          </a:xfrm>
+          <a:prstGeom prst="rect">
+            <a:avLst/>
+          </a:prstGeom>
+          <a:noFill/>
+        </p:spPr>
+        <p:txBody>
+          <a:bodyPr wrap="square" anchor="t" lIns="0" rIns="0" tIns="0" bIns="0">
+            <a:spAutoFit/>
+          </a:bodyPr>
+          <a:lstStyle/>
+          <a:p>
+            <a:pPr algn="l"/>
+            <a:r>
+              <a:rPr sz="750" b="0" i="0">
+                <a:solidFill>
+                  <a:srgbClr val="CFC9EE"/>
+                </a:solidFill>
+                <a:latin typeface="Calibri"/>
+              </a:rPr>
+              <a:t>Week 3, Day 1. Build 1: Kalpa Health</a:t>
+            </a:r>
+          </a:p>
+        </p:txBody>
+      </p:sp>
+      <p:sp>
+        <p:nvSpPr>
+          <p:cNvPr id="14" name="TextBox 13"/>
+          <p:cNvSpPr txBox="1"/>
+          <p:nvPr/>
+        </p:nvSpPr>
+        <p:spPr>
+          <a:xfrm>
+            <a:off x="10198303" y="6437376"/>
+            <a:ext cx="1463040" cy="160401"/>
+          </a:xfrm>
+          <a:prstGeom prst="rect">
+            <a:avLst/>
+          </a:prstGeom>
+          <a:noFill/>
+        </p:spPr>
+        <p:txBody>
+          <a:bodyPr wrap="square" anchor="t" lIns="0" rIns="0" tIns="0" bIns="0">
+            <a:spAutoFit/>
+          </a:bodyPr>
+          <a:lstStyle/>
+          <a:p>
+            <a:pPr algn="r"/>
+            <a:r>
+              <a:rPr sz="750" b="0" i="0">
+                <a:solidFill>
+                  <a:srgbClr val="CFC9EE"/>
+                </a:solidFill>
+                <a:latin typeface="Calibri"/>
+              </a:rPr>
+              <a:t>2 / 24</a:t>
+            </a:r>
+          </a:p>
+        </p:txBody>
+      </p:sp>
+    </p:spTree>
+  </p:cSld>
+  <p:clrMapOvr>
+    <a:masterClrMapping/>
+  </p:clrMapOvr>
+</p:sld>
+</file>
+
+<file path=ppt/slides/slide20.xml><?xml version="1.0" encoding="utf-8"?>
 <p:sld xmlns:a="http://schemas.openxmlformats.org/drawingml/2006/main" xmlns:p="http://schemas.openxmlformats.org/presentationml/2006/main" xmlns:r="http://schemas.openxmlformats.org/officeDocument/2006/relationships">
   <p:cSld>
     <p:spTree>
@@ -13359,7 +17597,7 @@
                 </a:solidFill>
                 <a:latin typeface="Calibri"/>
               </a:rPr>
-              <a:t>S13  ·  17 / 21</a:t>
+              <a:t>S13  ·  20 / 24</a:t>
             </a:r>
           </a:p>
         </p:txBody>
@@ -13372,7 +17610,7 @@
 </p:sld>
 </file>
 
-<file path=ppt/slides/slide18.xml><?xml version="1.0" encoding="utf-8"?>
+<file path=ppt/slides/slide21.xml><?xml version="1.0" encoding="utf-8"?>
 <p:sld xmlns:a="http://schemas.openxmlformats.org/drawingml/2006/main" xmlns:p="http://schemas.openxmlformats.org/presentationml/2006/main" xmlns:r="http://schemas.openxmlformats.org/officeDocument/2006/relationships">
   <p:cSld>
     <p:spTree>
@@ -13638,7 +17876,7 @@
         <p:spPr>
           <a:xfrm>
             <a:off x="530352" y="2717482"/>
-            <a:ext cx="11130991" cy="541020"/>
+            <a:ext cx="11130991" cy="807720"/>
           </a:xfrm>
           <a:prstGeom prst="roundRect">
             <a:avLst>
@@ -13686,7 +17924,7 @@
         <p:spPr>
           <a:xfrm>
             <a:off x="676656" y="2845498"/>
-            <a:ext cx="45720" cy="284988"/>
+            <a:ext cx="45720" cy="551688"/>
           </a:xfrm>
           <a:prstGeom prst="roundRect">
             <a:avLst>
@@ -13732,7 +17970,7 @@
         <p:spPr>
           <a:xfrm>
             <a:off x="877824" y="2836354"/>
-            <a:ext cx="10564063" cy="358140"/>
+            <a:ext cx="10564063" cy="624840"/>
           </a:xfrm>
           <a:prstGeom prst="rect">
             <a:avLst/>
@@ -13761,7 +17999,7 @@
                 </a:solidFill>
                 <a:latin typeface="Calibri"/>
               </a:rPr>
-              <a:t>Two systems export the same entity with different ids. What do you do before you join them?</a:t>
+              <a:t>Before you join any two files, what do you profile on every key column, and what count tells you the join worked?</a:t>
             </a:r>
           </a:p>
         </p:txBody>
@@ -14033,7 +18271,7 @@
                 </a:solidFill>
                 <a:latin typeface="Calibri"/>
               </a:rPr>
-              <a:t>S14  ·  18 / 21</a:t>
+              <a:t>S14  ·  21 / 24</a:t>
             </a:r>
           </a:p>
         </p:txBody>
@@ -14046,7 +18284,7 @@
 </p:sld>
 </file>
 
-<file path=ppt/slides/slide19.xml><?xml version="1.0" encoding="utf-8"?>
+<file path=ppt/slides/slide22.xml><?xml version="1.0" encoding="utf-8"?>
 <p:sld xmlns:a="http://schemas.openxmlformats.org/drawingml/2006/main" xmlns:p="http://schemas.openxmlformats.org/presentationml/2006/main" xmlns:r="http://schemas.openxmlformats.org/officeDocument/2006/relationships">
   <p:cSld>
     <p:spTree>
@@ -15618,7 +19856,7 @@
                 </a:solidFill>
                 <a:latin typeface="Calibri"/>
               </a:rPr>
-              <a:t>S15  ·  19 / 21</a:t>
+              <a:t>S15  ·  22 / 24</a:t>
             </a:r>
           </a:p>
         </p:txBody>
@@ -15631,518 +19869,7 @@
 </p:sld>
 </file>
 
-<file path=ppt/slides/slide2.xml><?xml version="1.0" encoding="utf-8"?>
-<p:sld xmlns:a="http://schemas.openxmlformats.org/drawingml/2006/main" xmlns:p="http://schemas.openxmlformats.org/presentationml/2006/main" xmlns:r="http://schemas.openxmlformats.org/officeDocument/2006/relationships">
-  <p:cSld>
-    <p:spTree>
-      <p:nvGrpSpPr>
-        <p:cNvPr id="1" name=""/>
-        <p:cNvGrpSpPr/>
-        <p:nvPr/>
-      </p:nvGrpSpPr>
-      <p:grpSpPr/>
-      <p:pic>
-        <p:nvPicPr>
-          <p:cNvPr id="2" name="Picture 1" descr="bg_dark.jpg"/>
-          <p:cNvPicPr>
-            <a:picLocks noChangeAspect="1"/>
-          </p:cNvPicPr>
-          <p:nvPr/>
-        </p:nvPicPr>
-        <p:blipFill>
-          <a:blip r:embed="rId2"/>
-          <a:stretch>
-            <a:fillRect/>
-          </a:stretch>
-        </p:blipFill>
-        <p:spPr>
-          <a:xfrm>
-            <a:off x="0" y="0"/>
-            <a:ext cx="12191695" cy="6858000"/>
-          </a:xfrm>
-          <a:prstGeom prst="rect">
-            <a:avLst/>
-          </a:prstGeom>
-        </p:spPr>
-      </p:pic>
-      <p:pic>
-        <p:nvPicPr>
-          <p:cNvPr id="3" name="Picture 2" descr="iitgn_logo.png"/>
-          <p:cNvPicPr>
-            <a:picLocks noChangeAspect="1"/>
-          </p:cNvPicPr>
-          <p:nvPr/>
-        </p:nvPicPr>
-        <p:blipFill>
-          <a:blip r:embed="rId3"/>
-          <a:stretch>
-            <a:fillRect/>
-          </a:stretch>
-        </p:blipFill>
-        <p:spPr>
-          <a:xfrm>
-            <a:off x="530352" y="201168"/>
-            <a:ext cx="420624" cy="420624"/>
-          </a:xfrm>
-          <a:prstGeom prst="rect">
-            <a:avLst/>
-          </a:prstGeom>
-        </p:spPr>
-      </p:pic>
-      <p:sp>
-        <p:nvSpPr>
-          <p:cNvPr id="4" name="TextBox 3"/>
-          <p:cNvSpPr txBox="1"/>
-          <p:nvPr/>
-        </p:nvSpPr>
-        <p:spPr>
-          <a:xfrm>
-            <a:off x="1042416" y="228600"/>
-            <a:ext cx="5120640" cy="185166"/>
-          </a:xfrm>
-          <a:prstGeom prst="rect">
-            <a:avLst/>
-          </a:prstGeom>
-          <a:noFill/>
-        </p:spPr>
-        <p:txBody>
-          <a:bodyPr wrap="square" anchor="t" lIns="0" rIns="0" tIns="0" bIns="0">
-            <a:spAutoFit/>
-          </a:bodyPr>
-          <a:lstStyle/>
-          <a:p>
-            <a:pPr algn="l"/>
-            <a:r>
-              <a:rPr sz="900" b="1" i="0">
-                <a:solidFill>
-                  <a:srgbClr val="FFFFFF"/>
-                </a:solidFill>
-                <a:latin typeface="Calibri"/>
-              </a:rPr>
-              <a:t>Indian Institute of Technology Gandhinagar</a:t>
-            </a:r>
-          </a:p>
-        </p:txBody>
-      </p:sp>
-      <p:sp>
-        <p:nvSpPr>
-          <p:cNvPr id="5" name="TextBox 4"/>
-          <p:cNvSpPr txBox="1"/>
-          <p:nvPr/>
-        </p:nvSpPr>
-        <p:spPr>
-          <a:xfrm>
-            <a:off x="1042416" y="420623"/>
-            <a:ext cx="5852160" cy="127381"/>
-          </a:xfrm>
-          <a:prstGeom prst="rect">
-            <a:avLst/>
-          </a:prstGeom>
-          <a:noFill/>
-        </p:spPr>
-        <p:txBody>
-          <a:bodyPr wrap="square" anchor="t" lIns="0" rIns="0" tIns="0" bIns="0">
-            <a:spAutoFit/>
-          </a:bodyPr>
-          <a:lstStyle/>
-          <a:p>
-            <a:pPr algn="l"/>
-            <a:r>
-              <a:rPr sz="550" b="1" i="0" spc="300">
-                <a:solidFill>
-                  <a:srgbClr val="CFC9EE"/>
-                </a:solidFill>
-                <a:latin typeface="Calibri"/>
-              </a:rPr>
-              <a:t>ADMINISTERED THROUGH THE COMPETENCY ADVANCEMENT ACADEMY</a:t>
-            </a:r>
-          </a:p>
-        </p:txBody>
-      </p:sp>
-      <p:sp>
-        <p:nvSpPr>
-          <p:cNvPr id="6" name="TextBox 5"/>
-          <p:cNvSpPr txBox="1"/>
-          <p:nvPr/>
-        </p:nvSpPr>
-        <p:spPr>
-          <a:xfrm>
-            <a:off x="5992063" y="310896"/>
-            <a:ext cx="5669280" cy="127381"/>
-          </a:xfrm>
-          <a:prstGeom prst="rect">
-            <a:avLst/>
-          </a:prstGeom>
-          <a:noFill/>
-        </p:spPr>
-        <p:txBody>
-          <a:bodyPr wrap="square" anchor="t" lIns="0" rIns="0" tIns="0" bIns="0">
-            <a:spAutoFit/>
-          </a:bodyPr>
-          <a:lstStyle/>
-          <a:p>
-            <a:pPr algn="r"/>
-            <a:r>
-              <a:rPr sz="550" b="1" i="0" spc="300">
-                <a:solidFill>
-                  <a:srgbClr val="CFC9EE"/>
-                </a:solidFill>
-                <a:latin typeface="Calibri"/>
-              </a:rPr>
-              <a:t>PG DIPLOMA IN AI-ML AND AGENTIC AI ENGINEERING  ·  COHORT 2</a:t>
-            </a:r>
-          </a:p>
-        </p:txBody>
-      </p:sp>
-      <p:sp>
-        <p:nvSpPr>
-          <p:cNvPr id="7" name="TextBox 6"/>
-          <p:cNvSpPr txBox="1"/>
-          <p:nvPr/>
-        </p:nvSpPr>
-        <p:spPr>
-          <a:xfrm>
-            <a:off x="731519" y="1143000"/>
-            <a:ext cx="3657600" cy="1371600"/>
-          </a:xfrm>
-          <a:prstGeom prst="rect">
-            <a:avLst/>
-          </a:prstGeom>
-          <a:noFill/>
-        </p:spPr>
-        <p:txBody>
-          <a:bodyPr wrap="square" anchor="t" lIns="0" rIns="0" tIns="0" bIns="0">
-            <a:spAutoFit/>
-          </a:bodyPr>
-          <a:lstStyle/>
-          <a:p>
-            <a:pPr algn="l"/>
-            <a:r>
-              <a:rPr sz="9600" b="0" i="0">
-                <a:solidFill>
-                  <a:srgbClr val="D9A7FF"/>
-                </a:solidFill>
-                <a:latin typeface="Georgia"/>
-              </a:rPr>
-              <a:t>01</a:t>
-            </a:r>
-          </a:p>
-        </p:txBody>
-      </p:sp>
-      <p:sp>
-        <p:nvSpPr>
-          <p:cNvPr id="8" name="TextBox 7"/>
-          <p:cNvSpPr txBox="1"/>
-          <p:nvPr/>
-        </p:nvSpPr>
-        <p:spPr>
-          <a:xfrm>
-            <a:off x="731519" y="2606040"/>
-            <a:ext cx="10673791" cy="731520"/>
-          </a:xfrm>
-          <a:prstGeom prst="rect">
-            <a:avLst/>
-          </a:prstGeom>
-          <a:noFill/>
-        </p:spPr>
-        <p:txBody>
-          <a:bodyPr wrap="square" anchor="t" lIns="0" rIns="0" tIns="0" bIns="0">
-            <a:spAutoFit/>
-          </a:bodyPr>
-          <a:lstStyle/>
-          <a:p>
-            <a:pPr algn="l"/>
-            <a:r>
-              <a:rPr sz="4000" b="0" i="0">
-                <a:solidFill>
-                  <a:srgbClr val="FFFFFF"/>
-                </a:solidFill>
-                <a:latin typeface="Georgia"/>
-              </a:rPr>
-              <a:t>The ask</a:t>
-            </a:r>
-          </a:p>
-        </p:txBody>
-      </p:sp>
-      <p:sp>
-        <p:nvSpPr>
-          <p:cNvPr id="9" name="TextBox 8"/>
-          <p:cNvSpPr txBox="1"/>
-          <p:nvPr/>
-        </p:nvSpPr>
-        <p:spPr>
-          <a:xfrm>
-            <a:off x="731519" y="3520440"/>
-            <a:ext cx="9509760" cy="284226"/>
-          </a:xfrm>
-          <a:prstGeom prst="rect">
-            <a:avLst/>
-          </a:prstGeom>
-          <a:noFill/>
-        </p:spPr>
-        <p:txBody>
-          <a:bodyPr wrap="square" anchor="t" lIns="0" rIns="0" tIns="0" bIns="0">
-            <a:spAutoFit/>
-          </a:bodyPr>
-          <a:lstStyle/>
-          <a:p>
-            <a:pPr algn="l"/>
-            <a:r>
-              <a:rPr sz="1500" b="0" i="0">
-                <a:solidFill>
-                  <a:srgbClr val="E4E1F1"/>
-                </a:solidFill>
-                <a:latin typeface="Calibri"/>
-              </a:rPr>
-              <a:t>A second Kalpa COO has Meera's problem, in a business with its own words.</a:t>
-            </a:r>
-          </a:p>
-        </p:txBody>
-      </p:sp>
-      <p:sp>
-        <p:nvSpPr>
-          <p:cNvPr id="10" name="Rounded Rectangle 9"/>
-          <p:cNvSpPr/>
-          <p:nvPr/>
-        </p:nvSpPr>
-        <p:spPr>
-          <a:xfrm>
-            <a:off x="731519" y="5074920"/>
-            <a:ext cx="780271" cy="310896"/>
-          </a:xfrm>
-          <a:prstGeom prst="roundRect">
-            <a:avLst>
-              <a:gd name="adj" fmla="val 50000"/>
-            </a:avLst>
-          </a:prstGeom>
-          <a:solidFill>
-            <a:srgbClr val="D9A7FF"/>
-          </a:solidFill>
-          <a:ln>
-            <a:noFill/>
-          </a:ln>
-          <a:effectLst/>
-        </p:spPr>
-        <p:style>
-          <a:lnRef idx="1">
-            <a:schemeClr val="accent1"/>
-          </a:lnRef>
-          <a:fillRef idx="3">
-            <a:schemeClr val="accent1"/>
-          </a:fillRef>
-          <a:effectRef idx="2">
-            <a:schemeClr val="accent1"/>
-          </a:effectRef>
-          <a:fontRef idx="minor">
-            <a:schemeClr val="lt1"/>
-          </a:fontRef>
-        </p:style>
-        <p:txBody>
-          <a:bodyPr rtlCol="0" anchor="ctr" wrap="none" lIns="25400" rIns="25400" tIns="0" bIns="0"/>
-          <a:lstStyle/>
-          <a:p>
-            <a:pPr algn="ctr"/>
-            <a:r>
-              <a:rPr sz="850" b="1">
-                <a:solidFill>
-                  <a:srgbClr val="1A0F5C"/>
-                </a:solidFill>
-                <a:latin typeface="Calibri"/>
-              </a:rPr>
-              <a:t>The ask</a:t>
-            </a:r>
-          </a:p>
-        </p:txBody>
-      </p:sp>
-      <p:sp>
-        <p:nvSpPr>
-          <p:cNvPr id="11" name="Rounded Rectangle 10"/>
-          <p:cNvSpPr/>
-          <p:nvPr/>
-        </p:nvSpPr>
-        <p:spPr>
-          <a:xfrm>
-            <a:off x="1621519" y="5074920"/>
-            <a:ext cx="839487" cy="310896"/>
-          </a:xfrm>
-          <a:prstGeom prst="roundRect">
-            <a:avLst>
-              <a:gd name="adj" fmla="val 50000"/>
-            </a:avLst>
-          </a:prstGeom>
-          <a:noFill/>
-          <a:ln w="9525">
-            <a:solidFill>
-              <a:srgbClr val="CFC9EE"/>
-            </a:solidFill>
-          </a:ln>
-          <a:effectLst/>
-        </p:spPr>
-        <p:style>
-          <a:lnRef idx="1">
-            <a:schemeClr val="accent1"/>
-          </a:lnRef>
-          <a:fillRef idx="3">
-            <a:schemeClr val="accent1"/>
-          </a:fillRef>
-          <a:effectRef idx="2">
-            <a:schemeClr val="accent1"/>
-          </a:effectRef>
-          <a:fontRef idx="minor">
-            <a:schemeClr val="lt1"/>
-          </a:fontRef>
-        </p:style>
-        <p:txBody>
-          <a:bodyPr rtlCol="0" anchor="ctr" wrap="none" lIns="25400" rIns="25400" tIns="0" bIns="0"/>
-          <a:lstStyle/>
-          <a:p>
-            <a:pPr algn="ctr"/>
-            <a:r>
-              <a:rPr sz="850" b="0">
-                <a:solidFill>
-                  <a:srgbClr val="CFC9EE"/>
-                </a:solidFill>
-                <a:latin typeface="Calibri"/>
-              </a:rPr>
-              <a:t>The week</a:t>
-            </a:r>
-          </a:p>
-        </p:txBody>
-      </p:sp>
-      <p:sp>
-        <p:nvSpPr>
-          <p:cNvPr id="12" name="Rounded Rectangle 11"/>
-          <p:cNvSpPr/>
-          <p:nvPr/>
-        </p:nvSpPr>
-        <p:spPr>
-          <a:xfrm>
-            <a:off x="2570735" y="5074920"/>
-            <a:ext cx="1905375" cy="310896"/>
-          </a:xfrm>
-          <a:prstGeom prst="roundRect">
-            <a:avLst>
-              <a:gd name="adj" fmla="val 50000"/>
-            </a:avLst>
-          </a:prstGeom>
-          <a:noFill/>
-          <a:ln w="9525">
-            <a:solidFill>
-              <a:srgbClr val="CFC9EE"/>
-            </a:solidFill>
-          </a:ln>
-          <a:effectLst/>
-        </p:spPr>
-        <p:style>
-          <a:lnRef idx="1">
-            <a:schemeClr val="accent1"/>
-          </a:lnRef>
-          <a:fillRef idx="3">
-            <a:schemeClr val="accent1"/>
-          </a:fillRef>
-          <a:effectRef idx="2">
-            <a:schemeClr val="accent1"/>
-          </a:effectRef>
-          <a:fontRef idx="minor">
-            <a:schemeClr val="lt1"/>
-          </a:fontRef>
-        </p:style>
-        <p:txBody>
-          <a:bodyPr rtlCol="0" anchor="ctr" wrap="none" lIns="25400" rIns="25400" tIns="0" bIns="0"/>
-          <a:lstStyle/>
-          <a:p>
-            <a:pPr algn="ctr"/>
-            <a:r>
-              <a:rPr sz="850" b="0">
-                <a:solidFill>
-                  <a:srgbClr val="CFC9EE"/>
-                </a:solidFill>
-                <a:latin typeface="Calibri"/>
-              </a:rPr>
-              <a:t>The method you already own</a:t>
-            </a:r>
-          </a:p>
-        </p:txBody>
-      </p:sp>
-      <p:sp>
-        <p:nvSpPr>
-          <p:cNvPr id="13" name="TextBox 12"/>
-          <p:cNvSpPr txBox="1"/>
-          <p:nvPr/>
-        </p:nvSpPr>
-        <p:spPr>
-          <a:xfrm>
-            <a:off x="530352" y="6437376"/>
-            <a:ext cx="9667951" cy="160401"/>
-          </a:xfrm>
-          <a:prstGeom prst="rect">
-            <a:avLst/>
-          </a:prstGeom>
-          <a:noFill/>
-        </p:spPr>
-        <p:txBody>
-          <a:bodyPr wrap="square" anchor="t" lIns="0" rIns="0" tIns="0" bIns="0">
-            <a:spAutoFit/>
-          </a:bodyPr>
-          <a:lstStyle/>
-          <a:p>
-            <a:pPr algn="l"/>
-            <a:r>
-              <a:rPr sz="750" b="0" i="0">
-                <a:solidFill>
-                  <a:srgbClr val="CFC9EE"/>
-                </a:solidFill>
-                <a:latin typeface="Calibri"/>
-              </a:rPr>
-              <a:t>Week 3 Day 1: Build 1 opens in Kalpa Health</a:t>
-            </a:r>
-          </a:p>
-        </p:txBody>
-      </p:sp>
-      <p:sp>
-        <p:nvSpPr>
-          <p:cNvPr id="14" name="TextBox 13"/>
-          <p:cNvSpPr txBox="1"/>
-          <p:nvPr/>
-        </p:nvSpPr>
-        <p:spPr>
-          <a:xfrm>
-            <a:off x="10198303" y="6437376"/>
-            <a:ext cx="1463040" cy="160401"/>
-          </a:xfrm>
-          <a:prstGeom prst="rect">
-            <a:avLst/>
-          </a:prstGeom>
-          <a:noFill/>
-        </p:spPr>
-        <p:txBody>
-          <a:bodyPr wrap="square" anchor="t" lIns="0" rIns="0" tIns="0" bIns="0">
-            <a:spAutoFit/>
-          </a:bodyPr>
-          <a:lstStyle/>
-          <a:p>
-            <a:pPr algn="r"/>
-            <a:r>
-              <a:rPr sz="750" b="0" i="0">
-                <a:solidFill>
-                  <a:srgbClr val="CFC9EE"/>
-                </a:solidFill>
-                <a:latin typeface="Calibri"/>
-              </a:rPr>
-              <a:t>2 / 21</a:t>
-            </a:r>
-          </a:p>
-        </p:txBody>
-      </p:sp>
-    </p:spTree>
-  </p:cSld>
-  <p:clrMapOvr>
-    <a:masterClrMapping/>
-  </p:clrMapOvr>
-</p:sld>
-</file>
-
-<file path=ppt/slides/slide20.xml><?xml version="1.0" encoding="utf-8"?>
+<file path=ppt/slides/slide23.xml><?xml version="1.0" encoding="utf-8"?>
 <p:sld xmlns:a="http://schemas.openxmlformats.org/drawingml/2006/main" xmlns:p="http://schemas.openxmlformats.org/presentationml/2006/main" xmlns:r="http://schemas.openxmlformats.org/officeDocument/2006/relationships">
   <p:cSld>
     <p:spTree>
@@ -17368,7 +21095,7 @@
                 </a:solidFill>
                 <a:latin typeface="Calibri"/>
               </a:rPr>
-              <a:t>S16  ·  20 / 21</a:t>
+              <a:t>S16  ·  23 / 24</a:t>
             </a:r>
           </a:p>
         </p:txBody>
@@ -17381,7 +21108,7 @@
 </p:sld>
 </file>
 
-<file path=ppt/slides/slide21.xml><?xml version="1.0" encoding="utf-8"?>
+<file path=ppt/slides/slide24.xml><?xml version="1.0" encoding="utf-8"?>
 <p:sld xmlns:a="http://schemas.openxmlformats.org/drawingml/2006/main" xmlns:p="http://schemas.openxmlformats.org/presentationml/2006/main" xmlns:r="http://schemas.openxmlformats.org/officeDocument/2006/relationships">
   <p:cSld>
     <p:spTree>
@@ -17574,7 +21301,7 @@
                 </a:solidFill>
                 <a:latin typeface="Georgia"/>
               </a:rPr>
-              <a:t>The close, and the next checkpoint</a:t>
+              <a:t>The close, and Wednesday's checkpoint</a:t>
             </a:r>
           </a:p>
         </p:txBody>
@@ -17609,7 +21336,7 @@
                 </a:solidFill>
                 <a:latin typeface="Calibri"/>
               </a:rPr>
-              <a:t>Scopes pinned today; three checkpoint questions per group next build day.</a:t>
+              <a:t>Scopes pinned today; three checkpoint questions per group on Wednesday 21 October.</a:t>
             </a:r>
           </a:p>
         </p:txBody>
@@ -17787,7 +21514,7 @@
                           </a:solidFill>
                           <a:latin typeface="Calibri"/>
                         </a:rPr>
-                        <a:t>Next build day, 30 min</a:t>
+                        <a:t>Wednesday 21 October, 30 min</a:t>
                       </a:r>
                     </a:p>
                   </a:txBody>
@@ -17833,7 +21560,7 @@
                           </a:solidFill>
                           <a:latin typeface="Calibri"/>
                         </a:rPr>
-                        <a:t>Next build day, 20 min</a:t>
+                        <a:t>Wednesday 21 October, 20 min</a:t>
                       </a:r>
                     </a:p>
                   </a:txBody>
@@ -18328,7 +22055,7 @@
                 </a:solidFill>
                 <a:latin typeface="Calibri"/>
               </a:rPr>
-              <a:t>S17  ·  21 / 21</a:t>
+              <a:t>S17  ·  24 / 24</a:t>
             </a:r>
           </a:p>
         </p:txBody>
@@ -20124,7 +23851,7 @@
                 </a:solidFill>
                 <a:latin typeface="Calibri"/>
               </a:rPr>
-              <a:t>S1  ·  3 / 21</a:t>
+              <a:t>S1  ·  3 / 24</a:t>
             </a:r>
           </a:p>
         </p:txBody>
@@ -21136,7 +24863,7 @@
                 </a:solidFill>
                 <a:latin typeface="Calibri"/>
               </a:rPr>
-              <a:t>S2  ·  4 / 21</a:t>
+              <a:t>S2  ·  4 / 24</a:t>
             </a:r>
           </a:p>
         </p:txBody>
@@ -21810,7 +25537,7 @@
                 </a:solidFill>
                 <a:latin typeface="Calibri"/>
               </a:rPr>
-              <a:t>S3  ·  5 / 21</a:t>
+              <a:t>S3  ·  5 / 24</a:t>
             </a:r>
           </a:p>
         </p:txBody>
@@ -23004,7 +26731,7 @@
                 </a:solidFill>
                 <a:latin typeface="Calibri"/>
               </a:rPr>
-              <a:t>S4  ·  6 / 21</a:t>
+              <a:t>S4  ·  6 / 24</a:t>
             </a:r>
           </a:p>
         </p:txBody>
@@ -23259,7 +26986,7 @@
         <p:spPr>
           <a:xfrm>
             <a:off x="731519" y="3520440"/>
-            <a:ext cx="9509760" cy="284226"/>
+            <a:ext cx="9509760" cy="531876"/>
           </a:xfrm>
           <a:prstGeom prst="rect">
             <a:avLst/>
@@ -23280,7 +27007,7 @@
                 </a:solidFill>
                 <a:latin typeface="Calibri"/>
               </a:rPr>
-              <a:t>Five sub-problems, groups of four, and six days that end in front of a panel.</a:t>
+              <a:t>Five sub-problems, groups of four, and a week that ends in front of a panel on Saturday 24 October.</a:t>
             </a:r>
           </a:p>
         </p:txBody>
@@ -23480,7 +27207,7 @@
                 </a:solidFill>
                 <a:latin typeface="Calibri"/>
               </a:rPr>
-              <a:t>Week 3 Day 1: Build 1 opens in Kalpa Health</a:t>
+              <a:t>Week 3, Day 1. Build 1: Kalpa Health</a:t>
             </a:r>
           </a:p>
         </p:txBody>
@@ -23515,7 +27242,7 @@
                 </a:solidFill>
                 <a:latin typeface="Calibri"/>
               </a:rPr>
-              <a:t>7 / 21</a:t>
+              <a:t>7 / 24</a:t>
             </a:r>
           </a:p>
         </p:txBody>
@@ -25163,7 +28890,7 @@
                 </a:solidFill>
                 <a:latin typeface="Calibri"/>
               </a:rPr>
-              <a:t>S5  ·  8 / 21</a:t>
+              <a:t>S5  ·  8 / 24</a:t>
             </a:r>
           </a:p>
         </p:txBody>
@@ -26311,7 +30038,7 @@
                 </a:solidFill>
                 <a:latin typeface="Calibri"/>
               </a:rPr>
-              <a:t>S6  ·  9 / 21</a:t>
+              <a:t>S6  ·  9 / 24</a:t>
             </a:r>
           </a:p>
         </p:txBody>

--- a/content/W03/D1/slides/C2_W03_D01_introduction_STUDENT.pptx
+++ b/content/W03/D1/slides/C2_W03_D01_introduction_STUDENT.pptx
@@ -715,7 +715,7 @@
           </a:p>
           <a:p>
             <a:r>
-              <a:t>a phlebotomist does, what a package is) and will not answer a method question with the method.</a:t>
+              <a:t>a phlebotomist does, what a panel is) and will not answer a method question with the method.</a:t>
             </a:r>
           </a:p>
           <a:p>
@@ -1975,7 +1975,7 @@
           </a:p>
           <a:p>
             <a:r>
-              <a:t>Q1 is April to June and Q2 is July to September, Kalpa Health's financial year. Ask the room which of</a:t>
+              <a:t>Q2 is April to June and Q3 is July to September, the calendar quarters Kalpa Health reports in. Ask the room which of</a:t>
             </a:r>
           </a:p>
           <a:p>
@@ -10390,14 +10390,53 @@
       </p:sp>
       <p:sp>
         <p:nvSpPr>
-          <p:cNvPr id="9" name="Rounded Rectangle 8"/>
+          <p:cNvPr id="9" name="TextBox 8"/>
+          <p:cNvSpPr txBox="1"/>
+          <p:nvPr/>
+        </p:nvSpPr>
+        <p:spPr>
+          <a:xfrm>
+            <a:off x="530352" y="1682496"/>
+            <a:ext cx="11130991" cy="409448"/>
+          </a:xfrm>
+          <a:prstGeom prst="rect">
+            <a:avLst/>
+          </a:prstGeom>
+          <a:noFill/>
+        </p:spPr>
+        <p:txBody>
+          <a:bodyPr wrap="square" anchor="t" lIns="0" rIns="0" tIns="0" bIns="0">
+            <a:spAutoFit/>
+          </a:bodyPr>
+          <a:lstStyle/>
+          <a:p>
+            <a:pPr>
+              <a:spcAft>
+                <a:spcPts val="500"/>
+              </a:spcAft>
+            </a:pPr>
+            <a:r>
+              <a:rPr sz="1100" b="0" i="0">
+                <a:solidFill>
+                  <a:srgbClr val="1A1440"/>
+                </a:solidFill>
+                <a:latin typeface="Calibri"/>
+              </a:rPr>
+              <a:t>&lt;!-- sync:rubric:W03/mini-project --&gt;</a:t>
+            </a:r>
+          </a:p>
+        </p:txBody>
+      </p:sp>
+      <p:sp>
+        <p:nvSpPr>
+          <p:cNvPr id="10" name="Rounded Rectangle 9"/>
           <p:cNvSpPr/>
           <p:nvPr/>
         </p:nvSpPr>
         <p:spPr>
           <a:xfrm>
-            <a:off x="530352" y="1682496"/>
-            <a:ext cx="11130991" cy="736600"/>
+            <a:off x="530352" y="2219960"/>
+            <a:ext cx="11130991" cy="629920"/>
           </a:xfrm>
           <a:prstGeom prst="roundRect">
             <a:avLst>
@@ -10438,14 +10477,14 @@
       </p:sp>
       <p:sp>
         <p:nvSpPr>
-          <p:cNvPr id="10" name="Rounded Rectangle 9"/>
+          <p:cNvPr id="11" name="Rounded Rectangle 10"/>
           <p:cNvSpPr/>
           <p:nvPr/>
         </p:nvSpPr>
         <p:spPr>
           <a:xfrm>
-            <a:off x="676656" y="1810512"/>
-            <a:ext cx="45720" cy="480568"/>
+            <a:off x="676656" y="2347976"/>
+            <a:ext cx="45720" cy="373888"/>
           </a:xfrm>
           <a:prstGeom prst="roundRect">
             <a:avLst>
@@ -10484,14 +10523,14 @@
       </p:sp>
       <p:sp>
         <p:nvSpPr>
-          <p:cNvPr id="11" name="TextBox 10"/>
-          <p:cNvSpPr txBox="1"/>
-          <p:nvPr/>
-        </p:nvSpPr>
-        <p:spPr>
-          <a:xfrm>
-            <a:off x="877824" y="1801368"/>
-            <a:ext cx="10564063" cy="553720"/>
+          <p:cNvPr id="12" name="TextBox 11"/>
+          <p:cNvSpPr txBox="1"/>
+          <p:nvPr/>
+        </p:nvSpPr>
+        <p:spPr>
+          <a:xfrm>
+            <a:off x="877824" y="2338832"/>
+            <a:ext cx="10564063" cy="447040"/>
           </a:xfrm>
           <a:prstGeom prst="rect">
             <a:avLst/>
@@ -10505,7 +10544,7 @@
           <a:lstStyle/>
           <a:p>
             <a:r>
-              <a:rPr sz="1300" b="1">
+              <a:rPr sz="1000" b="1">
                 <a:solidFill>
                   <a:srgbClr val="5B3FD6"/>
                 </a:solidFill>
@@ -10514,7 +10553,7 @@
               <a:t>Mini project, 40 marks. </a:t>
             </a:r>
             <a:r>
-              <a:rPr sz="1300" b="0" i="0">
+              <a:rPr sz="1000" b="0" i="0">
                 <a:solidFill>
                   <a:srgbClr val="1A1440"/>
                 </a:solidFill>
@@ -10527,15 +10566,15 @@
       </p:sp>
       <p:graphicFrame>
         <p:nvGraphicFramePr>
-          <p:cNvPr id="12" name="Table 11"/>
+          <p:cNvPr id="13" name="Table 12"/>
           <p:cNvGraphicFramePr>
             <a:graphicFrameLocks noGrp="1"/>
           </p:cNvGraphicFramePr>
           <p:nvPr/>
         </p:nvGraphicFramePr>
         <p:xfrm>
-          <a:off x="530352" y="2583688"/>
-          <a:ext cx="11130990" cy="2478024"/>
+          <a:off x="530352" y="3014472"/>
+          <a:ext cx="11130991" cy="2121408"/>
         </p:xfrm>
         <a:graphic>
           <a:graphicData uri="http://schemas.openxmlformats.org/drawingml/2006/table">
@@ -10544,18 +10583,18 @@
                 <a:tableStyleId>{2D5ABB26-0587-4C30-8999-92F81FD0307C}</a:tableStyleId>
               </a:tblPr>
               <a:tblGrid>
-                <a:gridCol w="2886034"/>
+                <a:gridCol w="2388579"/>
                 <a:gridCol w="914400"/>
-                <a:gridCol w="7330556"/>
+                <a:gridCol w="7828012"/>
               </a:tblGrid>
-              <a:tr h="318008">
+              <a:tr h="310896">
                 <a:tc>
                   <a:txBody>
                     <a:bodyPr/>
                     <a:lstStyle/>
                     <a:p>
                       <a:r>
-                        <a:rPr sz="1150" b="1" i="0">
+                        <a:rPr sz="950" b="1" i="0">
                           <a:solidFill>
                             <a:srgbClr val="FFFFFF"/>
                           </a:solidFill>
@@ -10577,7 +10616,7 @@
                     <a:lstStyle/>
                     <a:p>
                       <a:r>
-                        <a:rPr sz="1150" b="1" i="0">
+                        <a:rPr sz="950" b="1" i="0">
                           <a:solidFill>
                             <a:srgbClr val="FFFFFF"/>
                           </a:solidFill>
@@ -10599,7 +10638,7 @@
                     <a:lstStyle/>
                     <a:p>
                       <a:r>
-                        <a:rPr sz="1150" b="1" i="0">
+                        <a:rPr sz="950" b="1" i="0">
                           <a:solidFill>
                             <a:srgbClr val="FFFFFF"/>
                           </a:solidFill>
@@ -10616,14 +10655,14 @@
                   </a:tcPr>
                 </a:tc>
               </a:tr>
-              <a:tr h="508000">
+              <a:tr h="310896">
                 <a:tc>
                   <a:txBody>
                     <a:bodyPr/>
                     <a:lstStyle/>
                     <a:p>
                       <a:r>
-                        <a:rPr sz="1100" b="0" i="0">
+                        <a:rPr sz="900" b="0" i="0">
                           <a:solidFill>
                             <a:srgbClr val="1A1440"/>
                           </a:solidFill>
@@ -10645,7 +10684,7 @@
                     <a:lstStyle/>
                     <a:p>
                       <a:r>
-                        <a:rPr sz="1100" b="0" i="0">
+                        <a:rPr sz="900" b="0" i="0">
                           <a:solidFill>
                             <a:srgbClr val="1A1440"/>
                           </a:solidFill>
@@ -10667,7 +10706,7 @@
                     <a:lstStyle/>
                     <a:p>
                       <a:r>
-                        <a:rPr sz="1100" b="0" i="0">
+                        <a:rPr sz="900" b="0" i="0">
                           <a:solidFill>
                             <a:srgbClr val="1A1440"/>
                           </a:solidFill>
@@ -10684,14 +10723,14 @@
                   </a:tcPr>
                 </a:tc>
               </a:tr>
-              <a:tr h="508000">
+              <a:tr h="438912">
                 <a:tc>
                   <a:txBody>
                     <a:bodyPr/>
                     <a:lstStyle/>
                     <a:p>
                       <a:r>
-                        <a:rPr sz="1100" b="0" i="0">
+                        <a:rPr sz="900" b="0" i="0">
                           <a:solidFill>
                             <a:srgbClr val="1A1440"/>
                           </a:solidFill>
@@ -10713,7 +10752,7 @@
                     <a:lstStyle/>
                     <a:p>
                       <a:r>
-                        <a:rPr sz="1100" b="0" i="0">
+                        <a:rPr sz="900" b="0" i="0">
                           <a:solidFill>
                             <a:srgbClr val="1A1440"/>
                           </a:solidFill>
@@ -10735,13 +10774,13 @@
                     <a:lstStyle/>
                     <a:p>
                       <a:r>
-                        <a:rPr sz="1100" b="0" i="0">
+                        <a:rPr sz="900" b="0" i="0">
                           <a:solidFill>
                             <a:srgbClr val="1A1440"/>
                           </a:solidFill>
                           <a:latin typeface="Calibri"/>
                         </a:rPr>
-                        <a:t>The data is profiled before it is touched, every cleaning call is in the decisions log with its reason, and counts and rupees reconcile across files.</a:t>
+                        <a:t>The data is profiled before it is touched, every cleaning call is in the decisions log with its reason, and counts and dollars reconcile across files.</a:t>
                       </a:r>
                     </a:p>
                   </a:txBody>
@@ -10752,14 +10791,14 @@
                   </a:tcPr>
                 </a:tc>
               </a:tr>
-              <a:tr h="508000">
+              <a:tr h="438912">
                 <a:tc>
                   <a:txBody>
                     <a:bodyPr/>
                     <a:lstStyle/>
                     <a:p>
                       <a:r>
-                        <a:rPr sz="1100" b="0" i="0">
+                        <a:rPr sz="900" b="0" i="0">
                           <a:solidFill>
                             <a:srgbClr val="1A1440"/>
                           </a:solidFill>
@@ -10781,7 +10820,7 @@
                     <a:lstStyle/>
                     <a:p>
                       <a:r>
-                        <a:rPr sz="1100" b="0" i="0">
+                        <a:rPr sz="900" b="0" i="0">
                           <a:solidFill>
                             <a:srgbClr val="1A1440"/>
                           </a:solidFill>
@@ -10803,7 +10842,7 @@
                     <a:lstStyle/>
                     <a:p>
                       <a:r>
-                        <a:rPr sz="1100" b="0" i="0">
+                        <a:rPr sz="900" b="0" i="0">
                           <a:solidFill>
                             <a:srgbClr val="1A1440"/>
                           </a:solidFill>
@@ -10820,14 +10859,14 @@
                   </a:tcPr>
                 </a:tc>
               </a:tr>
-              <a:tr h="318008">
+              <a:tr h="310896">
                 <a:tc>
                   <a:txBody>
                     <a:bodyPr/>
                     <a:lstStyle/>
                     <a:p>
                       <a:r>
-                        <a:rPr sz="1100" b="0" i="0">
+                        <a:rPr sz="900" b="0" i="0">
                           <a:solidFill>
                             <a:srgbClr val="1A1440"/>
                           </a:solidFill>
@@ -10849,7 +10888,7 @@
                     <a:lstStyle/>
                     <a:p>
                       <a:r>
-                        <a:rPr sz="1100" b="0" i="0">
+                        <a:rPr sz="900" b="0" i="0">
                           <a:solidFill>
                             <a:srgbClr val="1A1440"/>
                           </a:solidFill>
@@ -10871,7 +10910,7 @@
                     <a:lstStyle/>
                     <a:p>
                       <a:r>
-                        <a:rPr sz="1100" b="0" i="0">
+                        <a:rPr sz="900" b="0" i="0">
                           <a:solidFill>
                             <a:srgbClr val="1A1440"/>
                           </a:solidFill>
@@ -10888,14 +10927,14 @@
                   </a:tcPr>
                 </a:tc>
               </a:tr>
-              <a:tr h="318008">
+              <a:tr h="310896">
                 <a:tc>
                   <a:txBody>
                     <a:bodyPr/>
                     <a:lstStyle/>
                     <a:p>
                       <a:r>
-                        <a:rPr sz="1100" b="0" i="0">
+                        <a:rPr sz="900" b="0" i="0">
                           <a:solidFill>
                             <a:srgbClr val="1A1440"/>
                           </a:solidFill>
@@ -10917,7 +10956,7 @@
                     <a:lstStyle/>
                     <a:p>
                       <a:r>
-                        <a:rPr sz="1100" b="0" i="0">
+                        <a:rPr sz="900" b="0" i="0">
                           <a:solidFill>
                             <a:srgbClr val="1A1440"/>
                           </a:solidFill>
@@ -10939,7 +10978,7 @@
                     <a:lstStyle/>
                     <a:p>
                       <a:r>
-                        <a:rPr sz="1100" b="0" i="0">
+                        <a:rPr sz="900" b="0" i="0">
                           <a:solidFill>
                             <a:srgbClr val="1A1440"/>
                           </a:solidFill>
@@ -10962,14 +11001,14 @@
       </p:graphicFrame>
       <p:sp>
         <p:nvSpPr>
-          <p:cNvPr id="13" name="TextBox 12"/>
-          <p:cNvSpPr txBox="1"/>
-          <p:nvPr/>
-        </p:nvSpPr>
-        <p:spPr>
-          <a:xfrm>
-            <a:off x="530352" y="5317744"/>
-            <a:ext cx="11130991" cy="703072"/>
+          <p:cNvPr id="14" name="TextBox 13"/>
+          <p:cNvSpPr txBox="1"/>
+          <p:nvPr/>
+        </p:nvSpPr>
+        <p:spPr>
+          <a:xfrm>
+            <a:off x="530352" y="5391912"/>
+            <a:ext cx="11130991" cy="709168"/>
           </a:xfrm>
           <a:prstGeom prst="rect">
             <a:avLst/>
@@ -10984,16 +11023,32 @@
           <a:p>
             <a:pPr>
               <a:spcAft>
-                <a:spcPts val="700"/>
+                <a:spcPts val="500"/>
               </a:spcAft>
             </a:pPr>
             <a:r>
-              <a:rPr sz="1400" b="0" i="0">
+              <a:rPr sz="1100" b="0" i="0">
                 <a:solidFill>
                   <a:srgbClr val="1A1440"/>
                 </a:solidFill>
                 <a:latin typeface="Calibri"/>
               </a:rPr>
+              <a:t>&lt;!-- /sync:rubric:W03/mini-project --&gt;</a:t>
+            </a:r>
+          </a:p>
+          <a:p>
+            <a:pPr>
+              <a:spcAft>
+                <a:spcPts val="500"/>
+              </a:spcAft>
+            </a:pPr>
+            <a:r>
+              <a:rPr sz="1100" b="0" i="0">
+                <a:solidFill>
+                  <a:srgbClr val="1A1440"/>
+                </a:solidFill>
+                <a:latin typeface="Calibri"/>
+              </a:rPr>
               <a:t>The presentations run on Friday 23 October where the roster allows and on Saturday 24 October, when every Build 1 grade closes.</a:t>
             </a:r>
           </a:p>
@@ -11001,7 +11056,7 @@
       </p:sp>
       <p:sp>
         <p:nvSpPr>
-          <p:cNvPr id="14" name="Oval 13"/>
+          <p:cNvPr id="15" name="Oval 14"/>
           <p:cNvSpPr/>
           <p:nvPr/>
         </p:nvSpPr>
@@ -11045,7 +11100,7 @@
       </p:sp>
       <p:sp>
         <p:nvSpPr>
-          <p:cNvPr id="15" name="TextBox 14"/>
+          <p:cNvPr id="16" name="TextBox 15"/>
           <p:cNvSpPr txBox="1"/>
           <p:nvPr/>
         </p:nvSpPr>
@@ -11080,7 +11135,7 @@
       </p:sp>
       <p:sp>
         <p:nvSpPr>
-          <p:cNvPr id="16" name="Oval 15"/>
+          <p:cNvPr id="17" name="Oval 16"/>
           <p:cNvSpPr/>
           <p:nvPr/>
         </p:nvSpPr>
@@ -11124,7 +11179,7 @@
       </p:sp>
       <p:sp>
         <p:nvSpPr>
-          <p:cNvPr id="17" name="TextBox 16"/>
+          <p:cNvPr id="18" name="TextBox 17"/>
           <p:cNvSpPr txBox="1"/>
           <p:nvPr/>
         </p:nvSpPr>
@@ -11159,7 +11214,7 @@
       </p:sp>
       <p:sp>
         <p:nvSpPr>
-          <p:cNvPr id="18" name="Oval 17"/>
+          <p:cNvPr id="19" name="Oval 18"/>
           <p:cNvSpPr/>
           <p:nvPr/>
         </p:nvSpPr>
@@ -11203,7 +11258,7 @@
       </p:sp>
       <p:sp>
         <p:nvSpPr>
-          <p:cNvPr id="19" name="TextBox 18"/>
+          <p:cNvPr id="20" name="TextBox 19"/>
           <p:cNvSpPr txBox="1"/>
           <p:nvPr/>
         </p:nvSpPr>
@@ -11238,7 +11293,7 @@
       </p:sp>
       <p:sp>
         <p:nvSpPr>
-          <p:cNvPr id="20" name="TextBox 19"/>
+          <p:cNvPr id="21" name="TextBox 20"/>
           <p:cNvSpPr txBox="1"/>
           <p:nvPr/>
         </p:nvSpPr>
@@ -11514,14 +11569,53 @@
       </p:sp>
       <p:sp>
         <p:nvSpPr>
-          <p:cNvPr id="9" name="Rounded Rectangle 8"/>
+          <p:cNvPr id="9" name="TextBox 8"/>
+          <p:cNvSpPr txBox="1"/>
+          <p:nvPr/>
+        </p:nvSpPr>
+        <p:spPr>
+          <a:xfrm>
+            <a:off x="530352" y="1682496"/>
+            <a:ext cx="5291175" cy="495807"/>
+          </a:xfrm>
+          <a:prstGeom prst="rect">
+            <a:avLst/>
+          </a:prstGeom>
+          <a:noFill/>
+        </p:spPr>
+        <p:txBody>
+          <a:bodyPr wrap="square" anchor="t" lIns="0" rIns="0" tIns="0" bIns="0">
+            <a:spAutoFit/>
+          </a:bodyPr>
+          <a:lstStyle/>
+          <a:p>
+            <a:pPr>
+              <a:spcAft>
+                <a:spcPts val="800"/>
+              </a:spcAft>
+            </a:pPr>
+            <a:r>
+              <a:rPr sz="1600" b="0" i="0">
+                <a:solidFill>
+                  <a:srgbClr val="1A1440"/>
+                </a:solidFill>
+                <a:latin typeface="Calibri"/>
+              </a:rPr>
+              <a:t>&lt;!-- sync:rubric:W03/mock --&gt;</a:t>
+            </a:r>
+          </a:p>
+        </p:txBody>
+      </p:sp>
+      <p:sp>
+        <p:nvSpPr>
+          <p:cNvPr id="10" name="Rounded Rectangle 9"/>
           <p:cNvSpPr/>
           <p:nvPr/>
         </p:nvSpPr>
         <p:spPr>
           <a:xfrm>
-            <a:off x="530352" y="1682496"/>
-            <a:ext cx="11130991" cy="807720"/>
+            <a:off x="530352" y="2306320"/>
+            <a:ext cx="5291175" cy="1074420"/>
           </a:xfrm>
           <a:prstGeom prst="roundRect">
             <a:avLst>
@@ -11562,14 +11656,14 @@
       </p:sp>
       <p:sp>
         <p:nvSpPr>
-          <p:cNvPr id="10" name="Rounded Rectangle 9"/>
+          <p:cNvPr id="11" name="Rounded Rectangle 10"/>
           <p:cNvSpPr/>
           <p:nvPr/>
         </p:nvSpPr>
         <p:spPr>
           <a:xfrm>
-            <a:off x="676656" y="1810512"/>
-            <a:ext cx="45720" cy="551688"/>
+            <a:off x="676656" y="2434336"/>
+            <a:ext cx="45720" cy="818388"/>
           </a:xfrm>
           <a:prstGeom prst="roundRect">
             <a:avLst>
@@ -11608,14 +11702,14 @@
       </p:sp>
       <p:sp>
         <p:nvSpPr>
-          <p:cNvPr id="11" name="TextBox 10"/>
-          <p:cNvSpPr txBox="1"/>
-          <p:nvPr/>
-        </p:nvSpPr>
-        <p:spPr>
-          <a:xfrm>
-            <a:off x="877824" y="1801368"/>
-            <a:ext cx="10564063" cy="624840"/>
+          <p:cNvPr id="12" name="TextBox 11"/>
+          <p:cNvSpPr txBox="1"/>
+          <p:nvPr/>
+        </p:nvSpPr>
+        <p:spPr>
+          <a:xfrm>
+            <a:off x="877824" y="2425192"/>
+            <a:ext cx="4724247" cy="891540"/>
           </a:xfrm>
           <a:prstGeom prst="rect">
             <a:avLst/>
@@ -11651,15 +11745,15 @@
       </p:sp>
       <p:graphicFrame>
         <p:nvGraphicFramePr>
-          <p:cNvPr id="12" name="Table 11"/>
+          <p:cNvPr id="13" name="Table 12"/>
           <p:cNvGraphicFramePr>
             <a:graphicFrameLocks noGrp="1"/>
           </p:cNvGraphicFramePr>
           <p:nvPr/>
         </p:nvGraphicFramePr>
         <p:xfrm>
-          <a:off x="530352" y="2654808"/>
-          <a:ext cx="11130991" cy="2588768"/>
+          <a:off x="6370167" y="1682496"/>
+          <a:ext cx="5291175" cy="2916936"/>
         </p:xfrm>
         <a:graphic>
           <a:graphicData uri="http://schemas.openxmlformats.org/drawingml/2006/table">
@@ -11668,18 +11762,18 @@
                 <a:tableStyleId>{2D5ABB26-0587-4C30-8999-92F81FD0307C}</a:tableStyleId>
               </a:tblPr>
               <a:tblGrid>
-                <a:gridCol w="2047739"/>
-                <a:gridCol w="8168852"/>
+                <a:gridCol w="1459513"/>
+                <a:gridCol w="2917262"/>
                 <a:gridCol w="914400"/>
               </a:tblGrid>
-              <a:tr h="369824">
+              <a:tr h="352552">
                 <a:tc>
                   <a:txBody>
                     <a:bodyPr/>
                     <a:lstStyle/>
                     <a:p>
                       <a:r>
-                        <a:rPr sz="1450" b="1" i="0">
+                        <a:rPr sz="1350" b="1" i="0">
                           <a:solidFill>
                             <a:srgbClr val="FFFFFF"/>
                           </a:solidFill>
@@ -11701,7 +11795,7 @@
                     <a:lstStyle/>
                     <a:p>
                       <a:r>
-                        <a:rPr sz="1450" b="1" i="0">
+                        <a:rPr sz="1350" b="1" i="0">
                           <a:solidFill>
                             <a:srgbClr val="FFFFFF"/>
                           </a:solidFill>
@@ -11723,7 +11817,7 @@
                     <a:lstStyle/>
                     <a:p>
                       <a:r>
-                        <a:rPr sz="1450" b="1" i="0">
+                        <a:rPr sz="1350" b="1" i="0">
                           <a:solidFill>
                             <a:srgbClr val="FFFFFF"/>
                           </a:solidFill>
@@ -11740,14 +11834,14 @@
                   </a:tcPr>
                 </a:tc>
               </a:tr>
-              <a:tr h="369824">
+              <a:tr h="352552">
                 <a:tc>
                   <a:txBody>
                     <a:bodyPr/>
                     <a:lstStyle/>
                     <a:p>
                       <a:r>
-                        <a:rPr sz="1400" b="0" i="0">
+                        <a:rPr sz="1300" b="0" i="0">
                           <a:solidFill>
                             <a:srgbClr val="1A1440"/>
                           </a:solidFill>
@@ -11769,7 +11863,7 @@
                     <a:lstStyle/>
                     <a:p>
                       <a:r>
-                        <a:rPr sz="1400" b="0" i="0">
+                        <a:rPr sz="1300" b="0" i="0">
                           <a:solidFill>
                             <a:srgbClr val="1A1440"/>
                           </a:solidFill>
@@ -11791,7 +11885,7 @@
                     <a:lstStyle/>
                     <a:p>
                       <a:r>
-                        <a:rPr sz="1400" b="0" i="0">
+                        <a:rPr sz="1300" b="0" i="0">
                           <a:solidFill>
                             <a:srgbClr val="1A1440"/>
                           </a:solidFill>
@@ -11808,14 +11902,14 @@
                   </a:tcPr>
                 </a:tc>
               </a:tr>
-              <a:tr h="369824">
+              <a:tr h="352552">
                 <a:tc>
                   <a:txBody>
                     <a:bodyPr/>
                     <a:lstStyle/>
                     <a:p>
                       <a:r>
-                        <a:rPr sz="1400" b="0" i="0">
+                        <a:rPr sz="1300" b="0" i="0">
                           <a:solidFill>
                             <a:srgbClr val="1A1440"/>
                           </a:solidFill>
@@ -11837,7 +11931,7 @@
                     <a:lstStyle/>
                     <a:p>
                       <a:r>
-                        <a:rPr sz="1400" b="0" i="0">
+                        <a:rPr sz="1300" b="0" i="0">
                           <a:solidFill>
                             <a:srgbClr val="1A1440"/>
                           </a:solidFill>
@@ -11859,7 +11953,7 @@
                     <a:lstStyle/>
                     <a:p>
                       <a:r>
-                        <a:rPr sz="1400" b="0" i="0">
+                        <a:rPr sz="1300" b="0" i="0">
                           <a:solidFill>
                             <a:srgbClr val="1A1440"/>
                           </a:solidFill>
@@ -11876,14 +11970,14 @@
                   </a:tcPr>
                 </a:tc>
               </a:tr>
-              <a:tr h="369824">
+              <a:tr h="352552">
                 <a:tc>
                   <a:txBody>
                     <a:bodyPr/>
                     <a:lstStyle/>
                     <a:p>
                       <a:r>
-                        <a:rPr sz="1400" b="0" i="0">
+                        <a:rPr sz="1300" b="0" i="0">
                           <a:solidFill>
                             <a:srgbClr val="1A1440"/>
                           </a:solidFill>
@@ -11905,7 +11999,7 @@
                     <a:lstStyle/>
                     <a:p>
                       <a:r>
-                        <a:rPr sz="1400" b="0" i="0">
+                        <a:rPr sz="1300" b="0" i="0">
                           <a:solidFill>
                             <a:srgbClr val="1A1440"/>
                           </a:solidFill>
@@ -11927,7 +12021,7 @@
                     <a:lstStyle/>
                     <a:p>
                       <a:r>
-                        <a:rPr sz="1400" b="0" i="0">
+                        <a:rPr sz="1300" b="0" i="0">
                           <a:solidFill>
                             <a:srgbClr val="1A1440"/>
                           </a:solidFill>
@@ -11944,14 +12038,14 @@
                   </a:tcPr>
                 </a:tc>
               </a:tr>
-              <a:tr h="369824">
+              <a:tr h="577088">
                 <a:tc>
                   <a:txBody>
                     <a:bodyPr/>
                     <a:lstStyle/>
                     <a:p>
                       <a:r>
-                        <a:rPr sz="1400" b="0" i="0">
+                        <a:rPr sz="1300" b="0" i="0">
                           <a:solidFill>
                             <a:srgbClr val="1A1440"/>
                           </a:solidFill>
@@ -11973,7 +12067,7 @@
                     <a:lstStyle/>
                     <a:p>
                       <a:r>
-                        <a:rPr sz="1400" b="0" i="0">
+                        <a:rPr sz="1300" b="0" i="0">
                           <a:solidFill>
                             <a:srgbClr val="1A1440"/>
                           </a:solidFill>
@@ -11995,7 +12089,7 @@
                     <a:lstStyle/>
                     <a:p>
                       <a:r>
-                        <a:rPr sz="1400" b="0" i="0">
+                        <a:rPr sz="1300" b="0" i="0">
                           <a:solidFill>
                             <a:srgbClr val="1A1440"/>
                           </a:solidFill>
@@ -12012,14 +12106,14 @@
                   </a:tcPr>
                 </a:tc>
               </a:tr>
-              <a:tr h="369824">
+              <a:tr h="577088">
                 <a:tc>
                   <a:txBody>
                     <a:bodyPr/>
                     <a:lstStyle/>
                     <a:p>
                       <a:r>
-                        <a:rPr sz="1400" b="0" i="0">
+                        <a:rPr sz="1300" b="0" i="0">
                           <a:solidFill>
                             <a:srgbClr val="1A1440"/>
                           </a:solidFill>
@@ -12041,7 +12135,7 @@
                     <a:lstStyle/>
                     <a:p>
                       <a:r>
-                        <a:rPr sz="1400" b="0" i="0">
+                        <a:rPr sz="1300" b="0" i="0">
                           <a:solidFill>
                             <a:srgbClr val="1A1440"/>
                           </a:solidFill>
@@ -12063,7 +12157,7 @@
                     <a:lstStyle/>
                     <a:p>
                       <a:r>
-                        <a:rPr sz="1400" b="0" i="0">
+                        <a:rPr sz="1300" b="0" i="0">
                           <a:solidFill>
                             <a:srgbClr val="1A1440"/>
                           </a:solidFill>
@@ -12080,14 +12174,14 @@
                   </a:tcPr>
                 </a:tc>
               </a:tr>
-              <a:tr h="369824">
+              <a:tr h="352552">
                 <a:tc>
                   <a:txBody>
                     <a:bodyPr/>
                     <a:lstStyle/>
                     <a:p>
                       <a:r>
-                        <a:rPr sz="1400" b="0" i="0">
+                        <a:rPr sz="1300" b="0" i="0">
                           <a:solidFill>
                             <a:srgbClr val="1A1440"/>
                           </a:solidFill>
@@ -12109,7 +12203,7 @@
                     <a:lstStyle/>
                     <a:p>
                       <a:r>
-                        <a:rPr sz="1400" b="0" i="0">
+                        <a:rPr sz="1300" b="0" i="0">
                           <a:solidFill>
                             <a:srgbClr val="1A1440"/>
                           </a:solidFill>
@@ -12131,7 +12225,7 @@
                     <a:lstStyle/>
                     <a:p>
                       <a:r>
-                        <a:rPr sz="1400" b="0" i="0">
+                        <a:rPr sz="1300" b="0" i="0">
                           <a:solidFill>
                             <a:srgbClr val="1A1440"/>
                           </a:solidFill>
@@ -12154,14 +12248,14 @@
       </p:graphicFrame>
       <p:sp>
         <p:nvSpPr>
-          <p:cNvPr id="13" name="TextBox 12"/>
-          <p:cNvSpPr txBox="1"/>
-          <p:nvPr/>
-        </p:nvSpPr>
-        <p:spPr>
-          <a:xfrm>
-            <a:off x="530352" y="5499608"/>
-            <a:ext cx="11130991" cy="495807"/>
+          <p:cNvPr id="14" name="TextBox 13"/>
+          <p:cNvSpPr txBox="1"/>
+          <p:nvPr/>
+        </p:nvSpPr>
+        <p:spPr>
+          <a:xfrm>
+            <a:off x="6370167" y="4855464"/>
+            <a:ext cx="5291175" cy="1158240"/>
           </a:xfrm>
           <a:prstGeom prst="rect">
             <a:avLst/>
@@ -12186,6 +12280,22 @@
                 </a:solidFill>
                 <a:latin typeface="Calibri"/>
               </a:rPr>
+              <a:t>&lt;!-- /sync:rubric:W03/mock --&gt;</a:t>
+            </a:r>
+          </a:p>
+          <a:p>
+            <a:pPr>
+              <a:spcAft>
+                <a:spcPts val="800"/>
+              </a:spcAft>
+            </a:pPr>
+            <a:r>
+              <a:rPr sz="1600" b="0" i="0">
+                <a:solidFill>
+                  <a:srgbClr val="1A1440"/>
+                </a:solidFill>
+                <a:latin typeface="Calibri"/>
+              </a:rPr>
               <a:t>Mock R1 runs for every learner on Thursday 22 October.</a:t>
             </a:r>
           </a:p>
@@ -12193,7 +12303,7 @@
       </p:sp>
       <p:sp>
         <p:nvSpPr>
-          <p:cNvPr id="14" name="Oval 13"/>
+          <p:cNvPr id="15" name="Oval 14"/>
           <p:cNvSpPr/>
           <p:nvPr/>
         </p:nvSpPr>
@@ -12237,7 +12347,7 @@
       </p:sp>
       <p:sp>
         <p:nvSpPr>
-          <p:cNvPr id="15" name="TextBox 14"/>
+          <p:cNvPr id="16" name="TextBox 15"/>
           <p:cNvSpPr txBox="1"/>
           <p:nvPr/>
         </p:nvSpPr>
@@ -12272,7 +12382,7 @@
       </p:sp>
       <p:sp>
         <p:nvSpPr>
-          <p:cNvPr id="16" name="Oval 15"/>
+          <p:cNvPr id="17" name="Oval 16"/>
           <p:cNvSpPr/>
           <p:nvPr/>
         </p:nvSpPr>
@@ -12316,7 +12426,7 @@
       </p:sp>
       <p:sp>
         <p:nvSpPr>
-          <p:cNvPr id="17" name="TextBox 16"/>
+          <p:cNvPr id="18" name="TextBox 17"/>
           <p:cNvSpPr txBox="1"/>
           <p:nvPr/>
         </p:nvSpPr>
@@ -12351,7 +12461,7 @@
       </p:sp>
       <p:sp>
         <p:nvSpPr>
-          <p:cNvPr id="18" name="Oval 17"/>
+          <p:cNvPr id="19" name="Oval 18"/>
           <p:cNvSpPr/>
           <p:nvPr/>
         </p:nvSpPr>
@@ -12395,7 +12505,7 @@
       </p:sp>
       <p:sp>
         <p:nvSpPr>
-          <p:cNvPr id="19" name="TextBox 18"/>
+          <p:cNvPr id="20" name="TextBox 19"/>
           <p:cNvSpPr txBox="1"/>
           <p:nvPr/>
         </p:nvSpPr>
@@ -12430,7 +12540,7 @@
       </p:sp>
       <p:sp>
         <p:nvSpPr>
-          <p:cNvPr id="20" name="TextBox 19"/>
+          <p:cNvPr id="21" name="TextBox 20"/>
           <p:cNvSpPr txBox="1"/>
           <p:nvPr/>
         </p:nvSpPr>
@@ -12706,14 +12816,53 @@
       </p:sp>
       <p:sp>
         <p:nvSpPr>
-          <p:cNvPr id="9" name="Rounded Rectangle 8"/>
+          <p:cNvPr id="9" name="TextBox 8"/>
+          <p:cNvSpPr txBox="1"/>
+          <p:nvPr/>
+        </p:nvSpPr>
+        <p:spPr>
+          <a:xfrm>
+            <a:off x="530352" y="1938782"/>
+            <a:ext cx="11130991" cy="461264"/>
+          </a:xfrm>
+          <a:prstGeom prst="rect">
+            <a:avLst/>
+          </a:prstGeom>
+          <a:noFill/>
+        </p:spPr>
+        <p:txBody>
+          <a:bodyPr wrap="square" anchor="t" lIns="0" rIns="0" tIns="0" bIns="0">
+            <a:spAutoFit/>
+          </a:bodyPr>
+          <a:lstStyle/>
+          <a:p>
+            <a:pPr>
+              <a:spcAft>
+                <a:spcPts val="700"/>
+              </a:spcAft>
+            </a:pPr>
+            <a:r>
+              <a:rPr sz="1400" b="0" i="0">
+                <a:solidFill>
+                  <a:srgbClr val="1A1440"/>
+                </a:solidFill>
+                <a:latin typeface="Calibri"/>
+              </a:rPr>
+              <a:t>&lt;!-- sync:rubric:W03/gd --&gt;</a:t>
+            </a:r>
+          </a:p>
+        </p:txBody>
+      </p:sp>
+      <p:sp>
+        <p:nvSpPr>
+          <p:cNvPr id="10" name="Rounded Rectangle 9"/>
           <p:cNvSpPr/>
           <p:nvPr/>
         </p:nvSpPr>
         <p:spPr>
           <a:xfrm>
-            <a:off x="530352" y="1956816"/>
-            <a:ext cx="11130991" cy="541020"/>
+            <a:off x="530352" y="2528062"/>
+            <a:ext cx="11130991" cy="505460"/>
           </a:xfrm>
           <a:prstGeom prst="roundRect">
             <a:avLst>
@@ -12754,14 +12903,14 @@
       </p:sp>
       <p:sp>
         <p:nvSpPr>
-          <p:cNvPr id="10" name="Rounded Rectangle 9"/>
+          <p:cNvPr id="11" name="Rounded Rectangle 10"/>
           <p:cNvSpPr/>
           <p:nvPr/>
         </p:nvSpPr>
         <p:spPr>
           <a:xfrm>
-            <a:off x="676656" y="2084832"/>
-            <a:ext cx="45720" cy="284988"/>
+            <a:off x="676656" y="2656078"/>
+            <a:ext cx="45720" cy="249428"/>
           </a:xfrm>
           <a:prstGeom prst="roundRect">
             <a:avLst>
@@ -12800,14 +12949,14 @@
       </p:sp>
       <p:sp>
         <p:nvSpPr>
-          <p:cNvPr id="11" name="TextBox 10"/>
-          <p:cNvSpPr txBox="1"/>
-          <p:nvPr/>
-        </p:nvSpPr>
-        <p:spPr>
-          <a:xfrm>
-            <a:off x="877824" y="2075688"/>
-            <a:ext cx="10564063" cy="358140"/>
+          <p:cNvPr id="12" name="TextBox 11"/>
+          <p:cNvSpPr txBox="1"/>
+          <p:nvPr/>
+        </p:nvSpPr>
+        <p:spPr>
+          <a:xfrm>
+            <a:off x="877824" y="2646934"/>
+            <a:ext cx="10564063" cy="322580"/>
           </a:xfrm>
           <a:prstGeom prst="rect">
             <a:avLst/>
@@ -12821,7 +12970,7 @@
           <a:lstStyle/>
           <a:p>
             <a:r>
-              <a:rPr sz="1500" b="1">
+              <a:rPr sz="1300" b="1">
                 <a:solidFill>
                   <a:srgbClr val="5B3FD6"/>
                 </a:solidFill>
@@ -12830,7 +12979,7 @@
               <a:t>Group discussion, 30 marks. </a:t>
             </a:r>
             <a:r>
-              <a:rPr sz="1500" b="0" i="0">
+              <a:rPr sz="1300" b="0" i="0">
                 <a:solidFill>
                   <a:srgbClr val="1A1440"/>
                 </a:solidFill>
@@ -12843,15 +12992,15 @@
       </p:sp>
       <p:graphicFrame>
         <p:nvGraphicFramePr>
-          <p:cNvPr id="12" name="Table 11"/>
+          <p:cNvPr id="13" name="Table 12"/>
           <p:cNvGraphicFramePr>
             <a:graphicFrameLocks noGrp="1"/>
           </p:cNvGraphicFramePr>
           <p:nvPr/>
         </p:nvGraphicFramePr>
         <p:xfrm>
-          <a:off x="530352" y="2662428"/>
-          <a:ext cx="11130990" cy="2090928"/>
+          <a:off x="530352" y="3198114"/>
+          <a:ext cx="11130990" cy="1676400"/>
         </p:xfrm>
         <a:graphic>
           <a:graphicData uri="http://schemas.openxmlformats.org/drawingml/2006/table">
@@ -12860,18 +13009,18 @@
                 <a:tableStyleId>{2D5ABB26-0587-4C30-8999-92F81FD0307C}</a:tableStyleId>
               </a:tblPr>
               <a:tblGrid>
-                <a:gridCol w="2935389"/>
+                <a:gridCol w="2655394"/>
                 <a:gridCol w="914400"/>
-                <a:gridCol w="7281201"/>
+                <a:gridCol w="7561196"/>
               </a:tblGrid>
-              <a:tr h="369824">
+              <a:tr h="335280">
                 <a:tc>
                   <a:txBody>
                     <a:bodyPr/>
                     <a:lstStyle/>
                     <a:p>
                       <a:r>
-                        <a:rPr sz="1450" b="1" i="0">
+                        <a:rPr sz="1250" b="1" i="0">
                           <a:solidFill>
                             <a:srgbClr val="FFFFFF"/>
                           </a:solidFill>
@@ -12893,7 +13042,7 @@
                     <a:lstStyle/>
                     <a:p>
                       <a:r>
-                        <a:rPr sz="1450" b="1" i="0">
+                        <a:rPr sz="1250" b="1" i="0">
                           <a:solidFill>
                             <a:srgbClr val="FFFFFF"/>
                           </a:solidFill>
@@ -12915,7 +13064,7 @@
                     <a:lstStyle/>
                     <a:p>
                       <a:r>
-                        <a:rPr sz="1450" b="1" i="0">
+                        <a:rPr sz="1250" b="1" i="0">
                           <a:solidFill>
                             <a:srgbClr val="FFFFFF"/>
                           </a:solidFill>
@@ -12932,14 +13081,14 @@
                   </a:tcPr>
                 </a:tc>
               </a:tr>
-              <a:tr h="369824">
+              <a:tr h="335280">
                 <a:tc>
                   <a:txBody>
                     <a:bodyPr/>
                     <a:lstStyle/>
                     <a:p>
                       <a:r>
-                        <a:rPr sz="1400" b="0" i="0">
+                        <a:rPr sz="1200" b="0" i="0">
                           <a:solidFill>
                             <a:srgbClr val="1A1440"/>
                           </a:solidFill>
@@ -12961,7 +13110,7 @@
                     <a:lstStyle/>
                     <a:p>
                       <a:r>
-                        <a:rPr sz="1400" b="0" i="0">
+                        <a:rPr sz="1200" b="0" i="0">
                           <a:solidFill>
                             <a:srgbClr val="1A1440"/>
                           </a:solidFill>
@@ -12983,7 +13132,7 @@
                     <a:lstStyle/>
                     <a:p>
                       <a:r>
-                        <a:rPr sz="1400" b="0" i="0">
+                        <a:rPr sz="1200" b="0" i="0">
                           <a:solidFill>
                             <a:srgbClr val="1A1440"/>
                           </a:solidFill>
@@ -13000,14 +13149,14 @@
                   </a:tcPr>
                 </a:tc>
               </a:tr>
-              <a:tr h="369824">
+              <a:tr h="335280">
                 <a:tc>
                   <a:txBody>
                     <a:bodyPr/>
                     <a:lstStyle/>
                     <a:p>
                       <a:r>
-                        <a:rPr sz="1400" b="0" i="0">
+                        <a:rPr sz="1200" b="0" i="0">
                           <a:solidFill>
                             <a:srgbClr val="1A1440"/>
                           </a:solidFill>
@@ -13029,7 +13178,7 @@
                     <a:lstStyle/>
                     <a:p>
                       <a:r>
-                        <a:rPr sz="1400" b="0" i="0">
+                        <a:rPr sz="1200" b="0" i="0">
                           <a:solidFill>
                             <a:srgbClr val="1A1440"/>
                           </a:solidFill>
@@ -13051,7 +13200,7 @@
                     <a:lstStyle/>
                     <a:p>
                       <a:r>
-                        <a:rPr sz="1400" b="0" i="0">
+                        <a:rPr sz="1200" b="0" i="0">
                           <a:solidFill>
                             <a:srgbClr val="1A1440"/>
                           </a:solidFill>
@@ -13068,14 +13217,14 @@
                   </a:tcPr>
                 </a:tc>
               </a:tr>
-              <a:tr h="611632">
+              <a:tr h="335280">
                 <a:tc>
                   <a:txBody>
                     <a:bodyPr/>
                     <a:lstStyle/>
                     <a:p>
                       <a:r>
-                        <a:rPr sz="1400" b="0" i="0">
+                        <a:rPr sz="1200" b="0" i="0">
                           <a:solidFill>
                             <a:srgbClr val="1A1440"/>
                           </a:solidFill>
@@ -13097,7 +13246,7 @@
                     <a:lstStyle/>
                     <a:p>
                       <a:r>
-                        <a:rPr sz="1400" b="0" i="0">
+                        <a:rPr sz="1200" b="0" i="0">
                           <a:solidFill>
                             <a:srgbClr val="1A1440"/>
                           </a:solidFill>
@@ -13119,7 +13268,7 @@
                     <a:lstStyle/>
                     <a:p>
                       <a:r>
-                        <a:rPr sz="1400" b="0" i="0">
+                        <a:rPr sz="1200" b="0" i="0">
                           <a:solidFill>
                             <a:srgbClr val="1A1440"/>
                           </a:solidFill>
@@ -13136,14 +13285,14 @@
                   </a:tcPr>
                 </a:tc>
               </a:tr>
-              <a:tr h="369824">
+              <a:tr h="335280">
                 <a:tc>
                   <a:txBody>
                     <a:bodyPr/>
                     <a:lstStyle/>
                     <a:p>
                       <a:r>
-                        <a:rPr sz="1400" b="0" i="0">
+                        <a:rPr sz="1200" b="0" i="0">
                           <a:solidFill>
                             <a:srgbClr val="1A1440"/>
                           </a:solidFill>
@@ -13165,7 +13314,7 @@
                     <a:lstStyle/>
                     <a:p>
                       <a:r>
-                        <a:rPr sz="1400" b="0" i="0">
+                        <a:rPr sz="1200" b="0" i="0">
                           <a:solidFill>
                             <a:srgbClr val="1A1440"/>
                           </a:solidFill>
@@ -13187,7 +13336,7 @@
                     <a:lstStyle/>
                     <a:p>
                       <a:r>
-                        <a:rPr sz="1400" b="0" i="0">
+                        <a:rPr sz="1200" b="0" i="0">
                           <a:solidFill>
                             <a:srgbClr val="1A1440"/>
                           </a:solidFill>
@@ -13210,14 +13359,14 @@
       </p:graphicFrame>
       <p:sp>
         <p:nvSpPr>
-          <p:cNvPr id="13" name="TextBox 12"/>
-          <p:cNvSpPr txBox="1"/>
-          <p:nvPr/>
-        </p:nvSpPr>
-        <p:spPr>
-          <a:xfrm>
-            <a:off x="530352" y="5009388"/>
-            <a:ext cx="11130991" cy="495807"/>
+          <p:cNvPr id="14" name="TextBox 13"/>
+          <p:cNvSpPr txBox="1"/>
+          <p:nvPr/>
+        </p:nvSpPr>
+        <p:spPr>
+          <a:xfrm>
+            <a:off x="530352" y="5130546"/>
+            <a:ext cx="11130991" cy="812800"/>
           </a:xfrm>
           <a:prstGeom prst="rect">
             <a:avLst/>
@@ -13232,16 +13381,32 @@
           <a:p>
             <a:pPr>
               <a:spcAft>
-                <a:spcPts val="800"/>
+                <a:spcPts val="700"/>
               </a:spcAft>
             </a:pPr>
             <a:r>
-              <a:rPr sz="1600" b="0" i="0">
+              <a:rPr sz="1400" b="0" i="0">
                 <a:solidFill>
                   <a:srgbClr val="1A1440"/>
                 </a:solidFill>
                 <a:latin typeface="Calibri"/>
               </a:rPr>
+              <a:t>&lt;!-- /sync:rubric:W03/gd --&gt;</a:t>
+            </a:r>
+          </a:p>
+          <a:p>
+            <a:pPr>
+              <a:spcAft>
+                <a:spcPts val="700"/>
+              </a:spcAft>
+            </a:pPr>
+            <a:r>
+              <a:rPr sz="1400" b="0" i="0">
+                <a:solidFill>
+                  <a:srgbClr val="1A1440"/>
+                </a:solidFill>
+                <a:latin typeface="Calibri"/>
+              </a:rPr>
               <a:t>The GD rounds run on Friday 23 October and close on the morning of Saturday 24 October.</a:t>
             </a:r>
           </a:p>
@@ -13249,7 +13414,7 @@
       </p:sp>
       <p:sp>
         <p:nvSpPr>
-          <p:cNvPr id="14" name="Oval 13"/>
+          <p:cNvPr id="15" name="Oval 14"/>
           <p:cNvSpPr/>
           <p:nvPr/>
         </p:nvSpPr>
@@ -13293,7 +13458,7 @@
       </p:sp>
       <p:sp>
         <p:nvSpPr>
-          <p:cNvPr id="15" name="TextBox 14"/>
+          <p:cNvPr id="16" name="TextBox 15"/>
           <p:cNvSpPr txBox="1"/>
           <p:nvPr/>
         </p:nvSpPr>
@@ -13328,7 +13493,7 @@
       </p:sp>
       <p:sp>
         <p:nvSpPr>
-          <p:cNvPr id="16" name="Oval 15"/>
+          <p:cNvPr id="17" name="Oval 16"/>
           <p:cNvSpPr/>
           <p:nvPr/>
         </p:nvSpPr>
@@ -13372,7 +13537,7 @@
       </p:sp>
       <p:sp>
         <p:nvSpPr>
-          <p:cNvPr id="17" name="TextBox 16"/>
+          <p:cNvPr id="18" name="TextBox 17"/>
           <p:cNvSpPr txBox="1"/>
           <p:nvPr/>
         </p:nvSpPr>
@@ -13407,7 +13572,7 @@
       </p:sp>
       <p:sp>
         <p:nvSpPr>
-          <p:cNvPr id="18" name="Oval 17"/>
+          <p:cNvPr id="19" name="Oval 18"/>
           <p:cNvSpPr/>
           <p:nvPr/>
         </p:nvSpPr>
@@ -13451,7 +13616,7 @@
       </p:sp>
       <p:sp>
         <p:nvSpPr>
-          <p:cNvPr id="19" name="TextBox 18"/>
+          <p:cNvPr id="20" name="TextBox 19"/>
           <p:cNvSpPr txBox="1"/>
           <p:nvPr/>
         </p:nvSpPr>
@@ -13486,7 +13651,7 @@
       </p:sp>
       <p:sp>
         <p:nvSpPr>
-          <p:cNvPr id="20" name="TextBox 19"/>
+          <p:cNvPr id="21" name="TextBox 20"/>
           <p:cNvSpPr txBox="1"/>
           <p:nvPr/>
         </p:nvSpPr>
@@ -14273,7 +14438,7 @@
       </p:sp>
       <p:pic>
         <p:nvPicPr>
-          <p:cNvPr id="9" name="mermaid diagram" descr="c56837485a6fad29.png"/>
+          <p:cNvPr id="9" name="mermaid diagram" descr="938d9ac51fbe16cf.png"/>
           <p:cNvPicPr>
             <a:picLocks noChangeAspect="1"/>
           </p:cNvPicPr>
@@ -14947,7 +15112,7 @@
       </p:sp>
       <p:pic>
         <p:nvPicPr>
-          <p:cNvPr id="9" name="mermaid diagram" descr="cc65b150ac99033b.png"/>
+          <p:cNvPr id="9" name="mermaid diagram" descr="4ec865978fea8ec9.png"/>
           <p:cNvPicPr>
             <a:picLocks noChangeAspect="1"/>
           </p:cNvPicPr>
@@ -15621,7 +15786,7 @@
       </p:sp>
       <p:pic>
         <p:nvPicPr>
-          <p:cNvPr id="9" name="mermaid diagram" descr="4ac7ebb1a98e4b61.png"/>
+          <p:cNvPr id="9" name="mermaid diagram" descr="084659eebfc1e089.png"/>
           <p:cNvPicPr>
             <a:picLocks noChangeAspect="1"/>
           </p:cNvPicPr>
@@ -17171,7 +17336,7 @@
       </p:sp>
       <p:pic>
         <p:nvPicPr>
-          <p:cNvPr id="9" name="mermaid diagram" descr="a74912ed8320beb9.png"/>
+          <p:cNvPr id="9" name="mermaid diagram" descr="ed93e4ffd4697241.png"/>
           <p:cNvPicPr>
             <a:picLocks noChangeAspect="1"/>
           </p:cNvPicPr>
@@ -17845,7 +18010,7 @@
       </p:sp>
       <p:pic>
         <p:nvPicPr>
-          <p:cNvPr id="9" name="mermaid diagram" descr="2da022ac15378f68.png"/>
+          <p:cNvPr id="9" name="mermaid diagram" descr="b4c3b2fd6152d87d.png"/>
           <p:cNvPicPr>
             <a:picLocks noChangeAspect="1"/>
           </p:cNvPicPr>
@@ -22296,7 +22461,7 @@
                 </a:solidFill>
                 <a:latin typeface="Calibri"/>
               </a:rPr>
-              <a:t>Kalpa Health runs laboratories and walk-in clinics in six cities.</a:t>
+              <a:t>Kalpa Health runs laboratories and patient service centres in six US metros.</a:t>
             </a:r>
           </a:p>
         </p:txBody>
@@ -22523,7 +22688,7 @@
                 </a:solidFill>
                 <a:latin typeface="Calibri"/>
               </a:rPr>
-              <a:t>Diagnostic laboratories and walk-in clinics in Bengaluru, Mumbai, Delhi, Chennai, Hyderabad and Pune: one laboratory and two clinics in each city.</a:t>
+              <a:t>Diagnostic laboratories and patient service centres in Dallas, Phoenix, New York, Chicago, Atlanta and Philadelphia: one laboratory and two centres in each metro.</a:t>
             </a:r>
           </a:p>
         </p:txBody>
@@ -23053,7 +23218,7 @@
                 </a:solidFill>
                 <a:latin typeface="Calibri"/>
               </a:rPr>
-              <a:t>TEST VOLUMES, Q1 TO Q2</a:t>
+              <a:t>TEST VOLUMES, Q2 TO Q3</a:t>
             </a:r>
           </a:p>
         </p:txBody>
@@ -23351,7 +23516,7 @@
                 </a:solidFill>
                 <a:latin typeface="Calibri"/>
               </a:rPr>
-              <a:t>CITIES</a:t>
+              <a:t>METROS</a:t>
             </a:r>
           </a:p>
         </p:txBody>
@@ -23386,7 +23551,7 @@
                 </a:solidFill>
                 <a:latin typeface="Calibri"/>
               </a:rPr>
-              <a:t>6 laboratories, 12 clinics</a:t>
+              <a:t>6 laboratories, 12 centres</a:t>
             </a:r>
           </a:p>
         </p:txBody>
@@ -24105,7 +24270,7 @@
         </p:nvSpPr>
         <p:spPr>
           <a:xfrm>
-            <a:off x="530352" y="1956816"/>
+            <a:off x="530352" y="1955292"/>
             <a:ext cx="11130991" cy="862584"/>
           </a:xfrm>
           <a:prstGeom prst="roundRect">
@@ -24165,7 +24330,7 @@
         </p:nvSpPr>
         <p:spPr>
           <a:xfrm>
-            <a:off x="758952" y="2159507"/>
+            <a:off x="758952" y="2157983"/>
             <a:ext cx="457200" cy="457200"/>
           </a:xfrm>
           <a:prstGeom prst="ellipse">
@@ -24217,7 +24382,7 @@
         </p:blipFill>
         <p:spPr>
           <a:xfrm>
-            <a:off x="868680" y="2269236"/>
+            <a:off x="868680" y="2267712"/>
             <a:ext cx="237744" cy="237744"/>
           </a:xfrm>
           <a:prstGeom prst="rect">
@@ -24233,7 +24398,7 @@
         </p:nvSpPr>
         <p:spPr>
           <a:xfrm>
-            <a:off x="1399031" y="2103120"/>
+            <a:off x="1399031" y="2101596"/>
             <a:ext cx="9987991" cy="160401"/>
           </a:xfrm>
           <a:prstGeom prst="rect">
@@ -24268,7 +24433,7 @@
         </p:nvSpPr>
         <p:spPr>
           <a:xfrm>
-            <a:off x="1399031" y="2322576"/>
+            <a:off x="1399031" y="2321052"/>
             <a:ext cx="9987991" cy="423672"/>
           </a:xfrm>
           <a:prstGeom prst="rect">
@@ -24303,8 +24468,8 @@
           <p:nvPr/>
         </p:nvGraphicFramePr>
         <p:xfrm>
-          <a:off x="530352" y="2983992"/>
-          <a:ext cx="11130990" cy="2460752"/>
+          <a:off x="530352" y="2982468"/>
+          <a:ext cx="11130990" cy="2944368"/>
         </p:xfrm>
         <a:graphic>
           <a:graphicData uri="http://schemas.openxmlformats.org/drawingml/2006/table">
@@ -24313,8 +24478,8 @@
                 <a:tableStyleId>{2D5ABB26-0587-4C30-8999-92F81FD0307C}</a:tableStyleId>
               </a:tblPr>
               <a:tblGrid>
-                <a:gridCol w="3721894"/>
-                <a:gridCol w="7409096"/>
+                <a:gridCol w="4831123"/>
+                <a:gridCol w="6299867"/>
               </a:tblGrid>
               <a:tr h="369824">
                 <a:tc>
@@ -24362,7 +24527,7 @@
                   </a:tcPr>
                 </a:tc>
               </a:tr>
-              <a:tr h="369824">
+              <a:tr h="611632">
                 <a:tc>
                   <a:txBody>
                     <a:bodyPr/>
@@ -24421,7 +24586,7 @@
                           </a:solidFill>
                           <a:latin typeface="Calibri"/>
                         </a:rPr>
-                        <a:t>The clinics' operations head</a:t>
+                        <a:t>The patient service centres' operations head</a:t>
                       </a:r>
                     </a:p>
                   </a:txBody>
@@ -24443,7 +24608,7 @@
                           </a:solidFill>
                           <a:latin typeface="Calibri"/>
                         </a:rPr>
-                        <a:t>Bookings fell in two cities in Q2: how far, and why?</a:t>
+                        <a:t>Bookings fell in two metros in Q3: how far, and why?</a:t>
                       </a:r>
                     </a:p>
                   </a:txBody>
@@ -24489,7 +24654,7 @@
                           </a:solidFill>
                           <a:latin typeface="Calibri"/>
                         </a:rPr>
-                        <a:t>Invoices and collections disagree: which are unpaid, and can I trust the figure?</a:t>
+                        <a:t>Claims and collections disagree: which are unpaid, and can I trust the figure?</a:t>
                       </a:r>
                     </a:p>
                   </a:txBody>
@@ -24513,7 +24678,7 @@
                           </a:solidFill>
                           <a:latin typeface="Calibri"/>
                         </a:rPr>
-                        <a:t>The clinics' operations head</a:t>
+                        <a:t>The patient service centres' operations head</a:t>
                       </a:r>
                     </a:p>
                   </a:txBody>
@@ -24535,7 +24700,7 @@
                           </a:solidFill>
                           <a:latin typeface="Calibri"/>
                         </a:rPr>
-                        <a:t>KH-HYD-03 has the worst no-show rate: is the clinic really worse?</a:t>
+                        <a:t>KH-ATL-03 has the worst no-show rate: is the centre really worse?</a:t>
                       </a:r>
                     </a:p>
                   </a:txBody>
@@ -24546,7 +24711,7 @@
                   </a:tcPr>
                 </a:tc>
               </a:tr>
-              <a:tr h="369824">
+              <a:tr h="611632">
                 <a:tc>
                   <a:txBody>
                     <a:bodyPr/>
@@ -24581,7 +24746,7 @@
                           </a:solidFill>
                           <a:latin typeface="Calibri"/>
                         </a:rPr>
-                        <a:t>Our free home-collection offer lifted bookings 9 percent: did it work?</a:t>
+                        <a:t>Our free at-home collection offer lifted bookings 9 percent: did it work?</a:t>
                       </a:r>
                     </a:p>
                   </a:txBody>
@@ -25111,7 +25276,7 @@
       </p:sp>
       <p:pic>
         <p:nvPicPr>
-          <p:cNvPr id="9" name="mermaid diagram" descr="fee05a805e6f9e75.png"/>
+          <p:cNvPr id="9" name="mermaid diagram" descr="47dd6adb2bd77226.png"/>
           <p:cNvPicPr>
             <a:picLocks noChangeAspect="1"/>
           </p:cNvPicPr>
@@ -25265,7 +25430,7 @@
                 </a:solidFill>
                 <a:latin typeface="Calibri"/>
               </a:rPr>
-              <a:t>Between Meera's question and Dr Menon's, what changed? Answer as a letter: a) the method, since a laboratory business needs analytical techniques of its own; b) the vocabulary and the cost of an error, while the method holds; c) nothing at all, since bookings and invoices look like orders and payments; d) the tools, since a lab's data needs a new stack and a new language.</a:t>
+              <a:t>Between Meera's question and Dr Menon's, what changed? Answer as a letter: a) the method, since a laboratory business needs analytical techniques of its own; b) the vocabulary and the cost of an error, while the method holds; c) nothing at all, since bookings and claims look like orders and payments; d) the tools, since a lab's data needs a new stack and a new language.</a:t>
             </a:r>
           </a:p>
         </p:txBody>
@@ -26067,7 +26232,7 @@
                           </a:solidFill>
                           <a:latin typeface="Calibri"/>
                         </a:rPr>
-                        <a:t>A patient's test, a clinic, a diagnosis</a:t>
+                        <a:t>A patient's test, a centre, a diagnosis</a:t>
                       </a:r>
                     </a:p>
                   </a:txBody>
@@ -27588,7 +27753,7 @@
       </p:sp>
       <p:pic>
         <p:nvPicPr>
-          <p:cNvPr id="11" name="Picture 10" descr="indian-rupee_bfbdea5c5650.png"/>
+          <p:cNvPr id="11" name="Picture 10" descr="dollar-sign_246857d1b10a.png"/>
           <p:cNvPicPr>
             <a:picLocks noChangeAspect="1"/>
           </p:cNvPicPr>
@@ -27937,7 +28102,7 @@
                 </a:solidFill>
                 <a:latin typeface="Calibri"/>
               </a:rPr>
-              <a:t>Bookings fell in two cities in Q2: how far, and why.</a:t>
+              <a:t>Bookings fell in two metros in Q3: how far, and why.</a:t>
             </a:r>
           </a:p>
         </p:txBody>
@@ -28164,7 +28329,7 @@
                 </a:solidFill>
                 <a:latin typeface="Calibri"/>
               </a:rPr>
-              <a:t>Invoices and collections disagree: which are unpaid, and what is the true figure.</a:t>
+              <a:t>Claims and remittances disagree: which are unpaid, and what is the true figure.</a:t>
             </a:r>
           </a:p>
         </p:txBody>
@@ -28391,7 +28556,7 @@
                 </a:solidFill>
                 <a:latin typeface="Calibri"/>
               </a:rPr>
-              <a:t>One clinic's no-show rate looks worse: real or noise, and what a fair comparison needs.</a:t>
+              <a:t>One centre's no-show rate looks worse: real or noise, and what a fair comparison needs.</a:t>
             </a:r>
           </a:p>
         </p:txBody>
@@ -28618,7 +28783,7 @@
                 </a:solidFill>
                 <a:latin typeface="Calibri"/>
               </a:rPr>
-              <a:t>Free home collection "lifted bookings 9 percent": cause or coincidence.</a:t>
+              <a:t>Free at-home collection "lifted bookings 9 percent": cause or coincidence.</a:t>
             </a:r>
           </a:p>
         </p:txBody>
